--- a/public/FinSight.pptx
+++ b/public/FinSight.pptx
@@ -13,6 +13,7 @@
     <p:sldId id="261" r:id="rId12"/>
     <p:sldId id="262" r:id="rId13"/>
     <p:sldId id="263" r:id="rId14"/>
+    <p:sldId id="264" r:id="rId15"/>
   </p:sldIdLst>
   <p:sldSz cx="12191695" cy="6858000" type="screen4x3"/>
   <p:notesSz cx="6858000" cy="9144000"/>
@@ -3147,50 +3148,7 @@
         <p:spPr>
           <a:xfrm>
             <a:off x="0" y="0"/>
-            <a:ext cx="4709160" cy="6858000"/>
-          </a:xfrm>
-          <a:prstGeom prst="rect">
-            <a:avLst/>
-          </a:prstGeom>
-          <a:solidFill>
-            <a:srgbClr val="0B1220"/>
-          </a:solidFill>
-          <a:ln>
-            <a:noFill/>
-          </a:ln>
-        </p:spPr>
-        <p:style>
-          <a:lnRef idx="1">
-            <a:schemeClr val="accent1"/>
-          </a:lnRef>
-          <a:fillRef idx="3">
-            <a:schemeClr val="accent1"/>
-          </a:fillRef>
-          <a:effectRef idx="2">
-            <a:schemeClr val="accent1"/>
-          </a:effectRef>
-          <a:fontRef idx="minor">
-            <a:schemeClr val="lt1"/>
-          </a:fontRef>
-        </p:style>
-        <p:txBody>
-          <a:bodyPr rtlCol="0" anchor="ctr"/>
-          <a:lstStyle/>
-          <a:p>
-            <a:pPr algn="ctr"/>
-          </a:p>
-        </p:txBody>
-      </p:sp>
-      <p:sp>
-        <p:nvSpPr>
-          <p:cNvPr id="4" name="Rectangle 3"/>
-          <p:cNvSpPr/>
-          <p:nvPr/>
-        </p:nvSpPr>
-        <p:spPr>
-          <a:xfrm>
-            <a:off x="0" y="0"/>
-            <a:ext cx="109728" cy="6858000"/>
+            <a:ext cx="146304" cy="6858000"/>
           </a:xfrm>
           <a:prstGeom prst="rect">
             <a:avLst/>
@@ -3226,25 +3184,147 @@
       </p:sp>
       <p:sp>
         <p:nvSpPr>
-          <p:cNvPr id="5" name="Rounded Rectangle 4"/>
+          <p:cNvPr id="4" name="TextBox 3"/>
+          <p:cNvSpPr txBox="1"/>
+          <p:nvPr/>
+        </p:nvSpPr>
+        <p:spPr>
+          <a:xfrm>
+            <a:off x="640080" y="411480"/>
+            <a:ext cx="7315200" cy="310896"/>
+          </a:xfrm>
+          <a:prstGeom prst="rect">
+            <a:avLst/>
+          </a:prstGeom>
+          <a:noFill/>
+        </p:spPr>
+        <p:txBody>
+          <a:bodyPr wrap="square" lIns="0" rIns="0" tIns="0" bIns="0"/>
+          <a:lstStyle/>
+          <a:p>
+            <a:pPr algn="l">
+              <a:spcBef>
+                <a:spcPts val="0"/>
+              </a:spcBef>
+              <a:spcAft>
+                <a:spcPts val="0"/>
+              </a:spcAft>
+            </a:pPr>
+            <a:r>
+              <a:rPr sz="1600" b="1" i="0">
+                <a:solidFill>
+                  <a:srgbClr val="0F9F6E"/>
+                </a:solidFill>
+                <a:latin typeface="Calibri"/>
+              </a:rPr>
+              <a:t>TRACK 3  ·  FINTECH AI</a:t>
+            </a:r>
+          </a:p>
+        </p:txBody>
+      </p:sp>
+      <p:sp>
+        <p:nvSpPr>
+          <p:cNvPr id="5" name="TextBox 4"/>
+          <p:cNvSpPr txBox="1"/>
+          <p:nvPr/>
+        </p:nvSpPr>
+        <p:spPr>
+          <a:xfrm>
+            <a:off x="640080" y="1051560"/>
+            <a:ext cx="10972800" cy="1051560"/>
+          </a:xfrm>
+          <a:prstGeom prst="rect">
+            <a:avLst/>
+          </a:prstGeom>
+          <a:noFill/>
+        </p:spPr>
+        <p:txBody>
+          <a:bodyPr wrap="square" lIns="0" rIns="0" tIns="0" bIns="0"/>
+          <a:lstStyle/>
+          <a:p>
+            <a:pPr algn="l">
+              <a:spcBef>
+                <a:spcPts val="0"/>
+              </a:spcBef>
+              <a:spcAft>
+                <a:spcPts val="0"/>
+              </a:spcAft>
+            </a:pPr>
+            <a:r>
+              <a:rPr sz="6000" b="1" i="0">
+                <a:solidFill>
+                  <a:srgbClr val="0F172A"/>
+                </a:solidFill>
+                <a:latin typeface="Calibri"/>
+              </a:rPr>
+              <a:t>FinSight AI</a:t>
+            </a:r>
+          </a:p>
+        </p:txBody>
+      </p:sp>
+      <p:sp>
+        <p:nvSpPr>
+          <p:cNvPr id="6" name="TextBox 5"/>
+          <p:cNvSpPr txBox="1"/>
+          <p:nvPr/>
+        </p:nvSpPr>
+        <p:spPr>
+          <a:xfrm>
+            <a:off x="640080" y="2148840"/>
+            <a:ext cx="10058400" cy="640080"/>
+          </a:xfrm>
+          <a:prstGeom prst="rect">
+            <a:avLst/>
+          </a:prstGeom>
+          <a:noFill/>
+        </p:spPr>
+        <p:txBody>
+          <a:bodyPr wrap="square" lIns="0" rIns="0" tIns="0" bIns="0"/>
+          <a:lstStyle/>
+          <a:p>
+            <a:pPr algn="l">
+              <a:spcBef>
+                <a:spcPts val="0"/>
+              </a:spcBef>
+              <a:spcAft>
+                <a:spcPts val="0"/>
+              </a:spcAft>
+            </a:pPr>
+            <a:r>
+              <a:rPr sz="2800" b="0" i="0">
+                <a:solidFill>
+                  <a:srgbClr val="3E4C63"/>
+                </a:solidFill>
+                <a:latin typeface="Calibri"/>
+              </a:rPr>
+              <a:t>Will you run out of cash before payday?</a:t>
+            </a:r>
+          </a:p>
+        </p:txBody>
+      </p:sp>
+      <p:sp>
+        <p:nvSpPr>
+          <p:cNvPr id="7" name="Rounded Rectangle 6"/>
           <p:cNvSpPr/>
           <p:nvPr/>
         </p:nvSpPr>
         <p:spPr>
           <a:xfrm>
-            <a:off x="566928" y="502920"/>
-            <a:ext cx="384048" cy="384048"/>
+            <a:off x="640080" y="3246120"/>
+            <a:ext cx="3291840" cy="1417320"/>
           </a:xfrm>
           <a:prstGeom prst="roundRect">
             <a:avLst>
-              <a:gd name="adj" fmla="val 22000"/>
+              <a:gd name="adj" fmla="val 8000"/>
             </a:avLst>
           </a:prstGeom>
           <a:solidFill>
-            <a:srgbClr val="0F9F6E"/>
+            <a:srgbClr val="F4F7FB"/>
           </a:solidFill>
-          <a:ln>
-            <a:noFill/>
+          <a:ln w="15875">
+            <a:solidFill>
+              <a:srgbClr val="D5DEEA"/>
+            </a:solidFill>
           </a:ln>
         </p:spPr>
         <p:style>
@@ -3271,62 +3351,22 @@
       </p:sp>
       <p:sp>
         <p:nvSpPr>
-          <p:cNvPr id="6" name="TextBox 5"/>
-          <p:cNvSpPr txBox="1"/>
-          <p:nvPr/>
-        </p:nvSpPr>
-        <p:spPr>
-          <a:xfrm>
-            <a:off x="566928" y="530352"/>
-            <a:ext cx="384048" cy="347472"/>
-          </a:xfrm>
-          <a:prstGeom prst="rect">
-            <a:avLst/>
-          </a:prstGeom>
-          <a:noFill/>
-        </p:spPr>
-        <p:txBody>
-          <a:bodyPr wrap="square" lIns="0" rIns="0" tIns="0" bIns="0" anchor="ctr"/>
-          <a:lstStyle/>
-          <a:p>
-            <a:pPr algn="ctr">
-              <a:spcBef>
-                <a:spcPts val="0"/>
-              </a:spcBef>
-              <a:spcAft>
-                <a:spcPts val="0"/>
-              </a:spcAft>
-            </a:pPr>
-            <a:r>
-              <a:rPr sz="1800" b="1" i="0">
-                <a:solidFill>
-                  <a:srgbClr val="04281D"/>
-                </a:solidFill>
-                <a:latin typeface="Calibri"/>
-              </a:rPr>
-              <a:t>F</a:t>
-            </a:r>
-          </a:p>
-        </p:txBody>
-      </p:sp>
-      <p:sp>
-        <p:nvSpPr>
-          <p:cNvPr id="7" name="TextBox 6"/>
-          <p:cNvSpPr txBox="1"/>
-          <p:nvPr/>
-        </p:nvSpPr>
-        <p:spPr>
-          <a:xfrm>
-            <a:off x="1060704" y="530352"/>
-            <a:ext cx="2743200" cy="347472"/>
-          </a:xfrm>
-          <a:prstGeom prst="rect">
-            <a:avLst/>
-          </a:prstGeom>
-          <a:noFill/>
-        </p:spPr>
-        <p:txBody>
-          <a:bodyPr wrap="square" lIns="0" rIns="0" tIns="0" bIns="0" anchor="ctr"/>
+          <p:cNvPr id="8" name="TextBox 7"/>
+          <p:cNvSpPr txBox="1"/>
+          <p:nvPr/>
+        </p:nvSpPr>
+        <p:spPr>
+          <a:xfrm>
+            <a:off x="868680" y="3429000"/>
+            <a:ext cx="2834640" cy="502920"/>
+          </a:xfrm>
+          <a:prstGeom prst="rect">
+            <a:avLst/>
+          </a:prstGeom>
+          <a:noFill/>
+        </p:spPr>
+        <p:txBody>
+          <a:bodyPr wrap="square" lIns="0" rIns="0" tIns="0" bIns="0"/>
           <a:lstStyle/>
           <a:p>
             <a:pPr algn="l">
@@ -3338,35 +3378,35 @@
               </a:spcAft>
             </a:pPr>
             <a:r>
-              <a:rPr sz="2000" b="1" i="0">
-                <a:solidFill>
-                  <a:srgbClr val="FFFFFF"/>
-                </a:solidFill>
-                <a:latin typeface="Calibri"/>
-              </a:rPr>
-              <a:t>FinSight</a:t>
-            </a:r>
-          </a:p>
-        </p:txBody>
-      </p:sp>
-      <p:sp>
-        <p:nvSpPr>
-          <p:cNvPr id="8" name="TextBox 7"/>
-          <p:cNvSpPr txBox="1"/>
-          <p:nvPr/>
-        </p:nvSpPr>
-        <p:spPr>
-          <a:xfrm>
-            <a:off x="566928" y="1965960"/>
-            <a:ext cx="3749039" cy="1554480"/>
-          </a:xfrm>
-          <a:prstGeom prst="rect">
-            <a:avLst/>
-          </a:prstGeom>
-          <a:noFill/>
-        </p:spPr>
-        <p:txBody>
-          <a:bodyPr wrap="square" lIns="0" rIns="0" tIns="0" bIns="0" anchor="t"/>
+              <a:rPr sz="2200" b="1" i="0">
+                <a:solidFill>
+                  <a:srgbClr val="0F172A"/>
+                </a:solidFill>
+                <a:latin typeface="Calibri"/>
+              </a:rPr>
+              <a:t>Amisha Singh</a:t>
+            </a:r>
+          </a:p>
+        </p:txBody>
+      </p:sp>
+      <p:sp>
+        <p:nvSpPr>
+          <p:cNvPr id="9" name="TextBox 8"/>
+          <p:cNvSpPr txBox="1"/>
+          <p:nvPr/>
+        </p:nvSpPr>
+        <p:spPr>
+          <a:xfrm>
+            <a:off x="868680" y="3977639"/>
+            <a:ext cx="2834640" cy="411480"/>
+          </a:xfrm>
+          <a:prstGeom prst="rect">
+            <a:avLst/>
+          </a:prstGeom>
+          <a:noFill/>
+        </p:spPr>
+        <p:txBody>
+          <a:bodyPr wrap="square" lIns="0" rIns="0" tIns="0" bIns="0"/>
           <a:lstStyle/>
           <a:p>
             <a:pPr algn="l">
@@ -3378,195 +3418,40 @@
               </a:spcAft>
             </a:pPr>
             <a:r>
-              <a:rPr sz="3600" b="1" i="0">
-                <a:solidFill>
-                  <a:srgbClr val="FFFFFF"/>
-                </a:solidFill>
-                <a:latin typeface="Calibri"/>
-              </a:rPr>
-              <a:t>See the day
-cash runs out.</a:t>
-            </a:r>
-          </a:p>
-        </p:txBody>
-      </p:sp>
-      <p:sp>
-        <p:nvSpPr>
-          <p:cNvPr id="9" name="TextBox 8"/>
-          <p:cNvSpPr txBox="1"/>
-          <p:nvPr/>
-        </p:nvSpPr>
-        <p:spPr>
-          <a:xfrm>
-            <a:off x="566928" y="3794760"/>
-            <a:ext cx="3749039" cy="1051560"/>
-          </a:xfrm>
-          <a:prstGeom prst="rect">
-            <a:avLst/>
-          </a:prstGeom>
-          <a:noFill/>
-        </p:spPr>
-        <p:txBody>
-          <a:bodyPr wrap="square" lIns="0" rIns="0" tIns="0" bIns="0" anchor="t"/>
-          <a:lstStyle/>
-          <a:p>
-            <a:pPr algn="l">
-              <a:spcBef>
-                <a:spcPts val="0"/>
-              </a:spcBef>
-              <a:spcAft>
-                <a:spcPts val="0"/>
-              </a:spcAft>
-            </a:pPr>
-            <a:r>
               <a:rPr sz="1600" b="0" i="0">
                 <a:solidFill>
-                  <a:srgbClr val="C5D0E0"/>
-                </a:solidFill>
-                <a:latin typeface="Calibri"/>
-              </a:rPr>
-              <a:t>A small-business cash forecast. Both files in. The day cash hits zero, and the bill that causes it.</a:t>
-            </a:r>
-          </a:p>
-        </p:txBody>
-      </p:sp>
-      <p:sp>
-        <p:nvSpPr>
-          <p:cNvPr id="10" name="TextBox 9"/>
-          <p:cNvSpPr txBox="1"/>
-          <p:nvPr/>
-        </p:nvSpPr>
-        <p:spPr>
-          <a:xfrm>
-            <a:off x="566928" y="5806440"/>
-            <a:ext cx="3840480" cy="365760"/>
-          </a:xfrm>
-          <a:prstGeom prst="rect">
-            <a:avLst/>
-          </a:prstGeom>
-          <a:noFill/>
-        </p:spPr>
-        <p:txBody>
-          <a:bodyPr wrap="none">
-            <a:spAutoFit/>
-          </a:bodyPr>
-          <a:lstStyle/>
-          <a:p>
-            <a:r>
-              <a:rPr sz="1500" b="1" i="0" u="sng">
-                <a:solidFill>
-                  <a:srgbClr val="6EE7B7"/>
-                </a:solidFill>
-                <a:latin typeface="Calibri"/>
-                <a:hlinkClick r:id="rId2"/>
-              </a:rPr>
-              <a:t>finsight-off.vercel.app</a:t>
-            </a:r>
-          </a:p>
-        </p:txBody>
-      </p:sp>
-      <p:sp>
-        <p:nvSpPr>
-          <p:cNvPr id="11" name="TextBox 10"/>
-          <p:cNvSpPr txBox="1"/>
-          <p:nvPr/>
-        </p:nvSpPr>
-        <p:spPr>
-          <a:xfrm>
-            <a:off x="5212080" y="640080"/>
-            <a:ext cx="7315200" cy="256032"/>
-          </a:xfrm>
-          <a:prstGeom prst="rect">
-            <a:avLst/>
-          </a:prstGeom>
-          <a:noFill/>
-        </p:spPr>
-        <p:txBody>
-          <a:bodyPr wrap="square" lIns="0" rIns="0" tIns="0" bIns="0" anchor="t"/>
-          <a:lstStyle/>
-          <a:p>
-            <a:pPr algn="l">
-              <a:spcBef>
-                <a:spcPts val="0"/>
-              </a:spcBef>
-              <a:spcAft>
-                <a:spcPts val="0"/>
-              </a:spcAft>
-            </a:pPr>
-            <a:r>
-              <a:rPr sz="1200" b="1" i="0">
-                <a:solidFill>
-                  <a:srgbClr val="0E7490"/>
-                </a:solidFill>
-                <a:latin typeface="Calibri"/>
-              </a:rPr>
-              <a:t>FOR SMALL BUSINESSES</a:t>
-            </a:r>
-          </a:p>
-        </p:txBody>
-      </p:sp>
-      <p:sp>
-        <p:nvSpPr>
-          <p:cNvPr id="12" name="TextBox 11"/>
-          <p:cNvSpPr txBox="1"/>
-          <p:nvPr/>
-        </p:nvSpPr>
-        <p:spPr>
-          <a:xfrm>
-            <a:off x="5212080" y="960120"/>
-            <a:ext cx="6400800" cy="1371600"/>
-          </a:xfrm>
-          <a:prstGeom prst="rect">
-            <a:avLst/>
-          </a:prstGeom>
-          <a:noFill/>
-        </p:spPr>
-        <p:txBody>
-          <a:bodyPr wrap="square" lIns="0" rIns="0" tIns="0" bIns="0" anchor="t"/>
-          <a:lstStyle/>
-          <a:p>
-            <a:pPr algn="l">
-              <a:spcBef>
-                <a:spcPts val="0"/>
-              </a:spcBef>
-              <a:spcAft>
-                <a:spcPts val="0"/>
-              </a:spcAft>
-            </a:pPr>
-            <a:r>
-              <a:rPr sz="4400" b="1" i="0">
-                <a:solidFill>
-                  <a:srgbClr val="0F172A"/>
-                </a:solidFill>
-                <a:latin typeface="Calibri"/>
-              </a:rPr>
-              <a:t>Will you run
-out of cash?</a:t>
-            </a:r>
-          </a:p>
-        </p:txBody>
-      </p:sp>
-      <p:sp>
-        <p:nvSpPr>
-          <p:cNvPr id="13" name="Rounded Rectangle 12"/>
+                  <a:srgbClr val="3E4C63"/>
+                </a:solidFill>
+                <a:latin typeface="Calibri"/>
+              </a:rPr>
+              <a:t>Manipal University</a:t>
+            </a:r>
+          </a:p>
+        </p:txBody>
+      </p:sp>
+      <p:sp>
+        <p:nvSpPr>
+          <p:cNvPr id="10" name="Rounded Rectangle 9"/>
           <p:cNvSpPr/>
           <p:nvPr/>
         </p:nvSpPr>
         <p:spPr>
           <a:xfrm>
-            <a:off x="5212080" y="2880360"/>
-            <a:ext cx="6309360" cy="932688"/>
+            <a:off x="4206240" y="3246120"/>
+            <a:ext cx="3291840" cy="1417320"/>
           </a:xfrm>
           <a:prstGeom prst="roundRect">
             <a:avLst>
-              <a:gd name="adj" fmla="val 12000"/>
+              <a:gd name="adj" fmla="val 8000"/>
             </a:avLst>
           </a:prstGeom>
           <a:solidFill>
-            <a:srgbClr val="F3F6FB"/>
+            <a:srgbClr val="F4F7FB"/>
           </a:solidFill>
-          <a:ln>
-            <a:noFill/>
+          <a:ln w="15875">
+            <a:solidFill>
+              <a:srgbClr val="D5DEEA"/>
+            </a:solidFill>
           </a:ln>
         </p:spPr>
         <p:style>
@@ -3593,22 +3478,22 @@
       </p:sp>
       <p:sp>
         <p:nvSpPr>
-          <p:cNvPr id="14" name="TextBox 13"/>
-          <p:cNvSpPr txBox="1"/>
-          <p:nvPr/>
-        </p:nvSpPr>
-        <p:spPr>
-          <a:xfrm>
-            <a:off x="5440680" y="3026664"/>
-            <a:ext cx="5852160" cy="310896"/>
-          </a:xfrm>
-          <a:prstGeom prst="rect">
-            <a:avLst/>
-          </a:prstGeom>
-          <a:noFill/>
-        </p:spPr>
-        <p:txBody>
-          <a:bodyPr wrap="square" lIns="0" rIns="0" tIns="0" bIns="0" anchor="t"/>
+          <p:cNvPr id="11" name="TextBox 10"/>
+          <p:cNvSpPr txBox="1"/>
+          <p:nvPr/>
+        </p:nvSpPr>
+        <p:spPr>
+          <a:xfrm>
+            <a:off x="4434840" y="3429000"/>
+            <a:ext cx="2834640" cy="502920"/>
+          </a:xfrm>
+          <a:prstGeom prst="rect">
+            <a:avLst/>
+          </a:prstGeom>
+          <a:noFill/>
+        </p:spPr>
+        <p:txBody>
+          <a:bodyPr wrap="square" lIns="0" rIns="0" tIns="0" bIns="0"/>
           <a:lstStyle/>
           <a:p>
             <a:pPr algn="l">
@@ -3620,35 +3505,35 @@
               </a:spcAft>
             </a:pPr>
             <a:r>
-              <a:rPr sz="1800" b="1" i="0">
+              <a:rPr sz="2200" b="1" i="0">
                 <a:solidFill>
                   <a:srgbClr val="0F172A"/>
                 </a:solidFill>
                 <a:latin typeface="Calibri"/>
               </a:rPr>
-              <a:t>90 days</a:t>
-            </a:r>
-          </a:p>
-        </p:txBody>
-      </p:sp>
-      <p:sp>
-        <p:nvSpPr>
-          <p:cNvPr id="15" name="TextBox 14"/>
-          <p:cNvSpPr txBox="1"/>
-          <p:nvPr/>
-        </p:nvSpPr>
-        <p:spPr>
-          <a:xfrm>
-            <a:off x="5440680" y="3337560"/>
-            <a:ext cx="5852160" cy="329184"/>
-          </a:xfrm>
-          <a:prstGeom prst="rect">
-            <a:avLst/>
-          </a:prstGeom>
-          <a:noFill/>
-        </p:spPr>
-        <p:txBody>
-          <a:bodyPr wrap="square" lIns="0" rIns="0" tIns="0" bIns="0" anchor="t"/>
+              <a:t>Nancy Verma</a:t>
+            </a:r>
+          </a:p>
+        </p:txBody>
+      </p:sp>
+      <p:sp>
+        <p:nvSpPr>
+          <p:cNvPr id="12" name="TextBox 11"/>
+          <p:cNvSpPr txBox="1"/>
+          <p:nvPr/>
+        </p:nvSpPr>
+        <p:spPr>
+          <a:xfrm>
+            <a:off x="4434840" y="3977639"/>
+            <a:ext cx="2834640" cy="411480"/>
+          </a:xfrm>
+          <a:prstGeom prst="rect">
+            <a:avLst/>
+          </a:prstGeom>
+          <a:noFill/>
+        </p:spPr>
+        <p:txBody>
+          <a:bodyPr wrap="square" lIns="0" rIns="0" tIns="0" bIns="0"/>
           <a:lstStyle/>
           <a:p>
             <a:pPr algn="l">
@@ -3660,38 +3545,40 @@
               </a:spcAft>
             </a:pPr>
             <a:r>
-              <a:rPr sz="1400" b="0" i="0">
-                <a:solidFill>
-                  <a:srgbClr val="5B6B82"/>
-                </a:solidFill>
-                <a:latin typeface="Calibri"/>
-              </a:rPr>
-              <a:t>How far ahead the forecast looks.</a:t>
-            </a:r>
-          </a:p>
-        </p:txBody>
-      </p:sp>
-      <p:sp>
-        <p:nvSpPr>
-          <p:cNvPr id="16" name="Rounded Rectangle 15"/>
+              <a:rPr sz="1600" b="0" i="0">
+                <a:solidFill>
+                  <a:srgbClr val="3E4C63"/>
+                </a:solidFill>
+                <a:latin typeface="Calibri"/>
+              </a:rPr>
+              <a:t>Manipal University</a:t>
+            </a:r>
+          </a:p>
+        </p:txBody>
+      </p:sp>
+      <p:sp>
+        <p:nvSpPr>
+          <p:cNvPr id="13" name="Rounded Rectangle 12"/>
           <p:cNvSpPr/>
           <p:nvPr/>
         </p:nvSpPr>
         <p:spPr>
           <a:xfrm>
-            <a:off x="5212080" y="3931920"/>
-            <a:ext cx="6309360" cy="932688"/>
+            <a:off x="7772400" y="3246120"/>
+            <a:ext cx="3291840" cy="1417320"/>
           </a:xfrm>
           <a:prstGeom prst="roundRect">
             <a:avLst>
-              <a:gd name="adj" fmla="val 12000"/>
+              <a:gd name="adj" fmla="val 8000"/>
             </a:avLst>
           </a:prstGeom>
           <a:solidFill>
-            <a:srgbClr val="F3F6FB"/>
+            <a:srgbClr val="F4F7FB"/>
           </a:solidFill>
-          <a:ln>
-            <a:noFill/>
+          <a:ln w="15875">
+            <a:solidFill>
+              <a:srgbClr val="D5DEEA"/>
+            </a:solidFill>
           </a:ln>
         </p:spPr>
         <p:style>
@@ -3718,227 +3605,162 @@
       </p:sp>
       <p:sp>
         <p:nvSpPr>
+          <p:cNvPr id="14" name="TextBox 13"/>
+          <p:cNvSpPr txBox="1"/>
+          <p:nvPr/>
+        </p:nvSpPr>
+        <p:spPr>
+          <a:xfrm>
+            <a:off x="8001000" y="3429000"/>
+            <a:ext cx="2834640" cy="502920"/>
+          </a:xfrm>
+          <a:prstGeom prst="rect">
+            <a:avLst/>
+          </a:prstGeom>
+          <a:noFill/>
+        </p:spPr>
+        <p:txBody>
+          <a:bodyPr wrap="square" lIns="0" rIns="0" tIns="0" bIns="0"/>
+          <a:lstStyle/>
+          <a:p>
+            <a:pPr algn="l">
+              <a:spcBef>
+                <a:spcPts val="0"/>
+              </a:spcBef>
+              <a:spcAft>
+                <a:spcPts val="0"/>
+              </a:spcAft>
+            </a:pPr>
+            <a:r>
+              <a:rPr sz="2200" b="1" i="0">
+                <a:solidFill>
+                  <a:srgbClr val="0F172A"/>
+                </a:solidFill>
+                <a:latin typeface="Calibri"/>
+              </a:rPr>
+              <a:t>Team 65</a:t>
+            </a:r>
+          </a:p>
+        </p:txBody>
+      </p:sp>
+      <p:sp>
+        <p:nvSpPr>
+          <p:cNvPr id="15" name="TextBox 14"/>
+          <p:cNvSpPr txBox="1"/>
+          <p:nvPr/>
+        </p:nvSpPr>
+        <p:spPr>
+          <a:xfrm>
+            <a:off x="8001000" y="3977639"/>
+            <a:ext cx="2834640" cy="411480"/>
+          </a:xfrm>
+          <a:prstGeom prst="rect">
+            <a:avLst/>
+          </a:prstGeom>
+          <a:noFill/>
+        </p:spPr>
+        <p:txBody>
+          <a:bodyPr wrap="square" lIns="0" rIns="0" tIns="0" bIns="0"/>
+          <a:lstStyle/>
+          <a:p>
+            <a:pPr algn="l">
+              <a:spcBef>
+                <a:spcPts val="0"/>
+              </a:spcBef>
+              <a:spcAft>
+                <a:spcPts val="0"/>
+              </a:spcAft>
+            </a:pPr>
+            <a:r>
+              <a:rPr sz="1600" b="0" i="0">
+                <a:solidFill>
+                  <a:srgbClr val="3E4C63"/>
+                </a:solidFill>
+                <a:latin typeface="Calibri"/>
+              </a:rPr>
+              <a:t>Hackathon 4.0</a:t>
+            </a:r>
+          </a:p>
+        </p:txBody>
+      </p:sp>
+      <p:sp>
+        <p:nvSpPr>
+          <p:cNvPr id="16" name="TextBox 15"/>
+          <p:cNvSpPr txBox="1"/>
+          <p:nvPr/>
+        </p:nvSpPr>
+        <p:spPr>
+          <a:xfrm>
+            <a:off x="640080" y="5074920"/>
+            <a:ext cx="10058400" cy="822960"/>
+          </a:xfrm>
+          <a:prstGeom prst="rect">
+            <a:avLst/>
+          </a:prstGeom>
+          <a:noFill/>
+        </p:spPr>
+        <p:txBody>
+          <a:bodyPr wrap="square">
+            <a:spAutoFit/>
+          </a:bodyPr>
+          <a:lstStyle/>
+          <a:p>
+            <a:r>
+              <a:rPr sz="2000" b="1" i="0">
+                <a:solidFill>
+                  <a:srgbClr val="0F172A"/>
+                </a:solidFill>
+                <a:latin typeface="Calibri"/>
+              </a:rPr>
+              <a:t>Live demo   </a:t>
+            </a:r>
+            <a:r>
+              <a:rPr sz="2000" b="1" i="0" u="sng">
+                <a:solidFill>
+                  <a:srgbClr val="0E7490"/>
+                </a:solidFill>
+                <a:latin typeface="Calibri"/>
+                <a:hlinkClick r:id="rId2"/>
+              </a:rPr>
+              <a:t>https://finsight-off.vercel.app</a:t>
+            </a:r>
+          </a:p>
+          <a:p>
+            <a:pPr>
+              <a:spcBef>
+                <a:spcPts val="800"/>
+              </a:spcBef>
+            </a:pPr>
+            <a:r>
+              <a:rPr sz="1600" b="0" i="0">
+                <a:solidFill>
+                  <a:srgbClr val="3E4C63"/>
+                </a:solidFill>
+                <a:latin typeface="Calibri"/>
+              </a:rPr>
+              <a:t>Report figures are from the Harbor &amp; Co. synthetic books.</a:t>
+            </a:r>
+          </a:p>
+        </p:txBody>
+      </p:sp>
+      <p:sp>
+        <p:nvSpPr>
           <p:cNvPr id="17" name="TextBox 16"/>
           <p:cNvSpPr txBox="1"/>
           <p:nvPr/>
         </p:nvSpPr>
         <p:spPr>
           <a:xfrm>
-            <a:off x="5440680" y="4078224"/>
-            <a:ext cx="5852160" cy="310896"/>
-          </a:xfrm>
-          <a:prstGeom prst="rect">
-            <a:avLst/>
-          </a:prstGeom>
-          <a:noFill/>
-        </p:spPr>
-        <p:txBody>
-          <a:bodyPr wrap="square" lIns="0" rIns="0" tIns="0" bIns="0" anchor="t"/>
-          <a:lstStyle/>
-          <a:p>
-            <a:pPr algn="l">
-              <a:spcBef>
-                <a:spcPts val="0"/>
-              </a:spcBef>
-              <a:spcAft>
-                <a:spcPts val="0"/>
-              </a:spcAft>
-            </a:pPr>
-            <a:r>
-              <a:rPr sz="1800" b="1" i="0">
-                <a:solidFill>
-                  <a:srgbClr val="0F172A"/>
-                </a:solidFill>
-                <a:latin typeface="Calibri"/>
-              </a:rPr>
-              <a:t>2 files</a:t>
-            </a:r>
-          </a:p>
-        </p:txBody>
-      </p:sp>
-      <p:sp>
-        <p:nvSpPr>
-          <p:cNvPr id="18" name="TextBox 17"/>
-          <p:cNvSpPr txBox="1"/>
-          <p:nvPr/>
-        </p:nvSpPr>
-        <p:spPr>
-          <a:xfrm>
-            <a:off x="5440680" y="4389120"/>
-            <a:ext cx="5852160" cy="329184"/>
-          </a:xfrm>
-          <a:prstGeom prst="rect">
-            <a:avLst/>
-          </a:prstGeom>
-          <a:noFill/>
-        </p:spPr>
-        <p:txBody>
-          <a:bodyPr wrap="square" lIns="0" rIns="0" tIns="0" bIns="0" anchor="t"/>
-          <a:lstStyle/>
-          <a:p>
-            <a:pPr algn="l">
-              <a:spcBef>
-                <a:spcPts val="0"/>
-              </a:spcBef>
-              <a:spcAft>
-                <a:spcPts val="0"/>
-              </a:spcAft>
-            </a:pPr>
-            <a:r>
-              <a:rPr sz="1400" b="0" i="0">
-                <a:solidFill>
-                  <a:srgbClr val="5B6B82"/>
-                </a:solidFill>
-                <a:latin typeface="Calibri"/>
-              </a:rPr>
-              <a:t>Bank statement and open invoices. Both are required.</a:t>
-            </a:r>
-          </a:p>
-        </p:txBody>
-      </p:sp>
-      <p:sp>
-        <p:nvSpPr>
-          <p:cNvPr id="19" name="Rounded Rectangle 18"/>
-          <p:cNvSpPr/>
-          <p:nvPr/>
-        </p:nvSpPr>
-        <p:spPr>
-          <a:xfrm>
-            <a:off x="5212080" y="4983479"/>
-            <a:ext cx="6309360" cy="932688"/>
-          </a:xfrm>
-          <a:prstGeom prst="roundRect">
-            <a:avLst>
-              <a:gd name="adj" fmla="val 12000"/>
-            </a:avLst>
-          </a:prstGeom>
-          <a:solidFill>
-            <a:srgbClr val="F3F6FB"/>
-          </a:solidFill>
-          <a:ln>
-            <a:noFill/>
-          </a:ln>
-        </p:spPr>
-        <p:style>
-          <a:lnRef idx="1">
-            <a:schemeClr val="accent1"/>
-          </a:lnRef>
-          <a:fillRef idx="3">
-            <a:schemeClr val="accent1"/>
-          </a:fillRef>
-          <a:effectRef idx="2">
-            <a:schemeClr val="accent1"/>
-          </a:effectRef>
-          <a:fontRef idx="minor">
-            <a:schemeClr val="lt1"/>
-          </a:fontRef>
-        </p:style>
-        <p:txBody>
-          <a:bodyPr rtlCol="0" anchor="ctr"/>
-          <a:lstStyle/>
-          <a:p>
-            <a:pPr algn="ctr"/>
-          </a:p>
-        </p:txBody>
-      </p:sp>
-      <p:sp>
-        <p:nvSpPr>
-          <p:cNvPr id="20" name="TextBox 19"/>
-          <p:cNvSpPr txBox="1"/>
-          <p:nvPr/>
-        </p:nvSpPr>
-        <p:spPr>
-          <a:xfrm>
-            <a:off x="5440680" y="5129783"/>
-            <a:ext cx="5852160" cy="310896"/>
-          </a:xfrm>
-          <a:prstGeom prst="rect">
-            <a:avLst/>
-          </a:prstGeom>
-          <a:noFill/>
-        </p:spPr>
-        <p:txBody>
-          <a:bodyPr wrap="square" lIns="0" rIns="0" tIns="0" bIns="0" anchor="t"/>
-          <a:lstStyle/>
-          <a:p>
-            <a:pPr algn="l">
-              <a:spcBef>
-                <a:spcPts val="0"/>
-              </a:spcBef>
-              <a:spcAft>
-                <a:spcPts val="0"/>
-              </a:spcAft>
-            </a:pPr>
-            <a:r>
-              <a:rPr sz="1800" b="1" i="0">
-                <a:solidFill>
-                  <a:srgbClr val="0F172A"/>
-                </a:solidFill>
-                <a:latin typeface="Calibri"/>
-              </a:rPr>
-              <a:t>In the browser</a:t>
-            </a:r>
-          </a:p>
-        </p:txBody>
-      </p:sp>
-      <p:sp>
-        <p:nvSpPr>
-          <p:cNvPr id="21" name="TextBox 20"/>
-          <p:cNvSpPr txBox="1"/>
-          <p:nvPr/>
-        </p:nvSpPr>
-        <p:spPr>
-          <a:xfrm>
-            <a:off x="5440680" y="5440679"/>
-            <a:ext cx="5852160" cy="329184"/>
-          </a:xfrm>
-          <a:prstGeom prst="rect">
-            <a:avLst/>
-          </a:prstGeom>
-          <a:noFill/>
-        </p:spPr>
-        <p:txBody>
-          <a:bodyPr wrap="square" lIns="0" rIns="0" tIns="0" bIns="0" anchor="t"/>
-          <a:lstStyle/>
-          <a:p>
-            <a:pPr algn="l">
-              <a:spcBef>
-                <a:spcPts val="0"/>
-              </a:spcBef>
-              <a:spcAft>
-                <a:spcPts val="0"/>
-              </a:spcAft>
-            </a:pPr>
-            <a:r>
-              <a:rPr sz="1400" b="0" i="0">
-                <a:solidFill>
-                  <a:srgbClr val="5B6B82"/>
-                </a:solidFill>
-                <a:latin typeface="Calibri"/>
-              </a:rPr>
-              <a:t>Nothing is uploaded to a server.</a:t>
-            </a:r>
-          </a:p>
-        </p:txBody>
-      </p:sp>
-      <p:sp>
-        <p:nvSpPr>
-          <p:cNvPr id="22" name="TextBox 21"/>
-          <p:cNvSpPr txBox="1"/>
-          <p:nvPr/>
-        </p:nvSpPr>
-        <p:spPr>
-          <a:xfrm>
-            <a:off x="10607040" y="6473952"/>
-            <a:ext cx="1097280" cy="256032"/>
-          </a:xfrm>
-          <a:prstGeom prst="rect">
-            <a:avLst/>
-          </a:prstGeom>
-          <a:noFill/>
-        </p:spPr>
-        <p:txBody>
-          <a:bodyPr wrap="square" lIns="0" rIns="0" tIns="0" bIns="0" anchor="t"/>
+            <a:off x="10698480" y="6446520"/>
+            <a:ext cx="1005840" cy="292608"/>
+          </a:xfrm>
+          <a:prstGeom prst="rect">
+            <a:avLst/>
+          </a:prstGeom>
+          <a:noFill/>
+        </p:spPr>
+        <p:txBody>
+          <a:bodyPr wrap="square" lIns="0" rIns="0" tIns="0" bIns="0"/>
           <a:lstStyle/>
           <a:p>
             <a:pPr algn="r">
@@ -3950,13 +3772,13 @@
               </a:spcAft>
             </a:pPr>
             <a:r>
-              <a:rPr sz="1200" b="1" i="0">
-                <a:solidFill>
-                  <a:srgbClr val="5B6B82"/>
-                </a:solidFill>
-                <a:latin typeface="Calibri"/>
-              </a:rPr>
-              <a:t>1  /  8</a:t>
+              <a:rPr sz="1400" b="1" i="0">
+                <a:solidFill>
+                  <a:srgbClr val="3E4C63"/>
+                </a:solidFill>
+                <a:latin typeface="Calibri"/>
+              </a:rPr>
+              <a:t>1  /  9</a:t>
             </a:r>
           </a:p>
         </p:txBody>
@@ -3994,7 +3816,7 @@
             <a:avLst/>
           </a:prstGeom>
           <a:solidFill>
-            <a:srgbClr val="F3F6FB"/>
+            <a:srgbClr val="F4F7FB"/>
           </a:solidFill>
           <a:ln>
             <a:noFill/>
@@ -4030,16 +3852,16 @@
         </p:nvSpPr>
         <p:spPr>
           <a:xfrm>
-            <a:off x="502920" y="347472"/>
-            <a:ext cx="7315200" cy="256032"/>
-          </a:xfrm>
-          <a:prstGeom prst="rect">
-            <a:avLst/>
-          </a:prstGeom>
-          <a:noFill/>
-        </p:spPr>
-        <p:txBody>
-          <a:bodyPr wrap="square" lIns="0" rIns="0" tIns="0" bIns="0" anchor="t"/>
+            <a:off x="502920" y="292608"/>
+            <a:ext cx="9144000" cy="292608"/>
+          </a:xfrm>
+          <a:prstGeom prst="rect">
+            <a:avLst/>
+          </a:prstGeom>
+          <a:noFill/>
+        </p:spPr>
+        <p:txBody>
+          <a:bodyPr wrap="square" lIns="0" rIns="0" tIns="0" bIns="0"/>
           <a:lstStyle/>
           <a:p>
             <a:pPr algn="l">
@@ -4051,13 +3873,13 @@
               </a:spcAft>
             </a:pPr>
             <a:r>
-              <a:rPr sz="1200" b="1" i="0">
-                <a:solidFill>
-                  <a:srgbClr val="0E7490"/>
-                </a:solidFill>
-                <a:latin typeface="Calibri"/>
-              </a:rPr>
-              <a:t>THE PROBLEM</a:t>
+              <a:rPr sz="1400" b="1" i="0">
+                <a:solidFill>
+                  <a:srgbClr val="0F9F6E"/>
+                </a:solidFill>
+                <a:latin typeface="Calibri"/>
+              </a:rPr>
+              <a:t>PROBLEM STATEMENT</a:t>
             </a:r>
           </a:p>
         </p:txBody>
@@ -4071,15 +3893,15 @@
         <p:spPr>
           <a:xfrm>
             <a:off x="502920" y="640080"/>
-            <a:ext cx="10972800" cy="1005840"/>
-          </a:xfrm>
-          <a:prstGeom prst="rect">
-            <a:avLst/>
-          </a:prstGeom>
-          <a:noFill/>
-        </p:spPr>
-        <p:txBody>
-          <a:bodyPr wrap="square" lIns="0" rIns="0" tIns="0" bIns="0" anchor="t"/>
+            <a:ext cx="10972800" cy="1051560"/>
+          </a:xfrm>
+          <a:prstGeom prst="rect">
+            <a:avLst/>
+          </a:prstGeom>
+          <a:noFill/>
+        </p:spPr>
+        <p:txBody>
+          <a:bodyPr wrap="square" lIns="0" rIns="0" tIns="0" bIns="0"/>
           <a:lstStyle/>
           <a:p>
             <a:pPr algn="l">
@@ -4097,7 +3919,8 @@
                 </a:solidFill>
                 <a:latin typeface="Calibri"/>
               </a:rPr>
-              <a:t>A busy month can still miss payroll.</a:t>
+              <a:t>A firm can be owed money
+and still miss payroll.</a:t>
             </a:r>
           </a:p>
         </p:txBody>
@@ -4110,8 +3933,8 @@
         </p:nvSpPr>
         <p:spPr>
           <a:xfrm>
-            <a:off x="502920" y="2057400"/>
-            <a:ext cx="3611880" cy="3794760"/>
+            <a:off x="502920" y="2880360"/>
+            <a:ext cx="3611880" cy="2880360"/>
           </a:xfrm>
           <a:prstGeom prst="roundRect">
             <a:avLst>
@@ -4121,9 +3944,9 @@
           <a:solidFill>
             <a:srgbClr val="FFFFFF"/>
           </a:solidFill>
-          <a:ln w="12700">
+          <a:ln w="15875">
             <a:solidFill>
-              <a:srgbClr val="E2E8F0"/>
+              <a:srgbClr val="D5DEEA"/>
             </a:solidFill>
           </a:ln>
         </p:spPr>
@@ -4157,16 +3980,16 @@
         </p:nvSpPr>
         <p:spPr>
           <a:xfrm>
-            <a:off x="758952" y="2286000"/>
-            <a:ext cx="3017520" cy="365760"/>
-          </a:xfrm>
-          <a:prstGeom prst="rect">
-            <a:avLst/>
-          </a:prstGeom>
-          <a:noFill/>
-        </p:spPr>
-        <p:txBody>
-          <a:bodyPr wrap="square" lIns="0" rIns="0" tIns="0" bIns="0" anchor="t"/>
+            <a:off x="758952" y="3108960"/>
+            <a:ext cx="3108960" cy="640080"/>
+          </a:xfrm>
+          <a:prstGeom prst="rect">
+            <a:avLst/>
+          </a:prstGeom>
+          <a:noFill/>
+        </p:spPr>
+        <p:txBody>
+          <a:bodyPr wrap="square" lIns="0" rIns="0" tIns="0" bIns="0"/>
           <a:lstStyle/>
           <a:p>
             <a:pPr algn="l">
@@ -4178,13 +4001,13 @@
               </a:spcAft>
             </a:pPr>
             <a:r>
-              <a:rPr sz="1400" b="1" i="0">
+              <a:rPr sz="3600" b="1" i="0">
                 <a:solidFill>
                   <a:srgbClr val="0F9F6E"/>
                 </a:solidFill>
                 <a:latin typeface="Calibri"/>
               </a:rPr>
-              <a:t>01</a:t>
+              <a:t>51%</a:t>
             </a:r>
           </a:p>
         </p:txBody>
@@ -4197,16 +4020,16 @@
         </p:nvSpPr>
         <p:spPr>
           <a:xfrm>
-            <a:off x="758952" y="2788920"/>
-            <a:ext cx="3108960" cy="1005840"/>
-          </a:xfrm>
-          <a:prstGeom prst="rect">
-            <a:avLst/>
-          </a:prstGeom>
-          <a:noFill/>
-        </p:spPr>
-        <p:txBody>
-          <a:bodyPr wrap="square" lIns="0" rIns="0" tIns="0" bIns="0" anchor="t"/>
+            <a:off x="758952" y="3840480"/>
+            <a:ext cx="3108960" cy="1554480"/>
+          </a:xfrm>
+          <a:prstGeom prst="rect">
+            <a:avLst/>
+          </a:prstGeom>
+          <a:noFill/>
+        </p:spPr>
+        <p:txBody>
+          <a:bodyPr wrap="square" lIns="0" rIns="0" tIns="0" bIns="0"/>
           <a:lstStyle/>
           <a:p>
             <a:pPr algn="l">
@@ -4218,67 +4041,27 @@
               </a:spcAft>
             </a:pPr>
             <a:r>
-              <a:rPr sz="2400" b="1" i="0">
+              <a:rPr sz="1600" b="0" i="0">
                 <a:solidFill>
                   <a:srgbClr val="0F172A"/>
                 </a:solidFill>
                 <a:latin typeface="Calibri"/>
               </a:rPr>
-              <a:t>Payday is fixed</a:t>
-            </a:r>
-          </a:p>
-        </p:txBody>
-      </p:sp>
-      <p:sp>
-        <p:nvSpPr>
-          <p:cNvPr id="8" name="TextBox 7"/>
-          <p:cNvSpPr txBox="1"/>
-          <p:nvPr/>
-        </p:nvSpPr>
-        <p:spPr>
-          <a:xfrm>
-            <a:off x="758952" y="3977639"/>
-            <a:ext cx="3108960" cy="1463040"/>
-          </a:xfrm>
-          <a:prstGeom prst="rect">
-            <a:avLst/>
-          </a:prstGeom>
-          <a:noFill/>
-        </p:spPr>
-        <p:txBody>
-          <a:bodyPr wrap="square" lIns="0" rIns="0" tIns="0" bIns="0" anchor="t"/>
-          <a:lstStyle/>
-          <a:p>
-            <a:pPr algn="l">
-              <a:spcBef>
-                <a:spcPts val="0"/>
-              </a:spcBef>
-              <a:spcAft>
-                <a:spcPts val="0"/>
-              </a:spcAft>
-            </a:pPr>
-            <a:r>
-              <a:rPr sz="1600" b="0" i="0">
-                <a:solidFill>
-                  <a:srgbClr val="5B6B82"/>
-                </a:solidFill>
-                <a:latin typeface="Calibri"/>
-              </a:rPr>
-              <a:t>Rent, payroll, and the loan land on their usual days. A late customer does not move them.</a:t>
-            </a:r>
-          </a:p>
-        </p:txBody>
-      </p:sp>
-      <p:sp>
-        <p:nvSpPr>
-          <p:cNvPr id="9" name="Rounded Rectangle 8"/>
+              <a:t>of small employer firms said uneven cash flow was a challenge in the prior year.</a:t>
+            </a:r>
+          </a:p>
+        </p:txBody>
+      </p:sp>
+      <p:sp>
+        <p:nvSpPr>
+          <p:cNvPr id="8" name="Rounded Rectangle 7"/>
           <p:cNvSpPr/>
           <p:nvPr/>
         </p:nvSpPr>
         <p:spPr>
           <a:xfrm>
-            <a:off x="4297680" y="2057400"/>
-            <a:ext cx="3611880" cy="3794760"/>
+            <a:off x="4297680" y="2880360"/>
+            <a:ext cx="3611880" cy="2880360"/>
           </a:xfrm>
           <a:prstGeom prst="roundRect">
             <a:avLst>
@@ -4288,9 +4071,9 @@
           <a:solidFill>
             <a:srgbClr val="FFFFFF"/>
           </a:solidFill>
-          <a:ln w="12700">
+          <a:ln w="15875">
             <a:solidFill>
-              <a:srgbClr val="E2E8F0"/>
+              <a:srgbClr val="D5DEEA"/>
             </a:solidFill>
           </a:ln>
         </p:spPr>
@@ -4318,22 +4101,62 @@
       </p:sp>
       <p:sp>
         <p:nvSpPr>
+          <p:cNvPr id="9" name="TextBox 8"/>
+          <p:cNvSpPr txBox="1"/>
+          <p:nvPr/>
+        </p:nvSpPr>
+        <p:spPr>
+          <a:xfrm>
+            <a:off x="4553712" y="3108960"/>
+            <a:ext cx="3108960" cy="640080"/>
+          </a:xfrm>
+          <a:prstGeom prst="rect">
+            <a:avLst/>
+          </a:prstGeom>
+          <a:noFill/>
+        </p:spPr>
+        <p:txBody>
+          <a:bodyPr wrap="square" lIns="0" rIns="0" tIns="0" bIns="0"/>
+          <a:lstStyle/>
+          <a:p>
+            <a:pPr algn="l">
+              <a:spcBef>
+                <a:spcPts val="0"/>
+              </a:spcBef>
+              <a:spcAft>
+                <a:spcPts val="0"/>
+              </a:spcAft>
+            </a:pPr>
+            <a:r>
+              <a:rPr sz="3600" b="1" i="0">
+                <a:solidFill>
+                  <a:srgbClr val="0F9F6E"/>
+                </a:solidFill>
+                <a:latin typeface="Calibri"/>
+              </a:rPr>
+              <a:t>56%</a:t>
+            </a:r>
+          </a:p>
+        </p:txBody>
+      </p:sp>
+      <p:sp>
+        <p:nvSpPr>
           <p:cNvPr id="10" name="TextBox 9"/>
           <p:cNvSpPr txBox="1"/>
           <p:nvPr/>
         </p:nvSpPr>
         <p:spPr>
           <a:xfrm>
-            <a:off x="4553712" y="2286000"/>
-            <a:ext cx="3017520" cy="365760"/>
-          </a:xfrm>
-          <a:prstGeom prst="rect">
-            <a:avLst/>
-          </a:prstGeom>
-          <a:noFill/>
-        </p:spPr>
-        <p:txBody>
-          <a:bodyPr wrap="square" lIns="0" rIns="0" tIns="0" bIns="0" anchor="t"/>
+            <a:off x="4553712" y="3840480"/>
+            <a:ext cx="3108960" cy="1554480"/>
+          </a:xfrm>
+          <a:prstGeom prst="rect">
+            <a:avLst/>
+          </a:prstGeom>
+          <a:noFill/>
+        </p:spPr>
+        <p:txBody>
+          <a:bodyPr wrap="square" lIns="0" rIns="0" tIns="0" bIns="0"/>
           <a:lstStyle/>
           <a:p>
             <a:pPr algn="l">
@@ -4345,107 +4168,27 @@
               </a:spcAft>
             </a:pPr>
             <a:r>
-              <a:rPr sz="1400" b="1" i="0">
-                <a:solidFill>
-                  <a:srgbClr val="0F9F6E"/>
-                </a:solidFill>
-                <a:latin typeface="Calibri"/>
-              </a:rPr>
-              <a:t>02</a:t>
-            </a:r>
-          </a:p>
-        </p:txBody>
-      </p:sp>
-      <p:sp>
-        <p:nvSpPr>
-          <p:cNvPr id="11" name="TextBox 10"/>
-          <p:cNvSpPr txBox="1"/>
-          <p:nvPr/>
-        </p:nvSpPr>
-        <p:spPr>
-          <a:xfrm>
-            <a:off x="4553712" y="2788920"/>
-            <a:ext cx="3108960" cy="1005840"/>
-          </a:xfrm>
-          <a:prstGeom prst="rect">
-            <a:avLst/>
-          </a:prstGeom>
-          <a:noFill/>
-        </p:spPr>
-        <p:txBody>
-          <a:bodyPr wrap="square" lIns="0" rIns="0" tIns="0" bIns="0" anchor="t"/>
-          <a:lstStyle/>
-          <a:p>
-            <a:pPr algn="l">
-              <a:spcBef>
-                <a:spcPts val="0"/>
-              </a:spcBef>
-              <a:spcAft>
-                <a:spcPts val="0"/>
-              </a:spcAft>
-            </a:pPr>
-            <a:r>
-              <a:rPr sz="2400" b="1" i="0">
+              <a:rPr sz="1600" b="0" i="0">
                 <a:solidFill>
                   <a:srgbClr val="0F172A"/>
                 </a:solidFill>
                 <a:latin typeface="Calibri"/>
               </a:rPr>
-              <a:t>Billed is not collected</a:t>
-            </a:r>
-          </a:p>
-        </p:txBody>
-      </p:sp>
-      <p:sp>
-        <p:nvSpPr>
-          <p:cNvPr id="12" name="TextBox 11"/>
-          <p:cNvSpPr txBox="1"/>
-          <p:nvPr/>
-        </p:nvSpPr>
-        <p:spPr>
-          <a:xfrm>
-            <a:off x="4553712" y="3977639"/>
-            <a:ext cx="3108960" cy="1463040"/>
-          </a:xfrm>
-          <a:prstGeom prst="rect">
-            <a:avLst/>
-          </a:prstGeom>
-          <a:noFill/>
-        </p:spPr>
-        <p:txBody>
-          <a:bodyPr wrap="square" lIns="0" rIns="0" tIns="0" bIns="0" anchor="t"/>
-          <a:lstStyle/>
-          <a:p>
-            <a:pPr algn="l">
-              <a:spcBef>
-                <a:spcPts val="0"/>
-              </a:spcBef>
-              <a:spcAft>
-                <a:spcPts val="0"/>
-              </a:spcAft>
-            </a:pPr>
-            <a:r>
-              <a:rPr sz="1600" b="0" i="0">
-                <a:solidFill>
-                  <a:srgbClr val="5B6B82"/>
-                </a:solidFill>
-                <a:latin typeface="Calibri"/>
-              </a:rPr>
-              <a:t>Invoices can be larger than spending, and cash still hits zero before the money arrives.</a:t>
-            </a:r>
-          </a:p>
-        </p:txBody>
-      </p:sp>
-      <p:sp>
-        <p:nvSpPr>
-          <p:cNvPr id="13" name="Rounded Rectangle 12"/>
+              <a:t>said the same about paying operating expenses such as payroll, rent, and inventory.</a:t>
+            </a:r>
+          </a:p>
+        </p:txBody>
+      </p:sp>
+      <p:sp>
+        <p:nvSpPr>
+          <p:cNvPr id="11" name="Rounded Rectangle 10"/>
           <p:cNvSpPr/>
           <p:nvPr/>
         </p:nvSpPr>
         <p:spPr>
           <a:xfrm>
-            <a:off x="8092440" y="2057400"/>
-            <a:ext cx="3611880" cy="3794760"/>
+            <a:off x="8092440" y="2880360"/>
+            <a:ext cx="3611880" cy="2880360"/>
           </a:xfrm>
           <a:prstGeom prst="roundRect">
             <a:avLst>
@@ -4455,9 +4198,9 @@
           <a:solidFill>
             <a:srgbClr val="FFFFFF"/>
           </a:solidFill>
-          <a:ln w="12700">
+          <a:ln w="15875">
             <a:solidFill>
-              <a:srgbClr val="E2E8F0"/>
+              <a:srgbClr val="D5DEEA"/>
             </a:solidFill>
           </a:ln>
         </p:spPr>
@@ -4485,22 +4228,102 @@
       </p:sp>
       <p:sp>
         <p:nvSpPr>
+          <p:cNvPr id="12" name="TextBox 11"/>
+          <p:cNvSpPr txBox="1"/>
+          <p:nvPr/>
+        </p:nvSpPr>
+        <p:spPr>
+          <a:xfrm>
+            <a:off x="8348472" y="3108960"/>
+            <a:ext cx="3108960" cy="640080"/>
+          </a:xfrm>
+          <a:prstGeom prst="rect">
+            <a:avLst/>
+          </a:prstGeom>
+          <a:noFill/>
+        </p:spPr>
+        <p:txBody>
+          <a:bodyPr wrap="square" lIns="0" rIns="0" tIns="0" bIns="0"/>
+          <a:lstStyle/>
+          <a:p>
+            <a:pPr algn="l">
+              <a:spcBef>
+                <a:spcPts val="0"/>
+              </a:spcBef>
+              <a:spcAft>
+                <a:spcPts val="0"/>
+              </a:spcAft>
+            </a:pPr>
+            <a:r>
+              <a:rPr sz="3600" b="1" i="0">
+                <a:solidFill>
+                  <a:srgbClr val="0F9F6E"/>
+                </a:solidFill>
+                <a:latin typeface="Calibri"/>
+              </a:rPr>
+              <a:t>39%</a:t>
+            </a:r>
+          </a:p>
+        </p:txBody>
+      </p:sp>
+      <p:sp>
+        <p:nvSpPr>
+          <p:cNvPr id="13" name="TextBox 12"/>
+          <p:cNvSpPr txBox="1"/>
+          <p:nvPr/>
+        </p:nvSpPr>
+        <p:spPr>
+          <a:xfrm>
+            <a:off x="8348472" y="3840480"/>
+            <a:ext cx="3108960" cy="1554480"/>
+          </a:xfrm>
+          <a:prstGeom prst="rect">
+            <a:avLst/>
+          </a:prstGeom>
+          <a:noFill/>
+        </p:spPr>
+        <p:txBody>
+          <a:bodyPr wrap="square" lIns="0" rIns="0" tIns="0" bIns="0"/>
+          <a:lstStyle/>
+          <a:p>
+            <a:pPr algn="l">
+              <a:spcBef>
+                <a:spcPts val="0"/>
+              </a:spcBef>
+              <a:spcAft>
+                <a:spcPts val="0"/>
+              </a:spcAft>
+            </a:pPr>
+            <a:r>
+              <a:rPr sz="1600" b="0" i="0">
+                <a:solidFill>
+                  <a:srgbClr val="0F172A"/>
+                </a:solidFill>
+                <a:latin typeface="Calibri"/>
+              </a:rPr>
+              <a:t>in a later survey said one late payment made it hard to cover payroll or bills.</a:t>
+            </a:r>
+          </a:p>
+        </p:txBody>
+      </p:sp>
+      <p:sp>
+        <p:nvSpPr>
           <p:cNvPr id="14" name="TextBox 13"/>
           <p:cNvSpPr txBox="1"/>
           <p:nvPr/>
         </p:nvSpPr>
         <p:spPr>
           <a:xfrm>
-            <a:off x="8348472" y="2286000"/>
-            <a:ext cx="3017520" cy="365760"/>
-          </a:xfrm>
-          <a:prstGeom prst="rect">
-            <a:avLst/>
-          </a:prstGeom>
-          <a:noFill/>
-        </p:spPr>
-        <p:txBody>
-          <a:bodyPr wrap="square" lIns="0" rIns="0" tIns="0" bIns="0" anchor="t"/>
+            <a:off x="502920" y="6446520"/>
+            <a:ext cx="6858000" cy="292608"/>
+          </a:xfrm>
+          <a:prstGeom prst="rect">
+            <a:avLst/>
+          </a:prstGeom>
+          <a:noFill/>
+        </p:spPr>
+        <p:txBody>
+          <a:bodyPr wrap="square" lIns="0" rIns="0" tIns="0" bIns="0"/>
           <a:lstStyle/>
           <a:p>
             <a:pPr algn="l">
@@ -4514,11 +4337,11 @@
             <a:r>
               <a:rPr sz="1400" b="1" i="0">
                 <a:solidFill>
-                  <a:srgbClr val="0F9F6E"/>
-                </a:solidFill>
-                <a:latin typeface="Calibri"/>
-              </a:rPr>
-              <a:t>03</a:t>
+                  <a:srgbClr val="3E4C63"/>
+                </a:solidFill>
+                <a:latin typeface="Calibri"/>
+              </a:rPr>
+              <a:t>FinSight AI  ·  Team 65  ·  Manipal University</a:t>
             </a:r>
           </a:p>
         </p:txBody>
@@ -4531,128 +4354,8 @@
         </p:nvSpPr>
         <p:spPr>
           <a:xfrm>
-            <a:off x="8348472" y="2788920"/>
-            <a:ext cx="3108960" cy="1005840"/>
-          </a:xfrm>
-          <a:prstGeom prst="rect">
-            <a:avLst/>
-          </a:prstGeom>
-          <a:noFill/>
-        </p:spPr>
-        <p:txBody>
-          <a:bodyPr wrap="square" lIns="0" rIns="0" tIns="0" bIns="0" anchor="t"/>
-          <a:lstStyle/>
-          <a:p>
-            <a:pPr algn="l">
-              <a:spcBef>
-                <a:spcPts val="0"/>
-              </a:spcBef>
-              <a:spcAft>
-                <a:spcPts val="0"/>
-              </a:spcAft>
-            </a:pPr>
-            <a:r>
-              <a:rPr sz="2400" b="1" i="0">
-                <a:solidFill>
-                  <a:srgbClr val="0F172A"/>
-                </a:solidFill>
-                <a:latin typeface="Calibri"/>
-              </a:rPr>
-              <a:t>Last month is a poor guide</a:t>
-            </a:r>
-          </a:p>
-        </p:txBody>
-      </p:sp>
-      <p:sp>
-        <p:nvSpPr>
-          <p:cNvPr id="16" name="TextBox 15"/>
-          <p:cNvSpPr txBox="1"/>
-          <p:nvPr/>
-        </p:nvSpPr>
-        <p:spPr>
-          <a:xfrm>
-            <a:off x="8348472" y="3977639"/>
-            <a:ext cx="3108960" cy="1463040"/>
-          </a:xfrm>
-          <a:prstGeom prst="rect">
-            <a:avLst/>
-          </a:prstGeom>
-          <a:noFill/>
-        </p:spPr>
-        <p:txBody>
-          <a:bodyPr wrap="square" lIns="0" rIns="0" tIns="0" bIns="0" anchor="t"/>
-          <a:lstStyle/>
-          <a:p>
-            <a:pPr algn="l">
-              <a:spcBef>
-                <a:spcPts val="0"/>
-              </a:spcBef>
-              <a:spcAft>
-                <a:spcPts val="0"/>
-              </a:spcAft>
-            </a:pPr>
-            <a:r>
-              <a:rPr sz="1600" b="0" i="0">
-                <a:solidFill>
-                  <a:srgbClr val="5B6B82"/>
-                </a:solidFill>
-                <a:latin typeface="Calibri"/>
-              </a:rPr>
-              <a:t>Repeating the last 30 days ignores the calendar. It does not know which day payroll hits.</a:t>
-            </a:r>
-          </a:p>
-        </p:txBody>
-      </p:sp>
-      <p:sp>
-        <p:nvSpPr>
-          <p:cNvPr id="17" name="TextBox 16"/>
-          <p:cNvSpPr txBox="1"/>
-          <p:nvPr/>
-        </p:nvSpPr>
-        <p:spPr>
-          <a:xfrm>
-            <a:off x="502920" y="6473952"/>
-            <a:ext cx="7315200" cy="256032"/>
-          </a:xfrm>
-          <a:prstGeom prst="rect">
-            <a:avLst/>
-          </a:prstGeom>
-          <a:noFill/>
-        </p:spPr>
-        <p:txBody>
-          <a:bodyPr wrap="square" lIns="0" rIns="0" tIns="0" bIns="0" anchor="t"/>
-          <a:lstStyle/>
-          <a:p>
-            <a:pPr algn="l">
-              <a:spcBef>
-                <a:spcPts val="0"/>
-              </a:spcBef>
-              <a:spcAft>
-                <a:spcPts val="0"/>
-              </a:spcAft>
-            </a:pPr>
-            <a:r>
-              <a:rPr sz="1200" b="1" i="0">
-                <a:solidFill>
-                  <a:srgbClr val="5B6B82"/>
-                </a:solidFill>
-                <a:latin typeface="Calibri"/>
-              </a:rPr>
-              <a:t>FinSight</a:t>
-            </a:r>
-          </a:p>
-        </p:txBody>
-      </p:sp>
-      <p:sp>
-        <p:nvSpPr>
-          <p:cNvPr id="18" name="TextBox 17"/>
-          <p:cNvSpPr txBox="1"/>
-          <p:nvPr/>
-        </p:nvSpPr>
-        <p:spPr>
-          <a:xfrm>
-            <a:off x="2011680" y="6473952"/>
-            <a:ext cx="7498079" cy="256032"/>
+            <a:off x="7406640" y="6446520"/>
+            <a:ext cx="3108960" cy="292608"/>
           </a:xfrm>
           <a:prstGeom prst="rect">
             <a:avLst/>
@@ -4665,37 +4368,38 @@
           </a:bodyPr>
           <a:lstStyle/>
           <a:p>
-            <a:r>
-              <a:rPr sz="1200" b="0" i="0" u="sng">
+            <a:pPr algn="r"/>
+            <a:r>
+              <a:rPr sz="1400" b="1" i="0" u="sng">
                 <a:solidFill>
                   <a:srgbClr val="0E7490"/>
                 </a:solidFill>
                 <a:latin typeface="Calibri"/>
                 <a:hlinkClick r:id="rId2"/>
               </a:rPr>
-              <a:t>https://finsight-off.vercel.app</a:t>
-            </a:r>
-          </a:p>
-        </p:txBody>
-      </p:sp>
-      <p:sp>
-        <p:nvSpPr>
-          <p:cNvPr id="19" name="TextBox 18"/>
-          <p:cNvSpPr txBox="1"/>
-          <p:nvPr/>
-        </p:nvSpPr>
-        <p:spPr>
-          <a:xfrm>
-            <a:off x="10607040" y="6473952"/>
-            <a:ext cx="1097280" cy="256032"/>
-          </a:xfrm>
-          <a:prstGeom prst="rect">
-            <a:avLst/>
-          </a:prstGeom>
-          <a:noFill/>
-        </p:spPr>
-        <p:txBody>
-          <a:bodyPr wrap="square" lIns="0" rIns="0" tIns="0" bIns="0" anchor="t"/>
+              <a:t>finsight-off.vercel.app</a:t>
+            </a:r>
+          </a:p>
+        </p:txBody>
+      </p:sp>
+      <p:sp>
+        <p:nvSpPr>
+          <p:cNvPr id="16" name="TextBox 15"/>
+          <p:cNvSpPr txBox="1"/>
+          <p:nvPr/>
+        </p:nvSpPr>
+        <p:spPr>
+          <a:xfrm>
+            <a:off x="10698480" y="6446520"/>
+            <a:ext cx="1005840" cy="292608"/>
+          </a:xfrm>
+          <a:prstGeom prst="rect">
+            <a:avLst/>
+          </a:prstGeom>
+          <a:noFill/>
+        </p:spPr>
+        <p:txBody>
+          <a:bodyPr wrap="square" lIns="0" rIns="0" tIns="0" bIns="0"/>
           <a:lstStyle/>
           <a:p>
             <a:pPr algn="r">
@@ -4707,13 +4411,13 @@
               </a:spcAft>
             </a:pPr>
             <a:r>
-              <a:rPr sz="1200" b="1" i="0">
-                <a:solidFill>
-                  <a:srgbClr val="5B6B82"/>
-                </a:solidFill>
-                <a:latin typeface="Calibri"/>
-              </a:rPr>
-              <a:t>2  /  8</a:t>
+              <a:rPr sz="1400" b="1" i="0">
+                <a:solidFill>
+                  <a:srgbClr val="3E4C63"/>
+                </a:solidFill>
+                <a:latin typeface="Calibri"/>
+              </a:rPr>
+              <a:t>2  /  9</a:t>
             </a:r>
           </a:p>
         </p:txBody>
@@ -4751,7 +4455,7 @@
             <a:avLst/>
           </a:prstGeom>
           <a:solidFill>
-            <a:srgbClr val="F3F6FB"/>
+            <a:srgbClr val="F4F7FB"/>
           </a:solidFill>
           <a:ln>
             <a:noFill/>
@@ -4787,16 +4491,16 @@
         </p:nvSpPr>
         <p:spPr>
           <a:xfrm>
-            <a:off x="502920" y="347472"/>
-            <a:ext cx="7315200" cy="256032"/>
-          </a:xfrm>
-          <a:prstGeom prst="rect">
-            <a:avLst/>
-          </a:prstGeom>
-          <a:noFill/>
-        </p:spPr>
-        <p:txBody>
-          <a:bodyPr wrap="square" lIns="0" rIns="0" tIns="0" bIns="0" anchor="t"/>
+            <a:off x="502920" y="292608"/>
+            <a:ext cx="9144000" cy="292608"/>
+          </a:xfrm>
+          <a:prstGeom prst="rect">
+            <a:avLst/>
+          </a:prstGeom>
+          <a:noFill/>
+        </p:spPr>
+        <p:txBody>
+          <a:bodyPr wrap="square" lIns="0" rIns="0" tIns="0" bIns="0"/>
           <a:lstStyle/>
           <a:p>
             <a:pPr algn="l">
@@ -4808,13 +4512,13 @@
               </a:spcAft>
             </a:pPr>
             <a:r>
-              <a:rPr sz="1200" b="1" i="0">
-                <a:solidFill>
-                  <a:srgbClr val="0E7490"/>
-                </a:solidFill>
-                <a:latin typeface="Calibri"/>
-              </a:rPr>
-              <a:t>WHAT THE SCREEN ANSWERS</a:t>
+              <a:rPr sz="1400" b="1" i="0">
+                <a:solidFill>
+                  <a:srgbClr val="0F9F6E"/>
+                </a:solidFill>
+                <a:latin typeface="Calibri"/>
+              </a:rPr>
+              <a:t>THE CASE IN THE REPORT</a:t>
             </a:r>
           </a:p>
         </p:txBody>
@@ -4836,7 +4540,7 @@
           <a:noFill/>
         </p:spPr>
         <p:txBody>
-          <a:bodyPr wrap="square" lIns="0" rIns="0" tIns="0" bIns="0" anchor="t"/>
+          <a:bodyPr wrap="square" lIns="0" rIns="0" tIns="0" bIns="0"/>
           <a:lstStyle/>
           <a:p>
             <a:pPr algn="l">
@@ -4848,13 +4552,13 @@
               </a:spcAft>
             </a:pPr>
             <a:r>
-              <a:rPr sz="3600" b="1" i="0">
+              <a:rPr sz="3200" b="1" i="0">
                 <a:solidFill>
                   <a:srgbClr val="0F172A"/>
                 </a:solidFill>
                 <a:latin typeface="Calibri"/>
               </a:rPr>
-              <a:t>Plain questions. One chart.</a:t>
+              <a:t>Harbor &amp; Co. looks busy and still runs out.</a:t>
             </a:r>
           </a:p>
         </p:txBody>
@@ -4868,7 +4572,7 @@
         <p:spPr>
           <a:xfrm>
             <a:off x="502920" y="1691640"/>
-            <a:ext cx="11155680" cy="987552"/>
+            <a:ext cx="2743200" cy="1691640"/>
           </a:xfrm>
           <a:prstGeom prst="roundRect">
             <a:avLst>
@@ -4878,9 +4582,9 @@
           <a:solidFill>
             <a:srgbClr val="FFFFFF"/>
           </a:solidFill>
-          <a:ln w="12700">
+          <a:ln w="15875">
             <a:solidFill>
-              <a:srgbClr val="E2E8F0"/>
+              <a:srgbClr val="D5DEEA"/>
             </a:solidFill>
           </a:ln>
         </p:spPr>
@@ -4908,25 +4612,107 @@
       </p:sp>
       <p:sp>
         <p:nvSpPr>
-          <p:cNvPr id="6" name="Rounded Rectangle 5"/>
+          <p:cNvPr id="6" name="TextBox 5"/>
+          <p:cNvSpPr txBox="1"/>
+          <p:nvPr/>
+        </p:nvSpPr>
+        <p:spPr>
+          <a:xfrm>
+            <a:off x="667512" y="1874519"/>
+            <a:ext cx="2423160" cy="685800"/>
+          </a:xfrm>
+          <a:prstGeom prst="rect">
+            <a:avLst/>
+          </a:prstGeom>
+          <a:noFill/>
+        </p:spPr>
+        <p:txBody>
+          <a:bodyPr wrap="square" lIns="0" rIns="0" tIns="0" bIns="0"/>
+          <a:lstStyle/>
+          <a:p>
+            <a:pPr algn="l">
+              <a:spcBef>
+                <a:spcPts val="0"/>
+              </a:spcBef>
+              <a:spcAft>
+                <a:spcPts val="0"/>
+              </a:spcAft>
+            </a:pPr>
+            <a:r>
+              <a:rPr sz="2200" b="1" i="0">
+                <a:solidFill>
+                  <a:srgbClr val="0F172A"/>
+                </a:solidFill>
+                <a:latin typeface="Calibri"/>
+              </a:rPr>
+              <a:t>USD 130,400</a:t>
+            </a:r>
+          </a:p>
+        </p:txBody>
+      </p:sp>
+      <p:sp>
+        <p:nvSpPr>
+          <p:cNvPr id="7" name="TextBox 6"/>
+          <p:cNvSpPr txBox="1"/>
+          <p:nvPr/>
+        </p:nvSpPr>
+        <p:spPr>
+          <a:xfrm>
+            <a:off x="667512" y="2606040"/>
+            <a:ext cx="2423160" cy="548640"/>
+          </a:xfrm>
+          <a:prstGeom prst="rect">
+            <a:avLst/>
+          </a:prstGeom>
+          <a:noFill/>
+        </p:spPr>
+        <p:txBody>
+          <a:bodyPr wrap="square" lIns="0" rIns="0" tIns="0" bIns="0"/>
+          <a:lstStyle/>
+          <a:p>
+            <a:pPr algn="l">
+              <a:spcBef>
+                <a:spcPts val="0"/>
+              </a:spcBef>
+              <a:spcAft>
+                <a:spcPts val="0"/>
+              </a:spcAft>
+            </a:pPr>
+            <a:r>
+              <a:rPr sz="1500" b="0" i="0">
+                <a:solidFill>
+                  <a:srgbClr val="3E4C63"/>
+                </a:solidFill>
+                <a:latin typeface="Calibri"/>
+              </a:rPr>
+              <a:t>Invoiced in 90 days</a:t>
+            </a:r>
+          </a:p>
+        </p:txBody>
+      </p:sp>
+      <p:sp>
+        <p:nvSpPr>
+          <p:cNvPr id="8" name="Rounded Rectangle 7"/>
           <p:cNvSpPr/>
           <p:nvPr/>
         </p:nvSpPr>
         <p:spPr>
           <a:xfrm>
-            <a:off x="713232" y="1965960"/>
-            <a:ext cx="438912" cy="438912"/>
+            <a:off x="3383280" y="1691640"/>
+            <a:ext cx="2743200" cy="1691640"/>
           </a:xfrm>
           <a:prstGeom prst="roundRect">
             <a:avLst>
-              <a:gd name="adj" fmla="val 50000"/>
+              <a:gd name="adj" fmla="val 8000"/>
             </a:avLst>
           </a:prstGeom>
           <a:solidFill>
-            <a:srgbClr val="E7F8F1"/>
+            <a:srgbClr val="FFFFFF"/>
           </a:solidFill>
-          <a:ln>
-            <a:noFill/>
+          <a:ln w="15875">
+            <a:solidFill>
+              <a:srgbClr val="D5DEEA"/>
+            </a:solidFill>
           </a:ln>
         </p:spPr>
         <p:style>
@@ -4953,62 +4739,22 @@
       </p:sp>
       <p:sp>
         <p:nvSpPr>
-          <p:cNvPr id="7" name="TextBox 6"/>
-          <p:cNvSpPr txBox="1"/>
-          <p:nvPr/>
-        </p:nvSpPr>
-        <p:spPr>
-          <a:xfrm>
-            <a:off x="713232" y="2020824"/>
-            <a:ext cx="438912" cy="347472"/>
-          </a:xfrm>
-          <a:prstGeom prst="rect">
-            <a:avLst/>
-          </a:prstGeom>
-          <a:noFill/>
-        </p:spPr>
-        <p:txBody>
-          <a:bodyPr wrap="square" lIns="0" rIns="0" tIns="0" bIns="0" anchor="t"/>
-          <a:lstStyle/>
-          <a:p>
-            <a:pPr algn="ctr">
-              <a:spcBef>
-                <a:spcPts val="0"/>
-              </a:spcBef>
-              <a:spcAft>
-                <a:spcPts val="0"/>
-              </a:spcAft>
-            </a:pPr>
-            <a:r>
-              <a:rPr sz="1600" b="1" i="0">
-                <a:solidFill>
-                  <a:srgbClr val="0F9F6E"/>
-                </a:solidFill>
-                <a:latin typeface="Calibri"/>
-              </a:rPr>
-              <a:t>1</a:t>
-            </a:r>
-          </a:p>
-        </p:txBody>
-      </p:sp>
-      <p:sp>
-        <p:nvSpPr>
-          <p:cNvPr id="8" name="TextBox 7"/>
-          <p:cNvSpPr txBox="1"/>
-          <p:nvPr/>
-        </p:nvSpPr>
-        <p:spPr>
-          <a:xfrm>
-            <a:off x="1417320" y="1837944"/>
-            <a:ext cx="9601200" cy="347472"/>
-          </a:xfrm>
-          <a:prstGeom prst="rect">
-            <a:avLst/>
-          </a:prstGeom>
-          <a:noFill/>
-        </p:spPr>
-        <p:txBody>
-          <a:bodyPr wrap="square" lIns="0" rIns="0" tIns="0" bIns="0" anchor="t"/>
+          <p:cNvPr id="9" name="TextBox 8"/>
+          <p:cNvSpPr txBox="1"/>
+          <p:nvPr/>
+        </p:nvSpPr>
+        <p:spPr>
+          <a:xfrm>
+            <a:off x="3547872" y="1874519"/>
+            <a:ext cx="2423160" cy="685800"/>
+          </a:xfrm>
+          <a:prstGeom prst="rect">
+            <a:avLst/>
+          </a:prstGeom>
+          <a:noFill/>
+        </p:spPr>
+        <p:txBody>
+          <a:bodyPr wrap="square" lIns="0" rIns="0" tIns="0" bIns="0"/>
           <a:lstStyle/>
           <a:p>
             <a:pPr algn="l">
@@ -5020,35 +4766,35 @@
               </a:spcAft>
             </a:pPr>
             <a:r>
-              <a:rPr sz="2000" b="1" i="0">
+              <a:rPr sz="2200" b="1" i="0">
                 <a:solidFill>
                   <a:srgbClr val="0F172A"/>
                 </a:solidFill>
                 <a:latin typeface="Calibri"/>
               </a:rPr>
-              <a:t>Where you stand</a:t>
-            </a:r>
-          </a:p>
-        </p:txBody>
-      </p:sp>
-      <p:sp>
-        <p:nvSpPr>
-          <p:cNvPr id="9" name="TextBox 8"/>
-          <p:cNvSpPr txBox="1"/>
-          <p:nvPr/>
-        </p:nvSpPr>
-        <p:spPr>
-          <a:xfrm>
-            <a:off x="1417320" y="2203704"/>
-            <a:ext cx="9601200" cy="329184"/>
-          </a:xfrm>
-          <a:prstGeom prst="rect">
-            <a:avLst/>
-          </a:prstGeom>
-          <a:noFill/>
-        </p:spPr>
-        <p:txBody>
-          <a:bodyPr wrap="square" lIns="0" rIns="0" tIns="0" bIns="0" anchor="t"/>
+              <a:t>USD 116,063</a:t>
+            </a:r>
+          </a:p>
+        </p:txBody>
+      </p:sp>
+      <p:sp>
+        <p:nvSpPr>
+          <p:cNvPr id="10" name="TextBox 9"/>
+          <p:cNvSpPr txBox="1"/>
+          <p:nvPr/>
+        </p:nvSpPr>
+        <p:spPr>
+          <a:xfrm>
+            <a:off x="3547872" y="2606040"/>
+            <a:ext cx="2423160" cy="548640"/>
+          </a:xfrm>
+          <a:prstGeom prst="rect">
+            <a:avLst/>
+          </a:prstGeom>
+          <a:noFill/>
+        </p:spPr>
+        <p:txBody>
+          <a:bodyPr wrap="square" lIns="0" rIns="0" tIns="0" bIns="0"/>
           <a:lstStyle/>
           <a:p>
             <a:pPr algn="l">
@@ -5062,25 +4808,25 @@
             <a:r>
               <a:rPr sz="1500" b="0" i="0">
                 <a:solidFill>
-                  <a:srgbClr val="5B6B82"/>
-                </a:solidFill>
-                <a:latin typeface="Calibri"/>
-              </a:rPr>
-              <a:t>Cash now, what you billed, what you collected, and what you spent.</a:t>
-            </a:r>
-          </a:p>
-        </p:txBody>
-      </p:sp>
-      <p:sp>
-        <p:nvSpPr>
-          <p:cNvPr id="10" name="Rounded Rectangle 9"/>
+                  <a:srgbClr val="3E4C63"/>
+                </a:solidFill>
+                <a:latin typeface="Calibri"/>
+              </a:rPr>
+              <a:t>Expenses in those 90 days</a:t>
+            </a:r>
+          </a:p>
+        </p:txBody>
+      </p:sp>
+      <p:sp>
+        <p:nvSpPr>
+          <p:cNvPr id="11" name="Rounded Rectangle 10"/>
           <p:cNvSpPr/>
           <p:nvPr/>
         </p:nvSpPr>
         <p:spPr>
           <a:xfrm>
-            <a:off x="502920" y="2788920"/>
-            <a:ext cx="11155680" cy="987552"/>
+            <a:off x="6263640" y="1691640"/>
+            <a:ext cx="2743200" cy="1691640"/>
           </a:xfrm>
           <a:prstGeom prst="roundRect">
             <a:avLst>
@@ -5090,9 +4836,9 @@
           <a:solidFill>
             <a:srgbClr val="FFFFFF"/>
           </a:solidFill>
-          <a:ln w="12700">
+          <a:ln w="15875">
             <a:solidFill>
-              <a:srgbClr val="E2E8F0"/>
+              <a:srgbClr val="D5DEEA"/>
             </a:solidFill>
           </a:ln>
         </p:spPr>
@@ -5120,25 +4866,107 @@
       </p:sp>
       <p:sp>
         <p:nvSpPr>
-          <p:cNvPr id="11" name="Rounded Rectangle 10"/>
+          <p:cNvPr id="12" name="TextBox 11"/>
+          <p:cNvSpPr txBox="1"/>
+          <p:nvPr/>
+        </p:nvSpPr>
+        <p:spPr>
+          <a:xfrm>
+            <a:off x="6428232" y="1874519"/>
+            <a:ext cx="2423160" cy="685800"/>
+          </a:xfrm>
+          <a:prstGeom prst="rect">
+            <a:avLst/>
+          </a:prstGeom>
+          <a:noFill/>
+        </p:spPr>
+        <p:txBody>
+          <a:bodyPr wrap="square" lIns="0" rIns="0" tIns="0" bIns="0"/>
+          <a:lstStyle/>
+          <a:p>
+            <a:pPr algn="l">
+              <a:spcBef>
+                <a:spcPts val="0"/>
+              </a:spcBef>
+              <a:spcAft>
+                <a:spcPts val="0"/>
+              </a:spcAft>
+            </a:pPr>
+            <a:r>
+              <a:rPr sz="2200" b="1" i="0">
+                <a:solidFill>
+                  <a:srgbClr val="0F172A"/>
+                </a:solidFill>
+                <a:latin typeface="Calibri"/>
+              </a:rPr>
+              <a:t>USD 16,000</a:t>
+            </a:r>
+          </a:p>
+        </p:txBody>
+      </p:sp>
+      <p:sp>
+        <p:nvSpPr>
+          <p:cNvPr id="13" name="TextBox 12"/>
+          <p:cNvSpPr txBox="1"/>
+          <p:nvPr/>
+        </p:nvSpPr>
+        <p:spPr>
+          <a:xfrm>
+            <a:off x="6428232" y="2606040"/>
+            <a:ext cx="2423160" cy="548640"/>
+          </a:xfrm>
+          <a:prstGeom prst="rect">
+            <a:avLst/>
+          </a:prstGeom>
+          <a:noFill/>
+        </p:spPr>
+        <p:txBody>
+          <a:bodyPr wrap="square" lIns="0" rIns="0" tIns="0" bIns="0"/>
+          <a:lstStyle/>
+          <a:p>
+            <a:pPr algn="l">
+              <a:spcBef>
+                <a:spcPts val="0"/>
+              </a:spcBef>
+              <a:spcAft>
+                <a:spcPts val="0"/>
+              </a:spcAft>
+            </a:pPr>
+            <a:r>
+              <a:rPr sz="1500" b="0" i="0">
+                <a:solidFill>
+                  <a:srgbClr val="3E4C63"/>
+                </a:solidFill>
+                <a:latin typeface="Calibri"/>
+              </a:rPr>
+              <a:t>Cash on 2 March 2026</a:t>
+            </a:r>
+          </a:p>
+        </p:txBody>
+      </p:sp>
+      <p:sp>
+        <p:nvSpPr>
+          <p:cNvPr id="14" name="Rounded Rectangle 13"/>
           <p:cNvSpPr/>
           <p:nvPr/>
         </p:nvSpPr>
         <p:spPr>
           <a:xfrm>
-            <a:off x="713232" y="3063240"/>
-            <a:ext cx="438912" cy="438912"/>
+            <a:off x="9144000" y="1691640"/>
+            <a:ext cx="2743200" cy="1691640"/>
           </a:xfrm>
           <a:prstGeom prst="roundRect">
             <a:avLst>
-              <a:gd name="adj" fmla="val 50000"/>
+              <a:gd name="adj" fmla="val 8000"/>
             </a:avLst>
           </a:prstGeom>
           <a:solidFill>
-            <a:srgbClr val="E7F8F1"/>
+            <a:srgbClr val="FFFFFF"/>
           </a:solidFill>
-          <a:ln>
-            <a:noFill/>
+          <a:ln w="15875">
+            <a:solidFill>
+              <a:srgbClr val="D5DEEA"/>
+            </a:solidFill>
           </a:ln>
         </p:spPr>
         <p:style>
@@ -5165,62 +4993,22 @@
       </p:sp>
       <p:sp>
         <p:nvSpPr>
-          <p:cNvPr id="12" name="TextBox 11"/>
-          <p:cNvSpPr txBox="1"/>
-          <p:nvPr/>
-        </p:nvSpPr>
-        <p:spPr>
-          <a:xfrm>
-            <a:off x="713232" y="3118104"/>
-            <a:ext cx="438912" cy="347472"/>
-          </a:xfrm>
-          <a:prstGeom prst="rect">
-            <a:avLst/>
-          </a:prstGeom>
-          <a:noFill/>
-        </p:spPr>
-        <p:txBody>
-          <a:bodyPr wrap="square" lIns="0" rIns="0" tIns="0" bIns="0" anchor="t"/>
-          <a:lstStyle/>
-          <a:p>
-            <a:pPr algn="ctr">
-              <a:spcBef>
-                <a:spcPts val="0"/>
-              </a:spcBef>
-              <a:spcAft>
-                <a:spcPts val="0"/>
-              </a:spcAft>
-            </a:pPr>
-            <a:r>
-              <a:rPr sz="1600" b="1" i="0">
-                <a:solidFill>
-                  <a:srgbClr val="0F9F6E"/>
-                </a:solidFill>
-                <a:latin typeface="Calibri"/>
-              </a:rPr>
-              <a:t>2</a:t>
-            </a:r>
-          </a:p>
-        </p:txBody>
-      </p:sp>
-      <p:sp>
-        <p:nvSpPr>
-          <p:cNvPr id="13" name="TextBox 12"/>
-          <p:cNvSpPr txBox="1"/>
-          <p:nvPr/>
-        </p:nvSpPr>
-        <p:spPr>
-          <a:xfrm>
-            <a:off x="1417320" y="2935224"/>
-            <a:ext cx="9601200" cy="347472"/>
-          </a:xfrm>
-          <a:prstGeom prst="rect">
-            <a:avLst/>
-          </a:prstGeom>
-          <a:noFill/>
-        </p:spPr>
-        <p:txBody>
-          <a:bodyPr wrap="square" lIns="0" rIns="0" tIns="0" bIns="0" anchor="t"/>
+          <p:cNvPr id="15" name="TextBox 14"/>
+          <p:cNvSpPr txBox="1"/>
+          <p:nvPr/>
+        </p:nvSpPr>
+        <p:spPr>
+          <a:xfrm>
+            <a:off x="9308592" y="1874519"/>
+            <a:ext cx="2423160" cy="685800"/>
+          </a:xfrm>
+          <a:prstGeom prst="rect">
+            <a:avLst/>
+          </a:prstGeom>
+          <a:noFill/>
+        </p:spPr>
+        <p:txBody>
+          <a:bodyPr wrap="square" lIns="0" rIns="0" tIns="0" bIns="0"/>
           <a:lstStyle/>
           <a:p>
             <a:pPr algn="l">
@@ -5232,35 +5020,35 @@
               </a:spcAft>
             </a:pPr>
             <a:r>
-              <a:rPr sz="2000" b="1" i="0">
+              <a:rPr sz="2200" b="1" i="0">
                 <a:solidFill>
                   <a:srgbClr val="0F172A"/>
                 </a:solidFill>
                 <a:latin typeface="Calibri"/>
               </a:rPr>
-              <a:t>What happens next</a:t>
-            </a:r>
-          </a:p>
-        </p:txBody>
-      </p:sp>
-      <p:sp>
-        <p:nvSpPr>
-          <p:cNvPr id="14" name="TextBox 13"/>
-          <p:cNvSpPr txBox="1"/>
-          <p:nvPr/>
-        </p:nvSpPr>
-        <p:spPr>
-          <a:xfrm>
-            <a:off x="1417320" y="3300984"/>
-            <a:ext cx="9601200" cy="329184"/>
-          </a:xfrm>
-          <a:prstGeom prst="rect">
-            <a:avLst/>
-          </a:prstGeom>
-          <a:noFill/>
-        </p:spPr>
-        <p:txBody>
-          <a:bodyPr wrap="square" lIns="0" rIns="0" tIns="0" bIns="0" anchor="t"/>
+              <a:t>23 March 2026</a:t>
+            </a:r>
+          </a:p>
+        </p:txBody>
+      </p:sp>
+      <p:sp>
+        <p:nvSpPr>
+          <p:cNvPr id="16" name="TextBox 15"/>
+          <p:cNvSpPr txBox="1"/>
+          <p:nvPr/>
+        </p:nvSpPr>
+        <p:spPr>
+          <a:xfrm>
+            <a:off x="9308592" y="2606040"/>
+            <a:ext cx="2423160" cy="548640"/>
+          </a:xfrm>
+          <a:prstGeom prst="rect">
+            <a:avLst/>
+          </a:prstGeom>
+          <a:noFill/>
+        </p:spPr>
+        <p:txBody>
+          <a:bodyPr wrap="square" lIns="0" rIns="0" tIns="0" bIns="0"/>
           <a:lstStyle/>
           <a:p>
             <a:pPr algn="l">
@@ -5274,104 +5062,12 @@
             <a:r>
               <a:rPr sz="1500" b="0" i="0">
                 <a:solidFill>
-                  <a:srgbClr val="5B6B82"/>
-                </a:solidFill>
-                <a:latin typeface="Calibri"/>
-              </a:rPr>
-              <a:t>Blue is the forecast. Gold pretends every day looks like the last 30.</a:t>
-            </a:r>
-          </a:p>
-        </p:txBody>
-      </p:sp>
-      <p:sp>
-        <p:nvSpPr>
-          <p:cNvPr id="15" name="Rounded Rectangle 14"/>
-          <p:cNvSpPr/>
-          <p:nvPr/>
-        </p:nvSpPr>
-        <p:spPr>
-          <a:xfrm>
-            <a:off x="502920" y="3886200"/>
-            <a:ext cx="11155680" cy="987552"/>
-          </a:xfrm>
-          <a:prstGeom prst="roundRect">
-            <a:avLst>
-              <a:gd name="adj" fmla="val 8000"/>
-            </a:avLst>
-          </a:prstGeom>
-          <a:solidFill>
-            <a:srgbClr val="FFFFFF"/>
-          </a:solidFill>
-          <a:ln w="12700">
-            <a:solidFill>
-              <a:srgbClr val="E2E8F0"/>
-            </a:solidFill>
-          </a:ln>
-        </p:spPr>
-        <p:style>
-          <a:lnRef idx="1">
-            <a:schemeClr val="accent1"/>
-          </a:lnRef>
-          <a:fillRef idx="3">
-            <a:schemeClr val="accent1"/>
-          </a:fillRef>
-          <a:effectRef idx="2">
-            <a:schemeClr val="accent1"/>
-          </a:effectRef>
-          <a:fontRef idx="minor">
-            <a:schemeClr val="lt1"/>
-          </a:fontRef>
-        </p:style>
-        <p:txBody>
-          <a:bodyPr rtlCol="0" anchor="ctr"/>
-          <a:lstStyle/>
-          <a:p>
-            <a:pPr algn="ctr"/>
-          </a:p>
-        </p:txBody>
-      </p:sp>
-      <p:sp>
-        <p:nvSpPr>
-          <p:cNvPr id="16" name="Rounded Rectangle 15"/>
-          <p:cNvSpPr/>
-          <p:nvPr/>
-        </p:nvSpPr>
-        <p:spPr>
-          <a:xfrm>
-            <a:off x="713232" y="4160520"/>
-            <a:ext cx="438912" cy="438912"/>
-          </a:xfrm>
-          <a:prstGeom prst="roundRect">
-            <a:avLst>
-              <a:gd name="adj" fmla="val 50000"/>
-            </a:avLst>
-          </a:prstGeom>
-          <a:solidFill>
-            <a:srgbClr val="E7F8F1"/>
-          </a:solidFill>
-          <a:ln>
-            <a:noFill/>
-          </a:ln>
-        </p:spPr>
-        <p:style>
-          <a:lnRef idx="1">
-            <a:schemeClr val="accent1"/>
-          </a:lnRef>
-          <a:fillRef idx="3">
-            <a:schemeClr val="accent1"/>
-          </a:fillRef>
-          <a:effectRef idx="2">
-            <a:schemeClr val="accent1"/>
-          </a:effectRef>
-          <a:fontRef idx="minor">
-            <a:schemeClr val="lt1"/>
-          </a:fontRef>
-        </p:style>
-        <p:txBody>
-          <a:bodyPr rtlCol="0" anchor="ctr"/>
-          <a:lstStyle/>
-          <a:p>
-            <a:pPr algn="ctr"/>
+                  <a:srgbClr val="3E4C63"/>
+                </a:solidFill>
+                <a:latin typeface="Calibri"/>
+              </a:rPr>
+              <a:t>The day cash crosses zero</a:t>
+            </a:r>
           </a:p>
         </p:txBody>
       </p:sp>
@@ -5383,34 +5079,34 @@
         </p:nvSpPr>
         <p:spPr>
           <a:xfrm>
-            <a:off x="713232" y="4215384"/>
-            <a:ext cx="438912" cy="347472"/>
-          </a:xfrm>
-          <a:prstGeom prst="rect">
-            <a:avLst/>
-          </a:prstGeom>
-          <a:noFill/>
-        </p:spPr>
-        <p:txBody>
-          <a:bodyPr wrap="square" lIns="0" rIns="0" tIns="0" bIns="0" anchor="t"/>
-          <a:lstStyle/>
-          <a:p>
-            <a:pPr algn="ctr">
-              <a:spcBef>
-                <a:spcPts val="0"/>
-              </a:spcBef>
-              <a:spcAft>
-                <a:spcPts val="0"/>
-              </a:spcAft>
-            </a:pPr>
-            <a:r>
-              <a:rPr sz="1600" b="1" i="0">
-                <a:solidFill>
-                  <a:srgbClr val="0F9F6E"/>
-                </a:solidFill>
-                <a:latin typeface="Calibri"/>
-              </a:rPr>
-              <a:t>3</a:t>
+            <a:off x="502920" y="3703320"/>
+            <a:ext cx="11155680" cy="2194560"/>
+          </a:xfrm>
+          <a:prstGeom prst="rect">
+            <a:avLst/>
+          </a:prstGeom>
+          <a:noFill/>
+        </p:spPr>
+        <p:txBody>
+          <a:bodyPr wrap="square" lIns="0" rIns="0" tIns="0" bIns="0"/>
+          <a:lstStyle/>
+          <a:p>
+            <a:pPr algn="l">
+              <a:spcBef>
+                <a:spcPts val="0"/>
+              </a:spcBef>
+              <a:spcAft>
+                <a:spcPts val="0"/>
+              </a:spcAft>
+            </a:pPr>
+            <a:r>
+              <a:rPr sz="2000" b="0" i="0">
+                <a:solidFill>
+                  <a:srgbClr val="0F172A"/>
+                </a:solidFill>
+                <a:latin typeface="Calibri"/>
+              </a:rPr>
+              <a:t>Payroll of USD 22,000 lands on 23 March, before Brightline’s open invoice of USD 20,000 is expected to clear. Invoiced activity is higher than spending. Cash still hits zero. A 90-day invoice-versus-expense comparison does not show that gap.</a:t>
             </a:r>
           </a:p>
         </p:txBody>
@@ -5423,16 +5119,16 @@
         </p:nvSpPr>
         <p:spPr>
           <a:xfrm>
-            <a:off x="1417320" y="4032504"/>
-            <a:ext cx="9601200" cy="347472"/>
-          </a:xfrm>
-          <a:prstGeom prst="rect">
-            <a:avLst/>
-          </a:prstGeom>
-          <a:noFill/>
-        </p:spPr>
-        <p:txBody>
-          <a:bodyPr wrap="square" lIns="0" rIns="0" tIns="0" bIns="0" anchor="t"/>
+            <a:off x="502920" y="6446520"/>
+            <a:ext cx="6858000" cy="292608"/>
+          </a:xfrm>
+          <a:prstGeom prst="rect">
+            <a:avLst/>
+          </a:prstGeom>
+          <a:noFill/>
+        </p:spPr>
+        <p:txBody>
+          <a:bodyPr wrap="square" lIns="0" rIns="0" tIns="0" bIns="0"/>
           <a:lstStyle/>
           <a:p>
             <a:pPr algn="l">
@@ -5444,13 +5140,13 @@
               </a:spcAft>
             </a:pPr>
             <a:r>
-              <a:rPr sz="2000" b="1" i="0">
-                <a:solidFill>
-                  <a:srgbClr val="0F172A"/>
-                </a:solidFill>
-                <a:latin typeface="Calibri"/>
-              </a:rPr>
-              <a:t>Why cash falls</a:t>
+              <a:rPr sz="1400" b="1" i="0">
+                <a:solidFill>
+                  <a:srgbClr val="3E4C63"/>
+                </a:solidFill>
+                <a:latin typeface="Calibri"/>
+              </a:rPr>
+              <a:t>FinSight AI  ·  Team 65  ·  Manipal University</a:t>
             </a:r>
           </a:p>
         </p:txBody>
@@ -5463,300 +5159,8 @@
         </p:nvSpPr>
         <p:spPr>
           <a:xfrm>
-            <a:off x="1417320" y="4398264"/>
-            <a:ext cx="9601200" cy="329184"/>
-          </a:xfrm>
-          <a:prstGeom prst="rect">
-            <a:avLst/>
-          </a:prstGeom>
-          <a:noFill/>
-        </p:spPr>
-        <p:txBody>
-          <a:bodyPr wrap="square" lIns="0" rIns="0" tIns="0" bIns="0" anchor="t"/>
-          <a:lstStyle/>
-          <a:p>
-            <a:pPr algn="l">
-              <a:spcBef>
-                <a:spcPts val="0"/>
-              </a:spcBef>
-              <a:spcAft>
-                <a:spcPts val="0"/>
-              </a:spcAft>
-            </a:pPr>
-            <a:r>
-              <a:rPr sz="1500" b="0" i="0">
-                <a:solidFill>
-                  <a:srgbClr val="5B6B82"/>
-                </a:solidFill>
-                <a:latin typeface="Calibri"/>
-              </a:rPr>
-              <a:t>The payment or bill that pushes the balance below zero.</a:t>
-            </a:r>
-          </a:p>
-        </p:txBody>
-      </p:sp>
-      <p:sp>
-        <p:nvSpPr>
-          <p:cNvPr id="20" name="Rounded Rectangle 19"/>
-          <p:cNvSpPr/>
-          <p:nvPr/>
-        </p:nvSpPr>
-        <p:spPr>
-          <a:xfrm>
-            <a:off x="502920" y="4983479"/>
-            <a:ext cx="11155680" cy="987552"/>
-          </a:xfrm>
-          <a:prstGeom prst="roundRect">
-            <a:avLst>
-              <a:gd name="adj" fmla="val 8000"/>
-            </a:avLst>
-          </a:prstGeom>
-          <a:solidFill>
-            <a:srgbClr val="FFFFFF"/>
-          </a:solidFill>
-          <a:ln w="12700">
-            <a:solidFill>
-              <a:srgbClr val="E2E8F0"/>
-            </a:solidFill>
-          </a:ln>
-        </p:spPr>
-        <p:style>
-          <a:lnRef idx="1">
-            <a:schemeClr val="accent1"/>
-          </a:lnRef>
-          <a:fillRef idx="3">
-            <a:schemeClr val="accent1"/>
-          </a:fillRef>
-          <a:effectRef idx="2">
-            <a:schemeClr val="accent1"/>
-          </a:effectRef>
-          <a:fontRef idx="minor">
-            <a:schemeClr val="lt1"/>
-          </a:fontRef>
-        </p:style>
-        <p:txBody>
-          <a:bodyPr rtlCol="0" anchor="ctr"/>
-          <a:lstStyle/>
-          <a:p>
-            <a:pPr algn="ctr"/>
-          </a:p>
-        </p:txBody>
-      </p:sp>
-      <p:sp>
-        <p:nvSpPr>
-          <p:cNvPr id="21" name="Rounded Rectangle 20"/>
-          <p:cNvSpPr/>
-          <p:nvPr/>
-        </p:nvSpPr>
-        <p:spPr>
-          <a:xfrm>
-            <a:off x="713232" y="5257799"/>
-            <a:ext cx="438912" cy="438912"/>
-          </a:xfrm>
-          <a:prstGeom prst="roundRect">
-            <a:avLst>
-              <a:gd name="adj" fmla="val 50000"/>
-            </a:avLst>
-          </a:prstGeom>
-          <a:solidFill>
-            <a:srgbClr val="E7F8F1"/>
-          </a:solidFill>
-          <a:ln>
-            <a:noFill/>
-          </a:ln>
-        </p:spPr>
-        <p:style>
-          <a:lnRef idx="1">
-            <a:schemeClr val="accent1"/>
-          </a:lnRef>
-          <a:fillRef idx="3">
-            <a:schemeClr val="accent1"/>
-          </a:fillRef>
-          <a:effectRef idx="2">
-            <a:schemeClr val="accent1"/>
-          </a:effectRef>
-          <a:fontRef idx="minor">
-            <a:schemeClr val="lt1"/>
-          </a:fontRef>
-        </p:style>
-        <p:txBody>
-          <a:bodyPr rtlCol="0" anchor="ctr"/>
-          <a:lstStyle/>
-          <a:p>
-            <a:pPr algn="ctr"/>
-          </a:p>
-        </p:txBody>
-      </p:sp>
-      <p:sp>
-        <p:nvSpPr>
-          <p:cNvPr id="22" name="TextBox 21"/>
-          <p:cNvSpPr txBox="1"/>
-          <p:nvPr/>
-        </p:nvSpPr>
-        <p:spPr>
-          <a:xfrm>
-            <a:off x="713232" y="5312663"/>
-            <a:ext cx="438912" cy="347472"/>
-          </a:xfrm>
-          <a:prstGeom prst="rect">
-            <a:avLst/>
-          </a:prstGeom>
-          <a:noFill/>
-        </p:spPr>
-        <p:txBody>
-          <a:bodyPr wrap="square" lIns="0" rIns="0" tIns="0" bIns="0" anchor="t"/>
-          <a:lstStyle/>
-          <a:p>
-            <a:pPr algn="ctr">
-              <a:spcBef>
-                <a:spcPts val="0"/>
-              </a:spcBef>
-              <a:spcAft>
-                <a:spcPts val="0"/>
-              </a:spcAft>
-            </a:pPr>
-            <a:r>
-              <a:rPr sz="1600" b="1" i="0">
-                <a:solidFill>
-                  <a:srgbClr val="0F9F6E"/>
-                </a:solidFill>
-                <a:latin typeface="Calibri"/>
-              </a:rPr>
-              <a:t>4</a:t>
-            </a:r>
-          </a:p>
-        </p:txBody>
-      </p:sp>
-      <p:sp>
-        <p:nvSpPr>
-          <p:cNvPr id="23" name="TextBox 22"/>
-          <p:cNvSpPr txBox="1"/>
-          <p:nvPr/>
-        </p:nvSpPr>
-        <p:spPr>
-          <a:xfrm>
-            <a:off x="1417320" y="5129783"/>
-            <a:ext cx="9601200" cy="347472"/>
-          </a:xfrm>
-          <a:prstGeom prst="rect">
-            <a:avLst/>
-          </a:prstGeom>
-          <a:noFill/>
-        </p:spPr>
-        <p:txBody>
-          <a:bodyPr wrap="square" lIns="0" rIns="0" tIns="0" bIns="0" anchor="t"/>
-          <a:lstStyle/>
-          <a:p>
-            <a:pPr algn="l">
-              <a:spcBef>
-                <a:spcPts val="0"/>
-              </a:spcBef>
-              <a:spcAft>
-                <a:spcPts val="0"/>
-              </a:spcAft>
-            </a:pPr>
-            <a:r>
-              <a:rPr sz="2000" b="1" i="0">
-                <a:solidFill>
-                  <a:srgbClr val="0F172A"/>
-                </a:solidFill>
-                <a:latin typeface="Calibri"/>
-              </a:rPr>
-              <a:t>Try a change</a:t>
-            </a:r>
-          </a:p>
-        </p:txBody>
-      </p:sp>
-      <p:sp>
-        <p:nvSpPr>
-          <p:cNvPr id="24" name="TextBox 23"/>
-          <p:cNvSpPr txBox="1"/>
-          <p:nvPr/>
-        </p:nvSpPr>
-        <p:spPr>
-          <a:xfrm>
-            <a:off x="1417320" y="5495543"/>
-            <a:ext cx="9601200" cy="329184"/>
-          </a:xfrm>
-          <a:prstGeom prst="rect">
-            <a:avLst/>
-          </a:prstGeom>
-          <a:noFill/>
-        </p:spPr>
-        <p:txBody>
-          <a:bodyPr wrap="square" lIns="0" rIns="0" tIns="0" bIns="0" anchor="t"/>
-          <a:lstStyle/>
-          <a:p>
-            <a:pPr algn="l">
-              <a:spcBef>
-                <a:spcPts val="0"/>
-              </a:spcBef>
-              <a:spcAft>
-                <a:spcPts val="0"/>
-              </a:spcAft>
-            </a:pPr>
-            <a:r>
-              <a:rPr sz="1500" b="0" i="0">
-                <a:solidFill>
-                  <a:srgbClr val="5B6B82"/>
-                </a:solidFill>
-                <a:latin typeface="Calibri"/>
-              </a:rPr>
-              <a:t>Move one incoming payment, or cut marketing. The side chart redraws.</a:t>
-            </a:r>
-          </a:p>
-        </p:txBody>
-      </p:sp>
-      <p:sp>
-        <p:nvSpPr>
-          <p:cNvPr id="25" name="TextBox 24"/>
-          <p:cNvSpPr txBox="1"/>
-          <p:nvPr/>
-        </p:nvSpPr>
-        <p:spPr>
-          <a:xfrm>
-            <a:off x="502920" y="6473952"/>
-            <a:ext cx="7315200" cy="256032"/>
-          </a:xfrm>
-          <a:prstGeom prst="rect">
-            <a:avLst/>
-          </a:prstGeom>
-          <a:noFill/>
-        </p:spPr>
-        <p:txBody>
-          <a:bodyPr wrap="square" lIns="0" rIns="0" tIns="0" bIns="0" anchor="t"/>
-          <a:lstStyle/>
-          <a:p>
-            <a:pPr algn="l">
-              <a:spcBef>
-                <a:spcPts val="0"/>
-              </a:spcBef>
-              <a:spcAft>
-                <a:spcPts val="0"/>
-              </a:spcAft>
-            </a:pPr>
-            <a:r>
-              <a:rPr sz="1200" b="1" i="0">
-                <a:solidFill>
-                  <a:srgbClr val="5B6B82"/>
-                </a:solidFill>
-                <a:latin typeface="Calibri"/>
-              </a:rPr>
-              <a:t>FinSight</a:t>
-            </a:r>
-          </a:p>
-        </p:txBody>
-      </p:sp>
-      <p:sp>
-        <p:nvSpPr>
-          <p:cNvPr id="26" name="TextBox 25"/>
-          <p:cNvSpPr txBox="1"/>
-          <p:nvPr/>
-        </p:nvSpPr>
-        <p:spPr>
-          <a:xfrm>
-            <a:off x="2011680" y="6473952"/>
-            <a:ext cx="7498079" cy="256032"/>
+            <a:off x="7406640" y="6446520"/>
+            <a:ext cx="3108960" cy="292608"/>
           </a:xfrm>
           <a:prstGeom prst="rect">
             <a:avLst/>
@@ -5769,37 +5173,38 @@
           </a:bodyPr>
           <a:lstStyle/>
           <a:p>
-            <a:r>
-              <a:rPr sz="1200" b="0" i="0" u="sng">
+            <a:pPr algn="r"/>
+            <a:r>
+              <a:rPr sz="1400" b="1" i="0" u="sng">
                 <a:solidFill>
                   <a:srgbClr val="0E7490"/>
                 </a:solidFill>
                 <a:latin typeface="Calibri"/>
                 <a:hlinkClick r:id="rId2"/>
               </a:rPr>
-              <a:t>https://finsight-off.vercel.app</a:t>
-            </a:r>
-          </a:p>
-        </p:txBody>
-      </p:sp>
-      <p:sp>
-        <p:nvSpPr>
-          <p:cNvPr id="27" name="TextBox 26"/>
-          <p:cNvSpPr txBox="1"/>
-          <p:nvPr/>
-        </p:nvSpPr>
-        <p:spPr>
-          <a:xfrm>
-            <a:off x="10607040" y="6473952"/>
-            <a:ext cx="1097280" cy="256032"/>
-          </a:xfrm>
-          <a:prstGeom prst="rect">
-            <a:avLst/>
-          </a:prstGeom>
-          <a:noFill/>
-        </p:spPr>
-        <p:txBody>
-          <a:bodyPr wrap="square" lIns="0" rIns="0" tIns="0" bIns="0" anchor="t"/>
+              <a:t>finsight-off.vercel.app</a:t>
+            </a:r>
+          </a:p>
+        </p:txBody>
+      </p:sp>
+      <p:sp>
+        <p:nvSpPr>
+          <p:cNvPr id="20" name="TextBox 19"/>
+          <p:cNvSpPr txBox="1"/>
+          <p:nvPr/>
+        </p:nvSpPr>
+        <p:spPr>
+          <a:xfrm>
+            <a:off x="10698480" y="6446520"/>
+            <a:ext cx="1005840" cy="292608"/>
+          </a:xfrm>
+          <a:prstGeom prst="rect">
+            <a:avLst/>
+          </a:prstGeom>
+          <a:noFill/>
+        </p:spPr>
+        <p:txBody>
+          <a:bodyPr wrap="square" lIns="0" rIns="0" tIns="0" bIns="0"/>
           <a:lstStyle/>
           <a:p>
             <a:pPr algn="r">
@@ -5811,13 +5216,13 @@
               </a:spcAft>
             </a:pPr>
             <a:r>
-              <a:rPr sz="1200" b="1" i="0">
-                <a:solidFill>
-                  <a:srgbClr val="5B6B82"/>
-                </a:solidFill>
-                <a:latin typeface="Calibri"/>
-              </a:rPr>
-              <a:t>3  /  8</a:t>
+              <a:rPr sz="1400" b="1" i="0">
+                <a:solidFill>
+                  <a:srgbClr val="3E4C63"/>
+                </a:solidFill>
+                <a:latin typeface="Calibri"/>
+              </a:rPr>
+              <a:t>3  /  9</a:t>
             </a:r>
           </a:p>
         </p:txBody>
@@ -5855,7 +5260,7 @@
             <a:avLst/>
           </a:prstGeom>
           <a:solidFill>
-            <a:srgbClr val="F3F6FB"/>
+            <a:srgbClr val="F4F7FB"/>
           </a:solidFill>
           <a:ln>
             <a:noFill/>
@@ -5891,16 +5296,16 @@
         </p:nvSpPr>
         <p:spPr>
           <a:xfrm>
-            <a:off x="502920" y="347472"/>
-            <a:ext cx="7315200" cy="256032"/>
-          </a:xfrm>
-          <a:prstGeom prst="rect">
-            <a:avLst/>
-          </a:prstGeom>
-          <a:noFill/>
-        </p:spPr>
-        <p:txBody>
-          <a:bodyPr wrap="square" lIns="0" rIns="0" tIns="0" bIns="0" anchor="t"/>
+            <a:off x="502920" y="292608"/>
+            <a:ext cx="9144000" cy="292608"/>
+          </a:xfrm>
+          <a:prstGeom prst="rect">
+            <a:avLst/>
+          </a:prstGeom>
+          <a:noFill/>
+        </p:spPr>
+        <p:txBody>
+          <a:bodyPr wrap="square" lIns="0" rIns="0" tIns="0" bIns="0"/>
           <a:lstStyle/>
           <a:p>
             <a:pPr algn="l">
@@ -5912,13 +5317,13 @@
               </a:spcAft>
             </a:pPr>
             <a:r>
-              <a:rPr sz="1200" b="1" i="0">
-                <a:solidFill>
-                  <a:srgbClr val="0E7490"/>
-                </a:solidFill>
-                <a:latin typeface="Calibri"/>
-              </a:rPr>
-              <a:t>TRY IT</a:t>
+              <a:rPr sz="1400" b="1" i="0">
+                <a:solidFill>
+                  <a:srgbClr val="0F9F6E"/>
+                </a:solidFill>
+                <a:latin typeface="Calibri"/>
+              </a:rPr>
+              <a:t>WHAT FINSIGHT DOES</a:t>
             </a:r>
           </a:p>
         </p:txBody>
@@ -5932,15 +5337,15 @@
         <p:spPr>
           <a:xfrm>
             <a:off x="502920" y="640080"/>
-            <a:ext cx="7315200" cy="822960"/>
-          </a:xfrm>
-          <a:prstGeom prst="rect">
-            <a:avLst/>
-          </a:prstGeom>
-          <a:noFill/>
-        </p:spPr>
-        <p:txBody>
-          <a:bodyPr wrap="square" lIns="0" rIns="0" tIns="0" bIns="0" anchor="t"/>
+            <a:ext cx="10972800" cy="640080"/>
+          </a:xfrm>
+          <a:prstGeom prst="rect">
+            <a:avLst/>
+          </a:prstGeom>
+          <a:noFill/>
+        </p:spPr>
+        <p:txBody>
+          <a:bodyPr wrap="square" lIns="0" rIns="0" tIns="0" bIns="0"/>
           <a:lstStyle/>
           <a:p>
             <a:pPr algn="l">
@@ -5952,62 +5357,27 @@
               </a:spcAft>
             </a:pPr>
             <a:r>
-              <a:rPr sz="3600" b="1" i="0">
+              <a:rPr sz="3400" b="1" i="0">
                 <a:solidFill>
                   <a:srgbClr val="0F172A"/>
                 </a:solidFill>
                 <a:latin typeface="Calibri"/>
               </a:rPr>
-              <a:t>Both files, or no forecast.</a:t>
-            </a:r>
-          </a:p>
-        </p:txBody>
-      </p:sp>
-      <p:sp>
-        <p:nvSpPr>
-          <p:cNvPr id="5" name="TextBox 4"/>
-          <p:cNvSpPr txBox="1"/>
-          <p:nvPr/>
-        </p:nvSpPr>
-        <p:spPr>
-          <a:xfrm>
-            <a:off x="502920" y="1554480"/>
-            <a:ext cx="7315200" cy="365760"/>
-          </a:xfrm>
-          <a:prstGeom prst="rect">
-            <a:avLst/>
-          </a:prstGeom>
-          <a:noFill/>
-        </p:spPr>
-        <p:txBody>
-          <a:bodyPr wrap="none">
-            <a:spAutoFit/>
-          </a:bodyPr>
-          <a:lstStyle/>
-          <a:p>
-            <a:r>
-              <a:rPr sz="1600" b="1" i="0" u="sng">
-                <a:solidFill>
-                  <a:srgbClr val="0E7490"/>
-                </a:solidFill>
-                <a:latin typeface="Calibri"/>
-                <a:hlinkClick r:id="rId2"/>
-              </a:rPr>
-              <a:t>https://finsight-off.vercel.app/try</a:t>
-            </a:r>
-          </a:p>
-        </p:txBody>
-      </p:sp>
-      <p:sp>
-        <p:nvSpPr>
-          <p:cNvPr id="6" name="Rounded Rectangle 5"/>
+              <a:t>Five answers. No chatbot.</a:t>
+            </a:r>
+          </a:p>
+        </p:txBody>
+      </p:sp>
+      <p:sp>
+        <p:nvSpPr>
+          <p:cNvPr id="5" name="Rounded Rectangle 4"/>
           <p:cNvSpPr/>
           <p:nvPr/>
         </p:nvSpPr>
         <p:spPr>
           <a:xfrm>
-            <a:off x="502920" y="2148840"/>
-            <a:ext cx="7452360" cy="1143000"/>
+            <a:off x="502920" y="1463040"/>
+            <a:ext cx="11155680" cy="841248"/>
           </a:xfrm>
           <a:prstGeom prst="roundRect">
             <a:avLst>
@@ -6017,9 +5387,9 @@
           <a:solidFill>
             <a:srgbClr val="FFFFFF"/>
           </a:solidFill>
-          <a:ln w="12700">
+          <a:ln w="15875">
             <a:solidFill>
-              <a:srgbClr val="E2E8F0"/>
+              <a:srgbClr val="D5DEEA"/>
             </a:solidFill>
           </a:ln>
         </p:spPr>
@@ -6047,25 +5417,147 @@
       </p:sp>
       <p:sp>
         <p:nvSpPr>
-          <p:cNvPr id="7" name="Rounded Rectangle 6"/>
+          <p:cNvPr id="6" name="TextBox 5"/>
+          <p:cNvSpPr txBox="1"/>
+          <p:nvPr/>
+        </p:nvSpPr>
+        <p:spPr>
+          <a:xfrm>
+            <a:off x="685800" y="1664208"/>
+            <a:ext cx="457200" cy="438912"/>
+          </a:xfrm>
+          <a:prstGeom prst="rect">
+            <a:avLst/>
+          </a:prstGeom>
+          <a:noFill/>
+        </p:spPr>
+        <p:txBody>
+          <a:bodyPr wrap="square" lIns="0" rIns="0" tIns="0" bIns="0"/>
+          <a:lstStyle/>
+          <a:p>
+            <a:pPr algn="l">
+              <a:spcBef>
+                <a:spcPts val="0"/>
+              </a:spcBef>
+              <a:spcAft>
+                <a:spcPts val="0"/>
+              </a:spcAft>
+            </a:pPr>
+            <a:r>
+              <a:rPr sz="2200" b="1" i="0">
+                <a:solidFill>
+                  <a:srgbClr val="0F9F6E"/>
+                </a:solidFill>
+                <a:latin typeface="Calibri"/>
+              </a:rPr>
+              <a:t>1</a:t>
+            </a:r>
+          </a:p>
+        </p:txBody>
+      </p:sp>
+      <p:sp>
+        <p:nvSpPr>
+          <p:cNvPr id="7" name="TextBox 6"/>
+          <p:cNvSpPr txBox="1"/>
+          <p:nvPr/>
+        </p:nvSpPr>
+        <p:spPr>
+          <a:xfrm>
+            <a:off x="1280160" y="1572768"/>
+            <a:ext cx="3840480" cy="594360"/>
+          </a:xfrm>
+          <a:prstGeom prst="rect">
+            <a:avLst/>
+          </a:prstGeom>
+          <a:noFill/>
+        </p:spPr>
+        <p:txBody>
+          <a:bodyPr wrap="square" lIns="0" rIns="0" tIns="0" bIns="0"/>
+          <a:lstStyle/>
+          <a:p>
+            <a:pPr algn="l">
+              <a:spcBef>
+                <a:spcPts val="0"/>
+              </a:spcBef>
+              <a:spcAft>
+                <a:spcPts val="0"/>
+              </a:spcAft>
+            </a:pPr>
+            <a:r>
+              <a:rPr sz="2000" b="1" i="0">
+                <a:solidFill>
+                  <a:srgbClr val="0F172A"/>
+                </a:solidFill>
+                <a:latin typeface="Calibri"/>
+              </a:rPr>
+              <a:t>Where you stand</a:t>
+            </a:r>
+          </a:p>
+        </p:txBody>
+      </p:sp>
+      <p:sp>
+        <p:nvSpPr>
+          <p:cNvPr id="8" name="TextBox 7"/>
+          <p:cNvSpPr txBox="1"/>
+          <p:nvPr/>
+        </p:nvSpPr>
+        <p:spPr>
+          <a:xfrm>
+            <a:off x="5212080" y="1627632"/>
+            <a:ext cx="6126480" cy="530352"/>
+          </a:xfrm>
+          <a:prstGeom prst="rect">
+            <a:avLst/>
+          </a:prstGeom>
+          <a:noFill/>
+        </p:spPr>
+        <p:txBody>
+          <a:bodyPr wrap="square" lIns="0" rIns="0" tIns="0" bIns="0"/>
+          <a:lstStyle/>
+          <a:p>
+            <a:pPr algn="l">
+              <a:spcBef>
+                <a:spcPts val="0"/>
+              </a:spcBef>
+              <a:spcAft>
+                <a:spcPts val="0"/>
+              </a:spcAft>
+            </a:pPr>
+            <a:r>
+              <a:rPr sz="1600" b="0" i="0">
+                <a:solidFill>
+                  <a:srgbClr val="3E4C63"/>
+                </a:solidFill>
+                <a:latin typeface="Calibri"/>
+              </a:rPr>
+              <a:t>Cash today, what was billed, what was collected, and what was spent.</a:t>
+            </a:r>
+          </a:p>
+        </p:txBody>
+      </p:sp>
+      <p:sp>
+        <p:nvSpPr>
+          <p:cNvPr id="9" name="Rounded Rectangle 8"/>
           <p:cNvSpPr/>
           <p:nvPr/>
         </p:nvSpPr>
         <p:spPr>
           <a:xfrm>
-            <a:off x="713232" y="2478024"/>
-            <a:ext cx="475488" cy="475488"/>
+            <a:off x="502920" y="2395728"/>
+            <a:ext cx="11155680" cy="841248"/>
           </a:xfrm>
           <a:prstGeom prst="roundRect">
             <a:avLst>
-              <a:gd name="adj" fmla="val 50000"/>
+              <a:gd name="adj" fmla="val 8000"/>
             </a:avLst>
           </a:prstGeom>
           <a:solidFill>
-            <a:srgbClr val="0F172A"/>
+            <a:srgbClr val="FFFFFF"/>
           </a:solidFill>
-          <a:ln>
-            <a:noFill/>
+          <a:ln w="15875">
+            <a:solidFill>
+              <a:srgbClr val="D5DEEA"/>
+            </a:solidFill>
           </a:ln>
         </p:spPr>
         <p:style>
@@ -6092,62 +5584,22 @@
       </p:sp>
       <p:sp>
         <p:nvSpPr>
-          <p:cNvPr id="8" name="TextBox 7"/>
-          <p:cNvSpPr txBox="1"/>
-          <p:nvPr/>
-        </p:nvSpPr>
-        <p:spPr>
-          <a:xfrm>
-            <a:off x="713232" y="2551176"/>
-            <a:ext cx="475488" cy="365760"/>
-          </a:xfrm>
-          <a:prstGeom prst="rect">
-            <a:avLst/>
-          </a:prstGeom>
-          <a:noFill/>
-        </p:spPr>
-        <p:txBody>
-          <a:bodyPr wrap="square" lIns="0" rIns="0" tIns="0" bIns="0" anchor="t"/>
-          <a:lstStyle/>
-          <a:p>
-            <a:pPr algn="ctr">
-              <a:spcBef>
-                <a:spcPts val="0"/>
-              </a:spcBef>
-              <a:spcAft>
-                <a:spcPts val="0"/>
-              </a:spcAft>
-            </a:pPr>
-            <a:r>
-              <a:rPr sz="1600" b="1" i="0">
-                <a:solidFill>
-                  <a:srgbClr val="FFFFFF"/>
-                </a:solidFill>
-                <a:latin typeface="Calibri"/>
-              </a:rPr>
-              <a:t>1</a:t>
-            </a:r>
-          </a:p>
-        </p:txBody>
-      </p:sp>
-      <p:sp>
-        <p:nvSpPr>
-          <p:cNvPr id="9" name="TextBox 8"/>
-          <p:cNvSpPr txBox="1"/>
-          <p:nvPr/>
-        </p:nvSpPr>
-        <p:spPr>
-          <a:xfrm>
-            <a:off x="1417320" y="2350008"/>
-            <a:ext cx="6217920" cy="329184"/>
-          </a:xfrm>
-          <a:prstGeom prst="rect">
-            <a:avLst/>
-          </a:prstGeom>
-          <a:noFill/>
-        </p:spPr>
-        <p:txBody>
-          <a:bodyPr wrap="square" lIns="0" rIns="0" tIns="0" bIns="0" anchor="t"/>
+          <p:cNvPr id="10" name="TextBox 9"/>
+          <p:cNvSpPr txBox="1"/>
+          <p:nvPr/>
+        </p:nvSpPr>
+        <p:spPr>
+          <a:xfrm>
+            <a:off x="685800" y="2596896"/>
+            <a:ext cx="457200" cy="438912"/>
+          </a:xfrm>
+          <a:prstGeom prst="rect">
+            <a:avLst/>
+          </a:prstGeom>
+          <a:noFill/>
+        </p:spPr>
+        <p:txBody>
+          <a:bodyPr wrap="square" lIns="0" rIns="0" tIns="0" bIns="0"/>
           <a:lstStyle/>
           <a:p>
             <a:pPr algn="l">
@@ -6159,35 +5611,75 @@
               </a:spcAft>
             </a:pPr>
             <a:r>
+              <a:rPr sz="2200" b="1" i="0">
+                <a:solidFill>
+                  <a:srgbClr val="0F9F6E"/>
+                </a:solidFill>
+                <a:latin typeface="Calibri"/>
+              </a:rPr>
+              <a:t>2</a:t>
+            </a:r>
+          </a:p>
+        </p:txBody>
+      </p:sp>
+      <p:sp>
+        <p:nvSpPr>
+          <p:cNvPr id="11" name="TextBox 10"/>
+          <p:cNvSpPr txBox="1"/>
+          <p:nvPr/>
+        </p:nvSpPr>
+        <p:spPr>
+          <a:xfrm>
+            <a:off x="1280160" y="2505456"/>
+            <a:ext cx="3840480" cy="594360"/>
+          </a:xfrm>
+          <a:prstGeom prst="rect">
+            <a:avLst/>
+          </a:prstGeom>
+          <a:noFill/>
+        </p:spPr>
+        <p:txBody>
+          <a:bodyPr wrap="square" lIns="0" rIns="0" tIns="0" bIns="0"/>
+          <a:lstStyle/>
+          <a:p>
+            <a:pPr algn="l">
+              <a:spcBef>
+                <a:spcPts val="0"/>
+              </a:spcBef>
+              <a:spcAft>
+                <a:spcPts val="0"/>
+              </a:spcAft>
+            </a:pPr>
+            <a:r>
               <a:rPr sz="2000" b="1" i="0">
                 <a:solidFill>
                   <a:srgbClr val="0F172A"/>
                 </a:solidFill>
                 <a:latin typeface="Calibri"/>
               </a:rPr>
-              <a:t>Bank statement</a:t>
-            </a:r>
-          </a:p>
-        </p:txBody>
-      </p:sp>
-      <p:sp>
-        <p:nvSpPr>
-          <p:cNvPr id="10" name="TextBox 9"/>
-          <p:cNvSpPr txBox="1"/>
-          <p:nvPr/>
-        </p:nvSpPr>
-        <p:spPr>
-          <a:xfrm>
-            <a:off x="1417320" y="2734056"/>
-            <a:ext cx="6217920" cy="384048"/>
-          </a:xfrm>
-          <a:prstGeom prst="rect">
-            <a:avLst/>
-          </a:prstGeom>
-          <a:noFill/>
-        </p:spPr>
-        <p:txBody>
-          <a:bodyPr wrap="square" lIns="0" rIns="0" tIns="0" bIns="0" anchor="t"/>
+              <a:t>What happens next</a:t>
+            </a:r>
+          </a:p>
+        </p:txBody>
+      </p:sp>
+      <p:sp>
+        <p:nvSpPr>
+          <p:cNvPr id="12" name="TextBox 11"/>
+          <p:cNvSpPr txBox="1"/>
+          <p:nvPr/>
+        </p:nvSpPr>
+        <p:spPr>
+          <a:xfrm>
+            <a:off x="5212080" y="2560320"/>
+            <a:ext cx="6126480" cy="530352"/>
+          </a:xfrm>
+          <a:prstGeom prst="rect">
+            <a:avLst/>
+          </a:prstGeom>
+          <a:noFill/>
+        </p:spPr>
+        <p:txBody>
+          <a:bodyPr wrap="square" lIns="0" rIns="0" tIns="0" bIns="0"/>
           <a:lstStyle/>
           <a:p>
             <a:pPr algn="l">
@@ -6199,27 +5691,27 @@
               </a:spcAft>
             </a:pPr>
             <a:r>
-              <a:rPr sz="1400" b="0" i="0">
-                <a:solidFill>
-                  <a:srgbClr val="5B6B82"/>
-                </a:solidFill>
-                <a:latin typeface="Calibri"/>
-              </a:rPr>
-              <a:t>Dates and amounts, or debit and credit. This is money in and money out.</a:t>
-            </a:r>
-          </a:p>
-        </p:txBody>
-      </p:sp>
-      <p:sp>
-        <p:nvSpPr>
-          <p:cNvPr id="11" name="Rounded Rectangle 10"/>
+              <a:rPr sz="1600" b="0" i="0">
+                <a:solidFill>
+                  <a:srgbClr val="3E4C63"/>
+                </a:solidFill>
+                <a:latin typeface="Calibri"/>
+              </a:rPr>
+              <a:t>A 90-day path. Blue knows payday. Gold only repeats the last 30 days.</a:t>
+            </a:r>
+          </a:p>
+        </p:txBody>
+      </p:sp>
+      <p:sp>
+        <p:nvSpPr>
+          <p:cNvPr id="13" name="Rounded Rectangle 12"/>
           <p:cNvSpPr/>
           <p:nvPr/>
         </p:nvSpPr>
         <p:spPr>
           <a:xfrm>
-            <a:off x="502920" y="3429000"/>
-            <a:ext cx="7452360" cy="1143000"/>
+            <a:off x="502920" y="3328416"/>
+            <a:ext cx="11155680" cy="841248"/>
           </a:xfrm>
           <a:prstGeom prst="roundRect">
             <a:avLst>
@@ -6229,9 +5721,9 @@
           <a:solidFill>
             <a:srgbClr val="FFFFFF"/>
           </a:solidFill>
-          <a:ln w="12700">
+          <a:ln w="15875">
             <a:solidFill>
-              <a:srgbClr val="E2E8F0"/>
+              <a:srgbClr val="D5DEEA"/>
             </a:solidFill>
           </a:ln>
         </p:spPr>
@@ -6259,25 +5751,147 @@
       </p:sp>
       <p:sp>
         <p:nvSpPr>
-          <p:cNvPr id="12" name="Rounded Rectangle 11"/>
+          <p:cNvPr id="14" name="TextBox 13"/>
+          <p:cNvSpPr txBox="1"/>
+          <p:nvPr/>
+        </p:nvSpPr>
+        <p:spPr>
+          <a:xfrm>
+            <a:off x="685800" y="3529584"/>
+            <a:ext cx="457200" cy="438912"/>
+          </a:xfrm>
+          <a:prstGeom prst="rect">
+            <a:avLst/>
+          </a:prstGeom>
+          <a:noFill/>
+        </p:spPr>
+        <p:txBody>
+          <a:bodyPr wrap="square" lIns="0" rIns="0" tIns="0" bIns="0"/>
+          <a:lstStyle/>
+          <a:p>
+            <a:pPr algn="l">
+              <a:spcBef>
+                <a:spcPts val="0"/>
+              </a:spcBef>
+              <a:spcAft>
+                <a:spcPts val="0"/>
+              </a:spcAft>
+            </a:pPr>
+            <a:r>
+              <a:rPr sz="2200" b="1" i="0">
+                <a:solidFill>
+                  <a:srgbClr val="0F9F6E"/>
+                </a:solidFill>
+                <a:latin typeface="Calibri"/>
+              </a:rPr>
+              <a:t>3</a:t>
+            </a:r>
+          </a:p>
+        </p:txBody>
+      </p:sp>
+      <p:sp>
+        <p:nvSpPr>
+          <p:cNvPr id="15" name="TextBox 14"/>
+          <p:cNvSpPr txBox="1"/>
+          <p:nvPr/>
+        </p:nvSpPr>
+        <p:spPr>
+          <a:xfrm>
+            <a:off x="1280160" y="3438144"/>
+            <a:ext cx="3840480" cy="594360"/>
+          </a:xfrm>
+          <a:prstGeom prst="rect">
+            <a:avLst/>
+          </a:prstGeom>
+          <a:noFill/>
+        </p:spPr>
+        <p:txBody>
+          <a:bodyPr wrap="square" lIns="0" rIns="0" tIns="0" bIns="0"/>
+          <a:lstStyle/>
+          <a:p>
+            <a:pPr algn="l">
+              <a:spcBef>
+                <a:spcPts val="0"/>
+              </a:spcBef>
+              <a:spcAft>
+                <a:spcPts val="0"/>
+              </a:spcAft>
+            </a:pPr>
+            <a:r>
+              <a:rPr sz="2000" b="1" i="0">
+                <a:solidFill>
+                  <a:srgbClr val="0F172A"/>
+                </a:solidFill>
+                <a:latin typeface="Calibri"/>
+              </a:rPr>
+              <a:t>Why cash falls</a:t>
+            </a:r>
+          </a:p>
+        </p:txBody>
+      </p:sp>
+      <p:sp>
+        <p:nvSpPr>
+          <p:cNvPr id="16" name="TextBox 15"/>
+          <p:cNvSpPr txBox="1"/>
+          <p:nvPr/>
+        </p:nvSpPr>
+        <p:spPr>
+          <a:xfrm>
+            <a:off x="5212080" y="3493008"/>
+            <a:ext cx="6126480" cy="530352"/>
+          </a:xfrm>
+          <a:prstGeom prst="rect">
+            <a:avLst/>
+          </a:prstGeom>
+          <a:noFill/>
+        </p:spPr>
+        <p:txBody>
+          <a:bodyPr wrap="square" lIns="0" rIns="0" tIns="0" bIns="0"/>
+          <a:lstStyle/>
+          <a:p>
+            <a:pPr algn="l">
+              <a:spcBef>
+                <a:spcPts val="0"/>
+              </a:spcBef>
+              <a:spcAft>
+                <a:spcPts val="0"/>
+              </a:spcAft>
+            </a:pPr>
+            <a:r>
+              <a:rPr sz="1600" b="0" i="0">
+                <a:solidFill>
+                  <a:srgbClr val="3E4C63"/>
+                </a:solidFill>
+                <a:latin typeface="Calibri"/>
+              </a:rPr>
+              <a:t>The scheduled item that takes the balance through zero.</a:t>
+            </a:r>
+          </a:p>
+        </p:txBody>
+      </p:sp>
+      <p:sp>
+        <p:nvSpPr>
+          <p:cNvPr id="17" name="Rounded Rectangle 16"/>
           <p:cNvSpPr/>
           <p:nvPr/>
         </p:nvSpPr>
         <p:spPr>
           <a:xfrm>
-            <a:off x="713232" y="3758184"/>
-            <a:ext cx="475488" cy="475488"/>
+            <a:off x="502920" y="4261104"/>
+            <a:ext cx="11155680" cy="841248"/>
           </a:xfrm>
           <a:prstGeom prst="roundRect">
             <a:avLst>
-              <a:gd name="adj" fmla="val 50000"/>
+              <a:gd name="adj" fmla="val 8000"/>
             </a:avLst>
           </a:prstGeom>
           <a:solidFill>
-            <a:srgbClr val="0F172A"/>
+            <a:srgbClr val="FFFFFF"/>
           </a:solidFill>
-          <a:ln>
-            <a:noFill/>
+          <a:ln w="15875">
+            <a:solidFill>
+              <a:srgbClr val="D5DEEA"/>
+            </a:solidFill>
           </a:ln>
         </p:spPr>
         <p:style>
@@ -6304,62 +5918,22 @@
       </p:sp>
       <p:sp>
         <p:nvSpPr>
-          <p:cNvPr id="13" name="TextBox 12"/>
-          <p:cNvSpPr txBox="1"/>
-          <p:nvPr/>
-        </p:nvSpPr>
-        <p:spPr>
-          <a:xfrm>
-            <a:off x="713232" y="3831336"/>
-            <a:ext cx="475488" cy="365760"/>
-          </a:xfrm>
-          <a:prstGeom prst="rect">
-            <a:avLst/>
-          </a:prstGeom>
-          <a:noFill/>
-        </p:spPr>
-        <p:txBody>
-          <a:bodyPr wrap="square" lIns="0" rIns="0" tIns="0" bIns="0" anchor="t"/>
-          <a:lstStyle/>
-          <a:p>
-            <a:pPr algn="ctr">
-              <a:spcBef>
-                <a:spcPts val="0"/>
-              </a:spcBef>
-              <a:spcAft>
-                <a:spcPts val="0"/>
-              </a:spcAft>
-            </a:pPr>
-            <a:r>
-              <a:rPr sz="1600" b="1" i="0">
-                <a:solidFill>
-                  <a:srgbClr val="FFFFFF"/>
-                </a:solidFill>
-                <a:latin typeface="Calibri"/>
-              </a:rPr>
-              <a:t>2</a:t>
-            </a:r>
-          </a:p>
-        </p:txBody>
-      </p:sp>
-      <p:sp>
-        <p:nvSpPr>
-          <p:cNvPr id="14" name="TextBox 13"/>
-          <p:cNvSpPr txBox="1"/>
-          <p:nvPr/>
-        </p:nvSpPr>
-        <p:spPr>
-          <a:xfrm>
-            <a:off x="1417320" y="3630168"/>
-            <a:ext cx="6217920" cy="329184"/>
-          </a:xfrm>
-          <a:prstGeom prst="rect">
-            <a:avLst/>
-          </a:prstGeom>
-          <a:noFill/>
-        </p:spPr>
-        <p:txBody>
-          <a:bodyPr wrap="square" lIns="0" rIns="0" tIns="0" bIns="0" anchor="t"/>
+          <p:cNvPr id="18" name="TextBox 17"/>
+          <p:cNvSpPr txBox="1"/>
+          <p:nvPr/>
+        </p:nvSpPr>
+        <p:spPr>
+          <a:xfrm>
+            <a:off x="685800" y="4462272"/>
+            <a:ext cx="457200" cy="438912"/>
+          </a:xfrm>
+          <a:prstGeom prst="rect">
+            <a:avLst/>
+          </a:prstGeom>
+          <a:noFill/>
+        </p:spPr>
+        <p:txBody>
+          <a:bodyPr wrap="square" lIns="0" rIns="0" tIns="0" bIns="0"/>
           <a:lstStyle/>
           <a:p>
             <a:pPr algn="l">
@@ -6371,35 +5945,75 @@
               </a:spcAft>
             </a:pPr>
             <a:r>
+              <a:rPr sz="2200" b="1" i="0">
+                <a:solidFill>
+                  <a:srgbClr val="0F9F6E"/>
+                </a:solidFill>
+                <a:latin typeface="Calibri"/>
+              </a:rPr>
+              <a:t>4</a:t>
+            </a:r>
+          </a:p>
+        </p:txBody>
+      </p:sp>
+      <p:sp>
+        <p:nvSpPr>
+          <p:cNvPr id="19" name="TextBox 18"/>
+          <p:cNvSpPr txBox="1"/>
+          <p:nvPr/>
+        </p:nvSpPr>
+        <p:spPr>
+          <a:xfrm>
+            <a:off x="1280160" y="4370832"/>
+            <a:ext cx="3840480" cy="594360"/>
+          </a:xfrm>
+          <a:prstGeom prst="rect">
+            <a:avLst/>
+          </a:prstGeom>
+          <a:noFill/>
+        </p:spPr>
+        <p:txBody>
+          <a:bodyPr wrap="square" lIns="0" rIns="0" tIns="0" bIns="0"/>
+          <a:lstStyle/>
+          <a:p>
+            <a:pPr algn="l">
+              <a:spcBef>
+                <a:spcPts val="0"/>
+              </a:spcBef>
+              <a:spcAft>
+                <a:spcPts val="0"/>
+              </a:spcAft>
+            </a:pPr>
+            <a:r>
               <a:rPr sz="2000" b="1" i="0">
                 <a:solidFill>
                   <a:srgbClr val="0F172A"/>
                 </a:solidFill>
                 <a:latin typeface="Calibri"/>
               </a:rPr>
-              <a:t>Invoices</a:t>
-            </a:r>
-          </a:p>
-        </p:txBody>
-      </p:sp>
-      <p:sp>
-        <p:nvSpPr>
-          <p:cNvPr id="15" name="TextBox 14"/>
-          <p:cNvSpPr txBox="1"/>
-          <p:nvPr/>
-        </p:nvSpPr>
-        <p:spPr>
-          <a:xfrm>
-            <a:off x="1417320" y="4014216"/>
-            <a:ext cx="6217920" cy="384048"/>
-          </a:xfrm>
-          <a:prstGeom prst="rect">
-            <a:avLst/>
-          </a:prstGeom>
-          <a:noFill/>
-        </p:spPr>
-        <p:txBody>
-          <a:bodyPr wrap="square" lIns="0" rIns="0" tIns="0" bIns="0" anchor="t"/>
+              <a:t>Try a change</a:t>
+            </a:r>
+          </a:p>
+        </p:txBody>
+      </p:sp>
+      <p:sp>
+        <p:nvSpPr>
+          <p:cNvPr id="20" name="TextBox 19"/>
+          <p:cNvSpPr txBox="1"/>
+          <p:nvPr/>
+        </p:nvSpPr>
+        <p:spPr>
+          <a:xfrm>
+            <a:off x="5212080" y="4425696"/>
+            <a:ext cx="6126480" cy="530352"/>
+          </a:xfrm>
+          <a:prstGeom prst="rect">
+            <a:avLst/>
+          </a:prstGeom>
+          <a:noFill/>
+        </p:spPr>
+        <p:txBody>
+          <a:bodyPr wrap="square" lIns="0" rIns="0" tIns="0" bIns="0"/>
           <a:lstStyle/>
           <a:p>
             <a:pPr algn="l">
@@ -6411,27 +6025,27 @@
               </a:spcAft>
             </a:pPr>
             <a:r>
-              <a:rPr sz="1400" b="0" i="0">
-                <a:solidFill>
-                  <a:srgbClr val="5B6B82"/>
-                </a:solidFill>
-                <a:latin typeface="Calibri"/>
-              </a:rPr>
-              <a:t>Customer, amount, and due date. This is who still owes you.</a:t>
-            </a:r>
-          </a:p>
-        </p:txBody>
-      </p:sp>
-      <p:sp>
-        <p:nvSpPr>
-          <p:cNvPr id="16" name="Rounded Rectangle 15"/>
+              <a:rPr sz="1600" b="0" i="0">
+                <a:solidFill>
+                  <a:srgbClr val="3E4C63"/>
+                </a:solidFill>
+                <a:latin typeface="Calibri"/>
+              </a:rPr>
+              <a:t>Move one collection date or cut one bill. The same engine recalculates.</a:t>
+            </a:r>
+          </a:p>
+        </p:txBody>
+      </p:sp>
+      <p:sp>
+        <p:nvSpPr>
+          <p:cNvPr id="21" name="Rounded Rectangle 20"/>
           <p:cNvSpPr/>
           <p:nvPr/>
         </p:nvSpPr>
         <p:spPr>
           <a:xfrm>
-            <a:off x="502920" y="4709160"/>
-            <a:ext cx="7452360" cy="1143000"/>
+            <a:off x="502920" y="5193792"/>
+            <a:ext cx="11155680" cy="841248"/>
           </a:xfrm>
           <a:prstGeom prst="roundRect">
             <a:avLst>
@@ -6441,9 +6055,9 @@
           <a:solidFill>
             <a:srgbClr val="FFFFFF"/>
           </a:solidFill>
-          <a:ln w="12700">
+          <a:ln w="15875">
             <a:solidFill>
-              <a:srgbClr val="E2E8F0"/>
+              <a:srgbClr val="D5DEEA"/>
             </a:solidFill>
           </a:ln>
         </p:spPr>
@@ -6471,107 +6085,22 @@
       </p:sp>
       <p:sp>
         <p:nvSpPr>
-          <p:cNvPr id="17" name="Rounded Rectangle 16"/>
-          <p:cNvSpPr/>
-          <p:nvPr/>
-        </p:nvSpPr>
-        <p:spPr>
-          <a:xfrm>
-            <a:off x="713232" y="5038344"/>
-            <a:ext cx="475488" cy="475488"/>
-          </a:xfrm>
-          <a:prstGeom prst="roundRect">
-            <a:avLst>
-              <a:gd name="adj" fmla="val 50000"/>
-            </a:avLst>
-          </a:prstGeom>
-          <a:solidFill>
-            <a:srgbClr val="0F172A"/>
-          </a:solidFill>
-          <a:ln>
-            <a:noFill/>
-          </a:ln>
-        </p:spPr>
-        <p:style>
-          <a:lnRef idx="1">
-            <a:schemeClr val="accent1"/>
-          </a:lnRef>
-          <a:fillRef idx="3">
-            <a:schemeClr val="accent1"/>
-          </a:fillRef>
-          <a:effectRef idx="2">
-            <a:schemeClr val="accent1"/>
-          </a:effectRef>
-          <a:fontRef idx="minor">
-            <a:schemeClr val="lt1"/>
-          </a:fontRef>
-        </p:style>
-        <p:txBody>
-          <a:bodyPr rtlCol="0" anchor="ctr"/>
-          <a:lstStyle/>
-          <a:p>
-            <a:pPr algn="ctr"/>
-          </a:p>
-        </p:txBody>
-      </p:sp>
-      <p:sp>
-        <p:nvSpPr>
-          <p:cNvPr id="18" name="TextBox 17"/>
-          <p:cNvSpPr txBox="1"/>
-          <p:nvPr/>
-        </p:nvSpPr>
-        <p:spPr>
-          <a:xfrm>
-            <a:off x="713232" y="5111496"/>
-            <a:ext cx="475488" cy="365760"/>
-          </a:xfrm>
-          <a:prstGeom prst="rect">
-            <a:avLst/>
-          </a:prstGeom>
-          <a:noFill/>
-        </p:spPr>
-        <p:txBody>
-          <a:bodyPr wrap="square" lIns="0" rIns="0" tIns="0" bIns="0" anchor="t"/>
-          <a:lstStyle/>
-          <a:p>
-            <a:pPr algn="ctr">
-              <a:spcBef>
-                <a:spcPts val="0"/>
-              </a:spcBef>
-              <a:spcAft>
-                <a:spcPts val="0"/>
-              </a:spcAft>
-            </a:pPr>
-            <a:r>
-              <a:rPr sz="1600" b="1" i="0">
-                <a:solidFill>
-                  <a:srgbClr val="FFFFFF"/>
-                </a:solidFill>
-                <a:latin typeface="Calibri"/>
-              </a:rPr>
-              <a:t>3</a:t>
-            </a:r>
-          </a:p>
-        </p:txBody>
-      </p:sp>
-      <p:sp>
-        <p:nvSpPr>
-          <p:cNvPr id="19" name="TextBox 18"/>
-          <p:cNvSpPr txBox="1"/>
-          <p:nvPr/>
-        </p:nvSpPr>
-        <p:spPr>
-          <a:xfrm>
-            <a:off x="1417320" y="4910328"/>
-            <a:ext cx="6217920" cy="329184"/>
-          </a:xfrm>
-          <a:prstGeom prst="rect">
-            <a:avLst/>
-          </a:prstGeom>
-          <a:noFill/>
-        </p:spPr>
-        <p:txBody>
-          <a:bodyPr wrap="square" lIns="0" rIns="0" tIns="0" bIns="0" anchor="t"/>
+          <p:cNvPr id="22" name="TextBox 21"/>
+          <p:cNvSpPr txBox="1"/>
+          <p:nvPr/>
+        </p:nvSpPr>
+        <p:spPr>
+          <a:xfrm>
+            <a:off x="685800" y="5394960"/>
+            <a:ext cx="457200" cy="438912"/>
+          </a:xfrm>
+          <a:prstGeom prst="rect">
+            <a:avLst/>
+          </a:prstGeom>
+          <a:noFill/>
+        </p:spPr>
+        <p:txBody>
+          <a:bodyPr wrap="square" lIns="0" rIns="0" tIns="0" bIns="0"/>
           <a:lstStyle/>
           <a:p>
             <a:pPr algn="l">
@@ -6583,35 +6112,75 @@
               </a:spcAft>
             </a:pPr>
             <a:r>
+              <a:rPr sz="2200" b="1" i="0">
+                <a:solidFill>
+                  <a:srgbClr val="0F9F6E"/>
+                </a:solidFill>
+                <a:latin typeface="Calibri"/>
+              </a:rPr>
+              <a:t>5</a:t>
+            </a:r>
+          </a:p>
+        </p:txBody>
+      </p:sp>
+      <p:sp>
+        <p:nvSpPr>
+          <p:cNvPr id="23" name="TextBox 22"/>
+          <p:cNvSpPr txBox="1"/>
+          <p:nvPr/>
+        </p:nvSpPr>
+        <p:spPr>
+          <a:xfrm>
+            <a:off x="1280160" y="5303520"/>
+            <a:ext cx="3840480" cy="594360"/>
+          </a:xfrm>
+          <a:prstGeom prst="rect">
+            <a:avLst/>
+          </a:prstGeom>
+          <a:noFill/>
+        </p:spPr>
+        <p:txBody>
+          <a:bodyPr wrap="square" lIns="0" rIns="0" tIns="0" bIns="0"/>
+          <a:lstStyle/>
+          <a:p>
+            <a:pPr algn="l">
+              <a:spcBef>
+                <a:spcPts val="0"/>
+              </a:spcBef>
+              <a:spcAft>
+                <a:spcPts val="0"/>
+              </a:spcAft>
+            </a:pPr>
+            <a:r>
               <a:rPr sz="2000" b="1" i="0">
                 <a:solidFill>
                   <a:srgbClr val="0F172A"/>
                 </a:solidFill>
                 <a:latin typeface="Calibri"/>
               </a:rPr>
-              <a:t>Show my forecast</a:t>
-            </a:r>
-          </a:p>
-        </p:txBody>
-      </p:sp>
-      <p:sp>
-        <p:nvSpPr>
-          <p:cNvPr id="20" name="TextBox 19"/>
-          <p:cNvSpPr txBox="1"/>
-          <p:nvPr/>
-        </p:nvSpPr>
-        <p:spPr>
-          <a:xfrm>
-            <a:off x="1417320" y="5294376"/>
-            <a:ext cx="6217920" cy="384048"/>
-          </a:xfrm>
-          <a:prstGeom prst="rect">
-            <a:avLst/>
-          </a:prstGeom>
-          <a:noFill/>
-        </p:spPr>
-        <p:txBody>
-          <a:bodyPr wrap="square" lIns="0" rIns="0" tIns="0" bIns="0" anchor="t"/>
+              <a:t>Was this right before?</a:t>
+            </a:r>
+          </a:p>
+        </p:txBody>
+      </p:sp>
+      <p:sp>
+        <p:nvSpPr>
+          <p:cNvPr id="24" name="TextBox 23"/>
+          <p:cNvSpPr txBox="1"/>
+          <p:nvPr/>
+        </p:nvSpPr>
+        <p:spPr>
+          <a:xfrm>
+            <a:off x="5212080" y="5358384"/>
+            <a:ext cx="6126480" cy="530352"/>
+          </a:xfrm>
+          <a:prstGeom prst="rect">
+            <a:avLst/>
+          </a:prstGeom>
+          <a:noFill/>
+        </p:spPr>
+        <p:txBody>
+          <a:bodyPr wrap="square" lIns="0" rIns="0" tIns="0" bIns="0"/>
           <a:lstStyle/>
           <a:p>
             <a:pPr algn="l">
@@ -6623,80 +6192,35 @@
               </a:spcAft>
             </a:pPr>
             <a:r>
-              <a:rPr sz="1400" b="0" i="0">
-                <a:solidFill>
-                  <a:srgbClr val="5B6B82"/>
-                </a:solidFill>
-                <a:latin typeface="Calibri"/>
-              </a:rPr>
-              <a:t>If either file is missing, the page says so and stays on the form.</a:t>
-            </a:r>
-          </a:p>
-        </p:txBody>
-      </p:sp>
-      <p:sp>
-        <p:nvSpPr>
-          <p:cNvPr id="21" name="Rounded Rectangle 20"/>
-          <p:cNvSpPr/>
-          <p:nvPr/>
-        </p:nvSpPr>
-        <p:spPr>
-          <a:xfrm>
-            <a:off x="8229600" y="2148840"/>
-            <a:ext cx="3429000" cy="3703320"/>
-          </a:xfrm>
-          <a:prstGeom prst="roundRect">
-            <a:avLst>
-              <a:gd name="adj" fmla="val 8000"/>
-            </a:avLst>
-          </a:prstGeom>
-          <a:solidFill>
-            <a:srgbClr val="0B1220"/>
-          </a:solidFill>
-          <a:ln>
-            <a:noFill/>
-          </a:ln>
-        </p:spPr>
-        <p:style>
-          <a:lnRef idx="1">
-            <a:schemeClr val="accent1"/>
-          </a:lnRef>
-          <a:fillRef idx="3">
-            <a:schemeClr val="accent1"/>
-          </a:fillRef>
-          <a:effectRef idx="2">
-            <a:schemeClr val="accent1"/>
-          </a:effectRef>
-          <a:fontRef idx="minor">
-            <a:schemeClr val="lt1"/>
-          </a:fontRef>
-        </p:style>
-        <p:txBody>
-          <a:bodyPr rtlCol="0" anchor="ctr"/>
-          <a:lstStyle/>
-          <a:p>
-            <a:pPr algn="ctr"/>
-          </a:p>
-        </p:txBody>
-      </p:sp>
-      <p:sp>
-        <p:nvSpPr>
-          <p:cNvPr id="22" name="TextBox 21"/>
-          <p:cNvSpPr txBox="1"/>
-          <p:nvPr/>
-        </p:nvSpPr>
-        <p:spPr>
-          <a:xfrm>
-            <a:off x="8458200" y="2377440"/>
-            <a:ext cx="3017520" cy="731520"/>
-          </a:xfrm>
-          <a:prstGeom prst="rect">
-            <a:avLst/>
-          </a:prstGeom>
-          <a:noFill/>
-        </p:spPr>
-        <p:txBody>
-          <a:bodyPr wrap="square" lIns="0" rIns="0" tIns="0" bIns="0" anchor="t"/>
+              <a:rPr sz="1600" b="0" i="0">
+                <a:solidFill>
+                  <a:srgbClr val="3E4C63"/>
+                </a:solidFill>
+                <a:latin typeface="Calibri"/>
+              </a:rPr>
+              <a:t>Hide recent days and compare both methods with what really happened.</a:t>
+            </a:r>
+          </a:p>
+        </p:txBody>
+      </p:sp>
+      <p:sp>
+        <p:nvSpPr>
+          <p:cNvPr id="25" name="TextBox 24"/>
+          <p:cNvSpPr txBox="1"/>
+          <p:nvPr/>
+        </p:nvSpPr>
+        <p:spPr>
+          <a:xfrm>
+            <a:off x="502920" y="6446520"/>
+            <a:ext cx="6858000" cy="292608"/>
+          </a:xfrm>
+          <a:prstGeom prst="rect">
+            <a:avLst/>
+          </a:prstGeom>
+          <a:noFill/>
+        </p:spPr>
+        <p:txBody>
+          <a:bodyPr wrap="square" lIns="0" rIns="0" tIns="0" bIns="0"/>
           <a:lstStyle/>
           <a:p>
             <a:pPr algn="l">
@@ -6708,107 +6232,27 @@
               </a:spcAft>
             </a:pPr>
             <a:r>
-              <a:rPr sz="2200" b="1" i="0">
-                <a:solidFill>
-                  <a:srgbClr val="FFFFFF"/>
-                </a:solidFill>
-                <a:latin typeface="Calibri"/>
-              </a:rPr>
-              <a:t>Nothing is stored.</a:t>
-            </a:r>
-          </a:p>
-        </p:txBody>
-      </p:sp>
-      <p:sp>
-        <p:nvSpPr>
-          <p:cNvPr id="23" name="TextBox 22"/>
-          <p:cNvSpPr txBox="1"/>
-          <p:nvPr/>
-        </p:nvSpPr>
-        <p:spPr>
-          <a:xfrm>
-            <a:off x="8458200" y="3246120"/>
-            <a:ext cx="3017520" cy="2194560"/>
-          </a:xfrm>
-          <a:prstGeom prst="rect">
-            <a:avLst/>
-          </a:prstGeom>
-          <a:noFill/>
-        </p:spPr>
-        <p:txBody>
-          <a:bodyPr wrap="square" lIns="0" rIns="0" tIns="0" bIns="0" anchor="t"/>
-          <a:lstStyle/>
-          <a:p>
-            <a:pPr algn="l">
-              <a:spcBef>
-                <a:spcPts val="0"/>
-              </a:spcBef>
-              <a:spcAft>
-                <a:spcPts val="0"/>
-              </a:spcAft>
-            </a:pPr>
-            <a:r>
-              <a:rPr sz="1500" b="0" i="0">
-                <a:solidFill>
-                  <a:srgbClr val="C5D0E0"/>
-                </a:solidFill>
-                <a:latin typeface="Calibri"/>
-              </a:rPr>
-              <a:t>The files are read in the browser. Use different files clears them and returns to the form.</a:t>
-            </a:r>
-          </a:p>
-        </p:txBody>
-      </p:sp>
-      <p:sp>
-        <p:nvSpPr>
-          <p:cNvPr id="24" name="TextBox 23"/>
-          <p:cNvSpPr txBox="1"/>
-          <p:nvPr/>
-        </p:nvSpPr>
-        <p:spPr>
-          <a:xfrm>
-            <a:off x="502920" y="6473952"/>
-            <a:ext cx="7315200" cy="256032"/>
-          </a:xfrm>
-          <a:prstGeom prst="rect">
-            <a:avLst/>
-          </a:prstGeom>
-          <a:noFill/>
-        </p:spPr>
-        <p:txBody>
-          <a:bodyPr wrap="square" lIns="0" rIns="0" tIns="0" bIns="0" anchor="t"/>
-          <a:lstStyle/>
-          <a:p>
-            <a:pPr algn="l">
-              <a:spcBef>
-                <a:spcPts val="0"/>
-              </a:spcBef>
-              <a:spcAft>
-                <a:spcPts val="0"/>
-              </a:spcAft>
-            </a:pPr>
-            <a:r>
-              <a:rPr sz="1200" b="1" i="0">
-                <a:solidFill>
-                  <a:srgbClr val="5B6B82"/>
-                </a:solidFill>
-                <a:latin typeface="Calibri"/>
-              </a:rPr>
-              <a:t>FinSight</a:t>
-            </a:r>
-          </a:p>
-        </p:txBody>
-      </p:sp>
-      <p:sp>
-        <p:nvSpPr>
-          <p:cNvPr id="25" name="TextBox 24"/>
-          <p:cNvSpPr txBox="1"/>
-          <p:nvPr/>
-        </p:nvSpPr>
-        <p:spPr>
-          <a:xfrm>
-            <a:off x="2011680" y="6473952"/>
-            <a:ext cx="7498079" cy="256032"/>
+              <a:rPr sz="1400" b="1" i="0">
+                <a:solidFill>
+                  <a:srgbClr val="3E4C63"/>
+                </a:solidFill>
+                <a:latin typeface="Calibri"/>
+              </a:rPr>
+              <a:t>FinSight AI  ·  Team 65  ·  Manipal University</a:t>
+            </a:r>
+          </a:p>
+        </p:txBody>
+      </p:sp>
+      <p:sp>
+        <p:nvSpPr>
+          <p:cNvPr id="26" name="TextBox 25"/>
+          <p:cNvSpPr txBox="1"/>
+          <p:nvPr/>
+        </p:nvSpPr>
+        <p:spPr>
+          <a:xfrm>
+            <a:off x="7406640" y="6446520"/>
+            <a:ext cx="3108960" cy="292608"/>
           </a:xfrm>
           <a:prstGeom prst="rect">
             <a:avLst/>
@@ -6821,37 +6265,38 @@
           </a:bodyPr>
           <a:lstStyle/>
           <a:p>
-            <a:r>
-              <a:rPr sz="1200" b="0" i="0" u="sng">
+            <a:pPr algn="r"/>
+            <a:r>
+              <a:rPr sz="1400" b="1" i="0" u="sng">
                 <a:solidFill>
                   <a:srgbClr val="0E7490"/>
                 </a:solidFill>
                 <a:latin typeface="Calibri"/>
-                <a:hlinkClick r:id="rId3"/>
-              </a:rPr>
-              <a:t>https://finsight-off.vercel.app</a:t>
-            </a:r>
-          </a:p>
-        </p:txBody>
-      </p:sp>
-      <p:sp>
-        <p:nvSpPr>
-          <p:cNvPr id="26" name="TextBox 25"/>
-          <p:cNvSpPr txBox="1"/>
-          <p:nvPr/>
-        </p:nvSpPr>
-        <p:spPr>
-          <a:xfrm>
-            <a:off x="10607040" y="6473952"/>
-            <a:ext cx="1097280" cy="256032"/>
-          </a:xfrm>
-          <a:prstGeom prst="rect">
-            <a:avLst/>
-          </a:prstGeom>
-          <a:noFill/>
-        </p:spPr>
-        <p:txBody>
-          <a:bodyPr wrap="square" lIns="0" rIns="0" tIns="0" bIns="0" anchor="t"/>
+                <a:hlinkClick r:id="rId2"/>
+              </a:rPr>
+              <a:t>finsight-off.vercel.app</a:t>
+            </a:r>
+          </a:p>
+        </p:txBody>
+      </p:sp>
+      <p:sp>
+        <p:nvSpPr>
+          <p:cNvPr id="27" name="TextBox 26"/>
+          <p:cNvSpPr txBox="1"/>
+          <p:nvPr/>
+        </p:nvSpPr>
+        <p:spPr>
+          <a:xfrm>
+            <a:off x="10698480" y="6446520"/>
+            <a:ext cx="1005840" cy="292608"/>
+          </a:xfrm>
+          <a:prstGeom prst="rect">
+            <a:avLst/>
+          </a:prstGeom>
+          <a:noFill/>
+        </p:spPr>
+        <p:txBody>
+          <a:bodyPr wrap="square" lIns="0" rIns="0" tIns="0" bIns="0"/>
           <a:lstStyle/>
           <a:p>
             <a:pPr algn="r">
@@ -6863,13 +6308,13 @@
               </a:spcAft>
             </a:pPr>
             <a:r>
-              <a:rPr sz="1200" b="1" i="0">
-                <a:solidFill>
-                  <a:srgbClr val="5B6B82"/>
-                </a:solidFill>
-                <a:latin typeface="Calibri"/>
-              </a:rPr>
-              <a:t>4  /  8</a:t>
+              <a:rPr sz="1400" b="1" i="0">
+                <a:solidFill>
+                  <a:srgbClr val="3E4C63"/>
+                </a:solidFill>
+                <a:latin typeface="Calibri"/>
+              </a:rPr>
+              <a:t>4  /  9</a:t>
             </a:r>
           </a:p>
         </p:txBody>
@@ -6907,7 +6352,7 @@
             <a:avLst/>
           </a:prstGeom>
           <a:solidFill>
-            <a:srgbClr val="F3F6FB"/>
+            <a:srgbClr val="F4F7FB"/>
           </a:solidFill>
           <a:ln>
             <a:noFill/>
@@ -6943,16 +6388,16 @@
         </p:nvSpPr>
         <p:spPr>
           <a:xfrm>
-            <a:off x="502920" y="347472"/>
-            <a:ext cx="7315200" cy="256032"/>
-          </a:xfrm>
-          <a:prstGeom prst="rect">
-            <a:avLst/>
-          </a:prstGeom>
-          <a:noFill/>
-        </p:spPr>
-        <p:txBody>
-          <a:bodyPr wrap="square" lIns="0" rIns="0" tIns="0" bIns="0" anchor="t"/>
+            <a:off x="502920" y="292608"/>
+            <a:ext cx="9144000" cy="292608"/>
+          </a:xfrm>
+          <a:prstGeom prst="rect">
+            <a:avLst/>
+          </a:prstGeom>
+          <a:noFill/>
+        </p:spPr>
+        <p:txBody>
+          <a:bodyPr wrap="square" lIns="0" rIns="0" tIns="0" bIns="0"/>
           <a:lstStyle/>
           <a:p>
             <a:pPr algn="l">
@@ -6964,13 +6409,13 @@
               </a:spcAft>
             </a:pPr>
             <a:r>
-              <a:rPr sz="1200" b="1" i="0">
-                <a:solidFill>
-                  <a:srgbClr val="0E7490"/>
-                </a:solidFill>
-                <a:latin typeface="Calibri"/>
-              </a:rPr>
-              <a:t>THE EXAMPLE</a:t>
+              <a:rPr sz="1400" b="1" i="0">
+                <a:solidFill>
+                  <a:srgbClr val="0F9F6E"/>
+                </a:solidFill>
+                <a:latin typeface="Calibri"/>
+              </a:rPr>
+              <a:t>HOW IT SOLVES THE PROBLEM</a:t>
             </a:r>
           </a:p>
         </p:txBody>
@@ -6984,15 +6429,15 @@
         <p:spPr>
           <a:xfrm>
             <a:off x="502920" y="640080"/>
-            <a:ext cx="8229600" cy="640080"/>
-          </a:xfrm>
-          <a:prstGeom prst="rect">
-            <a:avLst/>
-          </a:prstGeom>
-          <a:noFill/>
-        </p:spPr>
-        <p:txBody>
-          <a:bodyPr wrap="square" lIns="0" rIns="0" tIns="0" bIns="0" anchor="t"/>
+            <a:ext cx="10972800" cy="777240"/>
+          </a:xfrm>
+          <a:prstGeom prst="rect">
+            <a:avLst/>
+          </a:prstGeom>
+          <a:noFill/>
+        </p:spPr>
+        <p:txBody>
+          <a:bodyPr wrap="square" lIns="0" rIns="0" tIns="0" bIns="0"/>
           <a:lstStyle/>
           <a:p>
             <a:pPr algn="l">
@@ -7010,56 +6455,22 @@
                 </a:solidFill>
                 <a:latin typeface="Calibri"/>
               </a:rPr>
-              <a:t>Harbor &amp; Co. runs out on payday.</a:t>
-            </a:r>
-          </a:p>
-        </p:txBody>
-      </p:sp>
-      <p:sp>
-        <p:nvSpPr>
-          <p:cNvPr id="5" name="TextBox 4"/>
-          <p:cNvSpPr txBox="1"/>
-          <p:nvPr/>
-        </p:nvSpPr>
-        <p:spPr>
-          <a:xfrm>
-            <a:off x="502920" y="1371600"/>
-            <a:ext cx="9144000" cy="320040"/>
-          </a:xfrm>
-          <a:prstGeom prst="rect">
-            <a:avLst/>
-          </a:prstGeom>
-          <a:noFill/>
-        </p:spPr>
-        <p:txBody>
-          <a:bodyPr wrap="none">
-            <a:spAutoFit/>
-          </a:bodyPr>
-          <a:lstStyle/>
-          <a:p>
-            <a:r>
-              <a:rPr sz="1600" b="1" i="0" u="sng">
-                <a:solidFill>
-                  <a:srgbClr val="0E7490"/>
-                </a:solidFill>
-                <a:latin typeface="Calibri"/>
-                <a:hlinkClick r:id="rId2"/>
-              </a:rPr>
-              <a:t>https://finsight-off.vercel.app/demo</a:t>
-            </a:r>
-          </a:p>
-        </p:txBody>
-      </p:sp>
-      <p:sp>
-        <p:nvSpPr>
-          <p:cNvPr id="6" name="Rounded Rectangle 5"/>
+              <a:t>Put bills on the calendar.
+Do not just average last month.</a:t>
+            </a:r>
+          </a:p>
+        </p:txBody>
+      </p:sp>
+      <p:sp>
+        <p:nvSpPr>
+          <p:cNvPr id="5" name="Rounded Rectangle 4"/>
           <p:cNvSpPr/>
           <p:nvPr/>
         </p:nvSpPr>
         <p:spPr>
           <a:xfrm>
-            <a:off x="502920" y="1965960"/>
-            <a:ext cx="2743200" cy="1965960"/>
+            <a:off x="502920" y="2606040"/>
+            <a:ext cx="3611880" cy="3246120"/>
           </a:xfrm>
           <a:prstGeom prst="roundRect">
             <a:avLst>
@@ -7069,9 +6480,9 @@
           <a:solidFill>
             <a:srgbClr val="FFFFFF"/>
           </a:solidFill>
-          <a:ln w="12700">
+          <a:ln w="15875">
             <a:solidFill>
-              <a:srgbClr val="E2E8F0"/>
+              <a:srgbClr val="D5DEEA"/>
             </a:solidFill>
           </a:ln>
         </p:spPr>
@@ -7099,22 +6510,62 @@
       </p:sp>
       <p:sp>
         <p:nvSpPr>
+          <p:cNvPr id="6" name="TextBox 5"/>
+          <p:cNvSpPr txBox="1"/>
+          <p:nvPr/>
+        </p:nvSpPr>
+        <p:spPr>
+          <a:xfrm>
+            <a:off x="731520" y="2834640"/>
+            <a:ext cx="3154680" cy="822960"/>
+          </a:xfrm>
+          <a:prstGeom prst="rect">
+            <a:avLst/>
+          </a:prstGeom>
+          <a:noFill/>
+        </p:spPr>
+        <p:txBody>
+          <a:bodyPr wrap="square" lIns="0" rIns="0" tIns="0" bIns="0"/>
+          <a:lstStyle/>
+          <a:p>
+            <a:pPr algn="l">
+              <a:spcBef>
+                <a:spcPts val="0"/>
+              </a:spcBef>
+              <a:spcAft>
+                <a:spcPts val="0"/>
+              </a:spcAft>
+            </a:pPr>
+            <a:r>
+              <a:rPr sz="2200" b="1" i="0">
+                <a:solidFill>
+                  <a:srgbClr val="0F172A"/>
+                </a:solidFill>
+                <a:latin typeface="Calibri"/>
+              </a:rPr>
+              <a:t>Last month, repeated</a:t>
+            </a:r>
+          </a:p>
+        </p:txBody>
+      </p:sp>
+      <p:sp>
+        <p:nvSpPr>
           <p:cNvPr id="7" name="TextBox 6"/>
           <p:cNvSpPr txBox="1"/>
           <p:nvPr/>
         </p:nvSpPr>
         <p:spPr>
           <a:xfrm>
-            <a:off x="685800" y="2221992"/>
-            <a:ext cx="2377440" cy="777240"/>
-          </a:xfrm>
-          <a:prstGeom prst="rect">
-            <a:avLst/>
-          </a:prstGeom>
-          <a:noFill/>
-        </p:spPr>
-        <p:txBody>
-          <a:bodyPr wrap="square" lIns="0" rIns="0" tIns="0" bIns="0" anchor="t"/>
+            <a:off x="731520" y="3749039"/>
+            <a:ext cx="3154680" cy="1783080"/>
+          </a:xfrm>
+          <a:prstGeom prst="rect">
+            <a:avLst/>
+          </a:prstGeom>
+          <a:noFill/>
+        </p:spPr>
+        <p:txBody>
+          <a:bodyPr wrap="square" lIns="0" rIns="0" tIns="0" bIns="0"/>
           <a:lstStyle/>
           <a:p>
             <a:pPr algn="l">
@@ -7126,67 +6577,27 @@
               </a:spcAft>
             </a:pPr>
             <a:r>
-              <a:rPr sz="2600" b="1" i="0">
-                <a:solidFill>
-                  <a:srgbClr val="0F172A"/>
-                </a:solidFill>
-                <a:latin typeface="Calibri"/>
-              </a:rPr>
-              <a:t>$12,550</a:t>
-            </a:r>
-          </a:p>
-        </p:txBody>
-      </p:sp>
-      <p:sp>
-        <p:nvSpPr>
-          <p:cNvPr id="8" name="TextBox 7"/>
-          <p:cNvSpPr txBox="1"/>
-          <p:nvPr/>
-        </p:nvSpPr>
-        <p:spPr>
-          <a:xfrm>
-            <a:off x="685800" y="3108960"/>
-            <a:ext cx="2377440" cy="594360"/>
-          </a:xfrm>
-          <a:prstGeom prst="rect">
-            <a:avLst/>
-          </a:prstGeom>
-          <a:noFill/>
-        </p:spPr>
-        <p:txBody>
-          <a:bodyPr wrap="square" lIns="0" rIns="0" tIns="0" bIns="0" anchor="t"/>
-          <a:lstStyle/>
-          <a:p>
-            <a:pPr algn="l">
-              <a:spcBef>
-                <a:spcPts val="0"/>
-              </a:spcBef>
-              <a:spcAft>
-                <a:spcPts val="0"/>
-              </a:spcAft>
-            </a:pPr>
-            <a:r>
-              <a:rPr sz="1400" b="0" i="0">
-                <a:solidFill>
-                  <a:srgbClr val="5B6B82"/>
-                </a:solidFill>
-                <a:latin typeface="Calibri"/>
-              </a:rPr>
-              <a:t>Cash today</a:t>
-            </a:r>
-          </a:p>
-        </p:txBody>
-      </p:sp>
-      <p:sp>
-        <p:nvSpPr>
-          <p:cNvPr id="9" name="Rounded Rectangle 8"/>
+              <a:rPr sz="1600" b="0" i="0">
+                <a:solidFill>
+                  <a:srgbClr val="3E4C63"/>
+                </a:solidFill>
+                <a:latin typeface="Calibri"/>
+              </a:rPr>
+              <a:t>Extends the average daily net cash of the last 30 days. It does not place payroll, rent, the loan, or an open invoice on a date.</a:t>
+            </a:r>
+          </a:p>
+        </p:txBody>
+      </p:sp>
+      <p:sp>
+        <p:nvSpPr>
+          <p:cNvPr id="8" name="Rounded Rectangle 7"/>
           <p:cNvSpPr/>
           <p:nvPr/>
         </p:nvSpPr>
         <p:spPr>
           <a:xfrm>
-            <a:off x="3383280" y="1965960"/>
-            <a:ext cx="2743200" cy="1965960"/>
+            <a:off x="4297680" y="2606040"/>
+            <a:ext cx="3611880" cy="3246120"/>
           </a:xfrm>
           <a:prstGeom prst="roundRect">
             <a:avLst>
@@ -7196,9 +6607,9 @@
           <a:solidFill>
             <a:srgbClr val="FFFFFF"/>
           </a:solidFill>
-          <a:ln w="12700">
+          <a:ln w="15875">
             <a:solidFill>
-              <a:srgbClr val="E2E8F0"/>
+              <a:srgbClr val="D5DEEA"/>
             </a:solidFill>
           </a:ln>
         </p:spPr>
@@ -7226,22 +6637,62 @@
       </p:sp>
       <p:sp>
         <p:nvSpPr>
+          <p:cNvPr id="9" name="TextBox 8"/>
+          <p:cNvSpPr txBox="1"/>
+          <p:nvPr/>
+        </p:nvSpPr>
+        <p:spPr>
+          <a:xfrm>
+            <a:off x="4526280" y="2834640"/>
+            <a:ext cx="3154680" cy="822960"/>
+          </a:xfrm>
+          <a:prstGeom prst="rect">
+            <a:avLst/>
+          </a:prstGeom>
+          <a:noFill/>
+        </p:spPr>
+        <p:txBody>
+          <a:bodyPr wrap="square" lIns="0" rIns="0" tIns="0" bIns="0"/>
+          <a:lstStyle/>
+          <a:p>
+            <a:pPr algn="l">
+              <a:spcBef>
+                <a:spcPts val="0"/>
+              </a:spcBef>
+              <a:spcAft>
+                <a:spcPts val="0"/>
+              </a:spcAft>
+            </a:pPr>
+            <a:r>
+              <a:rPr sz="2200" b="1" i="0">
+                <a:solidFill>
+                  <a:srgbClr val="0F172A"/>
+                </a:solidFill>
+                <a:latin typeface="Calibri"/>
+              </a:rPr>
+              <a:t>FinSight</a:t>
+            </a:r>
+          </a:p>
+        </p:txBody>
+      </p:sp>
+      <p:sp>
+        <p:nvSpPr>
           <p:cNvPr id="10" name="TextBox 9"/>
           <p:cNvSpPr txBox="1"/>
           <p:nvPr/>
         </p:nvSpPr>
         <p:spPr>
           <a:xfrm>
-            <a:off x="3566160" y="2221992"/>
-            <a:ext cx="2377440" cy="777240"/>
-          </a:xfrm>
-          <a:prstGeom prst="rect">
-            <a:avLst/>
-          </a:prstGeom>
-          <a:noFill/>
-        </p:spPr>
-        <p:txBody>
-          <a:bodyPr wrap="square" lIns="0" rIns="0" tIns="0" bIns="0" anchor="t"/>
+            <a:off x="4526280" y="3749039"/>
+            <a:ext cx="3154680" cy="1783080"/>
+          </a:xfrm>
+          <a:prstGeom prst="rect">
+            <a:avLst/>
+          </a:prstGeom>
+          <a:noFill/>
+        </p:spPr>
+        <p:txBody>
+          <a:bodyPr wrap="square" lIns="0" rIns="0" tIns="0" bIns="0"/>
           <a:lstStyle/>
           <a:p>
             <a:pPr algn="l">
@@ -7253,67 +6704,27 @@
               </a:spcAft>
             </a:pPr>
             <a:r>
-              <a:rPr sz="2600" b="1" i="0">
-                <a:solidFill>
-                  <a:srgbClr val="0F172A"/>
-                </a:solidFill>
-                <a:latin typeface="Calibri"/>
-              </a:rPr>
-              <a:t>23 Mar 2026</a:t>
-            </a:r>
-          </a:p>
-        </p:txBody>
-      </p:sp>
-      <p:sp>
-        <p:nvSpPr>
-          <p:cNvPr id="11" name="TextBox 10"/>
-          <p:cNvSpPr txBox="1"/>
-          <p:nvPr/>
-        </p:nvSpPr>
-        <p:spPr>
-          <a:xfrm>
-            <a:off x="3566160" y="3108960"/>
-            <a:ext cx="2377440" cy="594360"/>
-          </a:xfrm>
-          <a:prstGeom prst="rect">
-            <a:avLst/>
-          </a:prstGeom>
-          <a:noFill/>
-        </p:spPr>
-        <p:txBody>
-          <a:bodyPr wrap="square" lIns="0" rIns="0" tIns="0" bIns="0" anchor="t"/>
-          <a:lstStyle/>
-          <a:p>
-            <a:pPr algn="l">
-              <a:spcBef>
-                <a:spcPts val="0"/>
-              </a:spcBef>
-              <a:spcAft>
-                <a:spcPts val="0"/>
-              </a:spcAft>
-            </a:pPr>
-            <a:r>
-              <a:rPr sz="1400" b="0" i="0">
-                <a:solidFill>
-                  <a:srgbClr val="5B6B82"/>
-                </a:solidFill>
-                <a:latin typeface="Calibri"/>
-              </a:rPr>
-              <a:t>Cash runs out</a:t>
-            </a:r>
-          </a:p>
-        </p:txBody>
-      </p:sp>
-      <p:sp>
-        <p:nvSpPr>
-          <p:cNvPr id="12" name="Rounded Rectangle 11"/>
+              <a:rPr sz="1600" b="0" i="0">
+                <a:solidFill>
+                  <a:srgbClr val="3E4C63"/>
+                </a:solidFill>
+                <a:latin typeface="Calibri"/>
+              </a:rPr>
+              <a:t>Starts from cash today. Rent, payroll, loan, and marketing stay on their usual days. Each open invoice is collected when that customer usually pays.</a:t>
+            </a:r>
+          </a:p>
+        </p:txBody>
+      </p:sp>
+      <p:sp>
+        <p:nvSpPr>
+          <p:cNvPr id="11" name="Rounded Rectangle 10"/>
           <p:cNvSpPr/>
           <p:nvPr/>
         </p:nvSpPr>
         <p:spPr>
           <a:xfrm>
-            <a:off x="6263640" y="1965960"/>
-            <a:ext cx="2743200" cy="1965960"/>
+            <a:off x="8092440" y="2606040"/>
+            <a:ext cx="3611880" cy="3246120"/>
           </a:xfrm>
           <a:prstGeom prst="roundRect">
             <a:avLst>
@@ -7323,9 +6734,9 @@
           <a:solidFill>
             <a:srgbClr val="FFFFFF"/>
           </a:solidFill>
-          <a:ln w="12700">
+          <a:ln w="15875">
             <a:solidFill>
-              <a:srgbClr val="E2E8F0"/>
+              <a:srgbClr val="D5DEEA"/>
             </a:solidFill>
           </a:ln>
         </p:spPr>
@@ -7353,22 +6764,62 @@
       </p:sp>
       <p:sp>
         <p:nvSpPr>
+          <p:cNvPr id="12" name="TextBox 11"/>
+          <p:cNvSpPr txBox="1"/>
+          <p:nvPr/>
+        </p:nvSpPr>
+        <p:spPr>
+          <a:xfrm>
+            <a:off x="8321040" y="2834640"/>
+            <a:ext cx="3154680" cy="822960"/>
+          </a:xfrm>
+          <a:prstGeom prst="rect">
+            <a:avLst/>
+          </a:prstGeom>
+          <a:noFill/>
+        </p:spPr>
+        <p:txBody>
+          <a:bodyPr wrap="square" lIns="0" rIns="0" tIns="0" bIns="0"/>
+          <a:lstStyle/>
+          <a:p>
+            <a:pPr algn="l">
+              <a:spcBef>
+                <a:spcPts val="0"/>
+              </a:spcBef>
+              <a:spcAft>
+                <a:spcPts val="0"/>
+              </a:spcAft>
+            </a:pPr>
+            <a:r>
+              <a:rPr sz="2200" b="1" i="0">
+                <a:solidFill>
+                  <a:srgbClr val="0F172A"/>
+                </a:solidFill>
+                <a:latin typeface="Calibri"/>
+              </a:rPr>
+              <a:t>One engine</a:t>
+            </a:r>
+          </a:p>
+        </p:txBody>
+      </p:sp>
+      <p:sp>
+        <p:nvSpPr>
           <p:cNvPr id="13" name="TextBox 12"/>
           <p:cNvSpPr txBox="1"/>
           <p:nvPr/>
         </p:nvSpPr>
         <p:spPr>
           <a:xfrm>
-            <a:off x="6446520" y="2221992"/>
-            <a:ext cx="2377440" cy="777240"/>
-          </a:xfrm>
-          <a:prstGeom prst="rect">
-            <a:avLst/>
-          </a:prstGeom>
-          <a:noFill/>
-        </p:spPr>
-        <p:txBody>
-          <a:bodyPr wrap="square" lIns="0" rIns="0" tIns="0" bIns="0" anchor="t"/>
+            <a:off x="8321040" y="3749039"/>
+            <a:ext cx="3154680" cy="1783080"/>
+          </a:xfrm>
+          <a:prstGeom prst="rect">
+            <a:avLst/>
+          </a:prstGeom>
+          <a:noFill/>
+        </p:spPr>
+        <p:txBody>
+          <a:bodyPr wrap="square" lIns="0" rIns="0" tIns="0" bIns="0"/>
           <a:lstStyle/>
           <a:p>
             <a:pPr algn="l">
@@ -7380,13 +6831,13 @@
               </a:spcAft>
             </a:pPr>
             <a:r>
-              <a:rPr sz="2600" b="1" i="0">
-                <a:solidFill>
-                  <a:srgbClr val="0F172A"/>
-                </a:solidFill>
-                <a:latin typeface="Calibri"/>
-              </a:rPr>
-              <a:t>$20,000</a:t>
+              <a:rPr sz="1600" b="0" i="0">
+                <a:solidFill>
+                  <a:srgbClr val="3E4C63"/>
+                </a:solidFill>
+                <a:latin typeface="Calibri"/>
+              </a:rPr>
+              <a:t>The chart, the what-if, and the past check all call the same forecast. A scenario is not a second model.</a:t>
             </a:r>
           </a:p>
         </p:txBody>
@@ -7399,16 +6850,16 @@
         </p:nvSpPr>
         <p:spPr>
           <a:xfrm>
-            <a:off x="6446520" y="3108960"/>
-            <a:ext cx="2377440" cy="594360"/>
-          </a:xfrm>
-          <a:prstGeom prst="rect">
-            <a:avLst/>
-          </a:prstGeom>
-          <a:noFill/>
-        </p:spPr>
-        <p:txBody>
-          <a:bodyPr wrap="square" lIns="0" rIns="0" tIns="0" bIns="0" anchor="t"/>
+            <a:off x="502920" y="6446520"/>
+            <a:ext cx="6858000" cy="292608"/>
+          </a:xfrm>
+          <a:prstGeom prst="rect">
+            <a:avLst/>
+          </a:prstGeom>
+          <a:noFill/>
+        </p:spPr>
+        <p:txBody>
+          <a:bodyPr wrap="square" lIns="0" rIns="0" tIns="0" bIns="0"/>
           <a:lstStyle/>
           <a:p>
             <a:pPr algn="l">
@@ -7420,342 +6871,27 @@
               </a:spcAft>
             </a:pPr>
             <a:r>
-              <a:rPr sz="1400" b="0" i="0">
-                <a:solidFill>
-                  <a:srgbClr val="5B6B82"/>
-                </a:solidFill>
-                <a:latin typeface="Calibri"/>
-              </a:rPr>
-              <a:t>Still unpaid</a:t>
-            </a:r>
-          </a:p>
-        </p:txBody>
-      </p:sp>
-      <p:sp>
-        <p:nvSpPr>
-          <p:cNvPr id="15" name="Rounded Rectangle 14"/>
-          <p:cNvSpPr/>
-          <p:nvPr/>
-        </p:nvSpPr>
-        <p:spPr>
-          <a:xfrm>
-            <a:off x="9144000" y="1965960"/>
-            <a:ext cx="2743200" cy="1965960"/>
-          </a:xfrm>
-          <a:prstGeom prst="roundRect">
-            <a:avLst>
-              <a:gd name="adj" fmla="val 8000"/>
-            </a:avLst>
-          </a:prstGeom>
-          <a:solidFill>
-            <a:srgbClr val="FFFFFF"/>
-          </a:solidFill>
-          <a:ln w="12700">
-            <a:solidFill>
-              <a:srgbClr val="E2E8F0"/>
-            </a:solidFill>
-          </a:ln>
-        </p:spPr>
-        <p:style>
-          <a:lnRef idx="1">
-            <a:schemeClr val="accent1"/>
-          </a:lnRef>
-          <a:fillRef idx="3">
-            <a:schemeClr val="accent1"/>
-          </a:fillRef>
-          <a:effectRef idx="2">
-            <a:schemeClr val="accent1"/>
-          </a:effectRef>
-          <a:fontRef idx="minor">
-            <a:schemeClr val="lt1"/>
-          </a:fontRef>
-        </p:style>
-        <p:txBody>
-          <a:bodyPr rtlCol="0" anchor="ctr"/>
-          <a:lstStyle/>
-          <a:p>
-            <a:pPr algn="ctr"/>
-          </a:p>
-        </p:txBody>
-      </p:sp>
-      <p:sp>
-        <p:nvSpPr>
-          <p:cNvPr id="16" name="TextBox 15"/>
-          <p:cNvSpPr txBox="1"/>
-          <p:nvPr/>
-        </p:nvSpPr>
-        <p:spPr>
-          <a:xfrm>
-            <a:off x="9326880" y="2221992"/>
-            <a:ext cx="2377440" cy="777240"/>
-          </a:xfrm>
-          <a:prstGeom prst="rect">
-            <a:avLst/>
-          </a:prstGeom>
-          <a:noFill/>
-        </p:spPr>
-        <p:txBody>
-          <a:bodyPr wrap="square" lIns="0" rIns="0" tIns="0" bIns="0" anchor="t"/>
-          <a:lstStyle/>
-          <a:p>
-            <a:pPr algn="l">
-              <a:spcBef>
-                <a:spcPts val="0"/>
-              </a:spcBef>
-              <a:spcAft>
-                <a:spcPts val="0"/>
-              </a:spcAft>
-            </a:pPr>
-            <a:r>
-              <a:rPr sz="2600" b="1" i="0">
-                <a:solidFill>
-                  <a:srgbClr val="0F172A"/>
-                </a:solidFill>
-                <a:latin typeface="Calibri"/>
-              </a:rPr>
-              <a:t>100%</a:t>
-            </a:r>
-          </a:p>
-        </p:txBody>
-      </p:sp>
-      <p:sp>
-        <p:nvSpPr>
-          <p:cNvPr id="17" name="TextBox 16"/>
-          <p:cNvSpPr txBox="1"/>
-          <p:nvPr/>
-        </p:nvSpPr>
-        <p:spPr>
-          <a:xfrm>
-            <a:off x="9326880" y="3108960"/>
-            <a:ext cx="2377440" cy="594360"/>
-          </a:xfrm>
-          <a:prstGeom prst="rect">
-            <a:avLst/>
-          </a:prstGeom>
-          <a:noFill/>
-        </p:spPr>
-        <p:txBody>
-          <a:bodyPr wrap="square" lIns="0" rIns="0" tIns="0" bIns="0" anchor="t"/>
-          <a:lstStyle/>
-          <a:p>
-            <a:pPr algn="l">
-              <a:spcBef>
-                <a:spcPts val="0"/>
-              </a:spcBef>
-              <a:spcAft>
-                <a:spcPts val="0"/>
-              </a:spcAft>
-            </a:pPr>
-            <a:r>
-              <a:rPr sz="1400" b="0" i="0">
-                <a:solidFill>
-                  <a:srgbClr val="5B6B82"/>
-                </a:solidFill>
-                <a:latin typeface="Calibri"/>
-              </a:rPr>
-              <a:t>Chance of running out in 30 days</a:t>
-            </a:r>
-          </a:p>
-        </p:txBody>
-      </p:sp>
-      <p:sp>
-        <p:nvSpPr>
-          <p:cNvPr id="18" name="Rounded Rectangle 17"/>
-          <p:cNvSpPr/>
-          <p:nvPr/>
-        </p:nvSpPr>
-        <p:spPr>
-          <a:xfrm>
-            <a:off x="502920" y="4160520"/>
-            <a:ext cx="11155680" cy="2011680"/>
-          </a:xfrm>
-          <a:prstGeom prst="roundRect">
-            <a:avLst>
-              <a:gd name="adj" fmla="val 8000"/>
-            </a:avLst>
-          </a:prstGeom>
-          <a:solidFill>
-            <a:srgbClr val="FFFFFF"/>
-          </a:solidFill>
-          <a:ln w="12700">
-            <a:solidFill>
-              <a:srgbClr val="E2E8F0"/>
-            </a:solidFill>
-          </a:ln>
-        </p:spPr>
-        <p:style>
-          <a:lnRef idx="1">
-            <a:schemeClr val="accent1"/>
-          </a:lnRef>
-          <a:fillRef idx="3">
-            <a:schemeClr val="accent1"/>
-          </a:fillRef>
-          <a:effectRef idx="2">
-            <a:schemeClr val="accent1"/>
-          </a:effectRef>
-          <a:fontRef idx="minor">
-            <a:schemeClr val="lt1"/>
-          </a:fontRef>
-        </p:style>
-        <p:txBody>
-          <a:bodyPr rtlCol="0" anchor="ctr"/>
-          <a:lstStyle/>
-          <a:p>
-            <a:pPr algn="ctr"/>
-          </a:p>
-        </p:txBody>
-      </p:sp>
-      <p:sp>
-        <p:nvSpPr>
-          <p:cNvPr id="19" name="TextBox 18"/>
-          <p:cNvSpPr txBox="1"/>
-          <p:nvPr/>
-        </p:nvSpPr>
-        <p:spPr>
-          <a:xfrm>
-            <a:off x="777240" y="4370832"/>
-            <a:ext cx="10607040" cy="365760"/>
-          </a:xfrm>
-          <a:prstGeom prst="rect">
-            <a:avLst/>
-          </a:prstGeom>
-          <a:noFill/>
-        </p:spPr>
-        <p:txBody>
-          <a:bodyPr wrap="square" lIns="0" rIns="0" tIns="0" bIns="0" anchor="t"/>
-          <a:lstStyle/>
-          <a:p>
-            <a:pPr algn="l">
-              <a:spcBef>
-                <a:spcPts val="0"/>
-              </a:spcBef>
-              <a:spcAft>
-                <a:spcPts val="0"/>
-              </a:spcAft>
-            </a:pPr>
-            <a:r>
-              <a:rPr sz="1800" b="1" i="0">
-                <a:solidFill>
-                  <a:srgbClr val="0F172A"/>
-                </a:solidFill>
-                <a:latin typeface="Calibri"/>
-              </a:rPr>
-              <a:t>How to read the chart</a:t>
-            </a:r>
-          </a:p>
-        </p:txBody>
-      </p:sp>
-      <p:sp>
-        <p:nvSpPr>
-          <p:cNvPr id="20" name="TextBox 19"/>
-          <p:cNvSpPr txBox="1"/>
-          <p:nvPr/>
-        </p:nvSpPr>
-        <p:spPr>
-          <a:xfrm>
-            <a:off x="777240" y="4800600"/>
-            <a:ext cx="10607040" cy="1188720"/>
-          </a:xfrm>
-          <a:prstGeom prst="rect">
-            <a:avLst/>
-          </a:prstGeom>
-          <a:noFill/>
-        </p:spPr>
-        <p:txBody>
-          <a:bodyPr wrap="square" lIns="0" rIns="0" tIns="0" bIns="0">
-            <a:spAutoFit/>
-          </a:bodyPr>
-          <a:lstStyle/>
-          <a:p>
-            <a:pPr algn="l">
-              <a:spcBef>
-                <a:spcPts val="0"/>
-              </a:spcBef>
-              <a:spcAft>
-                <a:spcPts val="0"/>
-              </a:spcAft>
-            </a:pPr>
-            <a:r>
-              <a:rPr sz="1600" b="0" i="0">
-                <a:solidFill>
-                  <a:srgbClr val="5B6B82"/>
-                </a:solidFill>
-                <a:latin typeface="Calibri"/>
-              </a:rPr>
-              <a:t>Blue is the forecast that knows payday. Gold only repeats last month.</a:t>
-            </a:r>
-          </a:p>
-          <a:p>
-            <a:pPr algn="l">
-              <a:spcBef>
-                <a:spcPts val="600"/>
-              </a:spcBef>
-              <a:spcAft>
-                <a:spcPts val="0"/>
-              </a:spcAft>
-            </a:pPr>
-            <a:r>
-              <a:rPr sz="1600" b="0" i="0">
-                <a:solidFill>
-                  <a:srgbClr val="5B6B82"/>
-                </a:solidFill>
-                <a:latin typeface="Calibri"/>
-              </a:rPr>
-              <a:t>Brightline invoice BR-109 is the open $20,000 bill. The shade is the likely range.</a:t>
-            </a:r>
-          </a:p>
-        </p:txBody>
-      </p:sp>
-      <p:sp>
-        <p:nvSpPr>
-          <p:cNvPr id="21" name="TextBox 20"/>
-          <p:cNvSpPr txBox="1"/>
-          <p:nvPr/>
-        </p:nvSpPr>
-        <p:spPr>
-          <a:xfrm>
-            <a:off x="502920" y="6473952"/>
-            <a:ext cx="7315200" cy="256032"/>
-          </a:xfrm>
-          <a:prstGeom prst="rect">
-            <a:avLst/>
-          </a:prstGeom>
-          <a:noFill/>
-        </p:spPr>
-        <p:txBody>
-          <a:bodyPr wrap="square" lIns="0" rIns="0" tIns="0" bIns="0" anchor="t"/>
-          <a:lstStyle/>
-          <a:p>
-            <a:pPr algn="l">
-              <a:spcBef>
-                <a:spcPts val="0"/>
-              </a:spcBef>
-              <a:spcAft>
-                <a:spcPts val="0"/>
-              </a:spcAft>
-            </a:pPr>
-            <a:r>
-              <a:rPr sz="1200" b="1" i="0">
-                <a:solidFill>
-                  <a:srgbClr val="5B6B82"/>
-                </a:solidFill>
-                <a:latin typeface="Calibri"/>
-              </a:rPr>
-              <a:t>FinSight</a:t>
-            </a:r>
-          </a:p>
-        </p:txBody>
-      </p:sp>
-      <p:sp>
-        <p:nvSpPr>
-          <p:cNvPr id="22" name="TextBox 21"/>
-          <p:cNvSpPr txBox="1"/>
-          <p:nvPr/>
-        </p:nvSpPr>
-        <p:spPr>
-          <a:xfrm>
-            <a:off x="2011680" y="6473952"/>
-            <a:ext cx="7498079" cy="256032"/>
+              <a:rPr sz="1400" b="1" i="0">
+                <a:solidFill>
+                  <a:srgbClr val="3E4C63"/>
+                </a:solidFill>
+                <a:latin typeface="Calibri"/>
+              </a:rPr>
+              <a:t>FinSight AI  ·  Team 65  ·  Manipal University</a:t>
+            </a:r>
+          </a:p>
+        </p:txBody>
+      </p:sp>
+      <p:sp>
+        <p:nvSpPr>
+          <p:cNvPr id="15" name="TextBox 14"/>
+          <p:cNvSpPr txBox="1"/>
+          <p:nvPr/>
+        </p:nvSpPr>
+        <p:spPr>
+          <a:xfrm>
+            <a:off x="7406640" y="6446520"/>
+            <a:ext cx="3108960" cy="292608"/>
           </a:xfrm>
           <a:prstGeom prst="rect">
             <a:avLst/>
@@ -7768,37 +6904,38 @@
           </a:bodyPr>
           <a:lstStyle/>
           <a:p>
-            <a:r>
-              <a:rPr sz="1200" b="0" i="0" u="sng">
+            <a:pPr algn="r"/>
+            <a:r>
+              <a:rPr sz="1400" b="1" i="0" u="sng">
                 <a:solidFill>
                   <a:srgbClr val="0E7490"/>
                 </a:solidFill>
                 <a:latin typeface="Calibri"/>
-                <a:hlinkClick r:id="rId3"/>
-              </a:rPr>
-              <a:t>https://finsight-off.vercel.app</a:t>
-            </a:r>
-          </a:p>
-        </p:txBody>
-      </p:sp>
-      <p:sp>
-        <p:nvSpPr>
-          <p:cNvPr id="23" name="TextBox 22"/>
-          <p:cNvSpPr txBox="1"/>
-          <p:nvPr/>
-        </p:nvSpPr>
-        <p:spPr>
-          <a:xfrm>
-            <a:off x="10607040" y="6473952"/>
-            <a:ext cx="1097280" cy="256032"/>
-          </a:xfrm>
-          <a:prstGeom prst="rect">
-            <a:avLst/>
-          </a:prstGeom>
-          <a:noFill/>
-        </p:spPr>
-        <p:txBody>
-          <a:bodyPr wrap="square" lIns="0" rIns="0" tIns="0" bIns="0" anchor="t"/>
+                <a:hlinkClick r:id="rId2"/>
+              </a:rPr>
+              <a:t>finsight-off.vercel.app</a:t>
+            </a:r>
+          </a:p>
+        </p:txBody>
+      </p:sp>
+      <p:sp>
+        <p:nvSpPr>
+          <p:cNvPr id="16" name="TextBox 15"/>
+          <p:cNvSpPr txBox="1"/>
+          <p:nvPr/>
+        </p:nvSpPr>
+        <p:spPr>
+          <a:xfrm>
+            <a:off x="10698480" y="6446520"/>
+            <a:ext cx="1005840" cy="292608"/>
+          </a:xfrm>
+          <a:prstGeom prst="rect">
+            <a:avLst/>
+          </a:prstGeom>
+          <a:noFill/>
+        </p:spPr>
+        <p:txBody>
+          <a:bodyPr wrap="square" lIns="0" rIns="0" tIns="0" bIns="0"/>
           <a:lstStyle/>
           <a:p>
             <a:pPr algn="r">
@@ -7810,13 +6947,13 @@
               </a:spcAft>
             </a:pPr>
             <a:r>
-              <a:rPr sz="1200" b="1" i="0">
-                <a:solidFill>
-                  <a:srgbClr val="5B6B82"/>
-                </a:solidFill>
-                <a:latin typeface="Calibri"/>
-              </a:rPr>
-              <a:t>5  /  8</a:t>
+              <a:rPr sz="1400" b="1" i="0">
+                <a:solidFill>
+                  <a:srgbClr val="3E4C63"/>
+                </a:solidFill>
+                <a:latin typeface="Calibri"/>
+              </a:rPr>
+              <a:t>5  /  9</a:t>
             </a:r>
           </a:p>
         </p:txBody>
@@ -7854,7 +6991,7 @@
             <a:avLst/>
           </a:prstGeom>
           <a:solidFill>
-            <a:srgbClr val="F3F6FB"/>
+            <a:srgbClr val="F4F7FB"/>
           </a:solidFill>
           <a:ln>
             <a:noFill/>
@@ -7890,16 +7027,16 @@
         </p:nvSpPr>
         <p:spPr>
           <a:xfrm>
-            <a:off x="502920" y="347472"/>
-            <a:ext cx="7315200" cy="256032"/>
-          </a:xfrm>
-          <a:prstGeom prst="rect">
-            <a:avLst/>
-          </a:prstGeom>
-          <a:noFill/>
-        </p:spPr>
-        <p:txBody>
-          <a:bodyPr wrap="square" lIns="0" rIns="0" tIns="0" bIns="0" anchor="t"/>
+            <a:off x="502920" y="292608"/>
+            <a:ext cx="9144000" cy="292608"/>
+          </a:xfrm>
+          <a:prstGeom prst="rect">
+            <a:avLst/>
+          </a:prstGeom>
+          <a:noFill/>
+        </p:spPr>
+        <p:txBody>
+          <a:bodyPr wrap="square" lIns="0" rIns="0" tIns="0" bIns="0"/>
           <a:lstStyle/>
           <a:p>
             <a:pPr algn="l">
@@ -7911,13 +7048,13 @@
               </a:spcAft>
             </a:pPr>
             <a:r>
-              <a:rPr sz="1200" b="1" i="0">
-                <a:solidFill>
-                  <a:srgbClr val="0E7490"/>
-                </a:solidFill>
-                <a:latin typeface="Calibri"/>
-              </a:rPr>
-              <a:t>SEE THE DATA</a:t>
+              <a:rPr sz="1400" b="1" i="0">
+                <a:solidFill>
+                  <a:srgbClr val="0F9F6E"/>
+                </a:solidFill>
+                <a:latin typeface="Calibri"/>
+              </a:rPr>
+              <a:t>FROM THE REPORT</a:t>
             </a:r>
           </a:p>
         </p:txBody>
@@ -7931,15 +7068,15 @@
         <p:spPr>
           <a:xfrm>
             <a:off x="502920" y="640080"/>
-            <a:ext cx="10972800" cy="822960"/>
-          </a:xfrm>
-          <a:prstGeom prst="rect">
-            <a:avLst/>
-          </a:prstGeom>
-          <a:noFill/>
-        </p:spPr>
-        <p:txBody>
-          <a:bodyPr wrap="square" lIns="0" rIns="0" tIns="0" bIns="0" anchor="t"/>
+            <a:ext cx="10972800" cy="640080"/>
+          </a:xfrm>
+          <a:prstGeom prst="rect">
+            <a:avLst/>
+          </a:prstGeom>
+          <a:noFill/>
+        </p:spPr>
+        <p:txBody>
+          <a:bodyPr wrap="square" lIns="0" rIns="0" tIns="0" bIns="0"/>
           <a:lstStyle/>
           <a:p>
             <a:pPr algn="l">
@@ -7951,67 +7088,27 @@
               </a:spcAft>
             </a:pPr>
             <a:r>
-              <a:rPr sz="3200" b="1" i="0">
+              <a:rPr sz="3400" b="1" i="0">
                 <a:solidFill>
                   <a:srgbClr val="0F172A"/>
                 </a:solidFill>
                 <a:latin typeface="Calibri"/>
               </a:rPr>
-              <a:t>The rows behind the chart, on the same page.</a:t>
-            </a:r>
-          </a:p>
-        </p:txBody>
-      </p:sp>
-      <p:sp>
-        <p:nvSpPr>
-          <p:cNvPr id="5" name="TextBox 4"/>
-          <p:cNvSpPr txBox="1"/>
+              <a:t>On these books, the calendar wins.</a:t>
+            </a:r>
+          </a:p>
+        </p:txBody>
+      </p:sp>
+      <p:sp>
+        <p:nvSpPr>
+          <p:cNvPr id="5" name="Rounded Rectangle 4"/>
+          <p:cNvSpPr/>
           <p:nvPr/>
         </p:nvSpPr>
         <p:spPr>
           <a:xfrm>
             <a:off x="502920" y="1554480"/>
-            <a:ext cx="10972800" cy="640080"/>
-          </a:xfrm>
-          <a:prstGeom prst="rect">
-            <a:avLst/>
-          </a:prstGeom>
-          <a:noFill/>
-        </p:spPr>
-        <p:txBody>
-          <a:bodyPr wrap="square" lIns="0" rIns="0" tIns="0" bIns="0" anchor="t"/>
-          <a:lstStyle/>
-          <a:p>
-            <a:pPr algn="l">
-              <a:spcBef>
-                <a:spcPts val="0"/>
-              </a:spcBef>
-              <a:spcAft>
-                <a:spcPts val="0"/>
-              </a:spcAft>
-            </a:pPr>
-            <a:r>
-              <a:rPr sz="1600" b="0" i="0">
-                <a:solidFill>
-                  <a:srgbClr val="5B6B82"/>
-                </a:solidFill>
-                <a:latin typeface="Calibri"/>
-              </a:rPr>
-              <a:t>On the example, and after you add your own files, one button opens the source. The forecast stays one click away.</a:t>
-            </a:r>
-          </a:p>
-        </p:txBody>
-      </p:sp>
-      <p:sp>
-        <p:nvSpPr>
-          <p:cNvPr id="6" name="Rounded Rectangle 5"/>
-          <p:cNvSpPr/>
-          <p:nvPr/>
-        </p:nvSpPr>
-        <p:spPr>
-          <a:xfrm>
-            <a:off x="502920" y="2423160"/>
-            <a:ext cx="5577840" cy="3611880"/>
+            <a:ext cx="11155680" cy="3246120"/>
           </a:xfrm>
           <a:prstGeom prst="roundRect">
             <a:avLst>
@@ -8021,9 +7118,9 @@
           <a:solidFill>
             <a:srgbClr val="FFFFFF"/>
           </a:solidFill>
-          <a:ln w="12700">
+          <a:ln w="15875">
             <a:solidFill>
-              <a:srgbClr val="E2E8F0"/>
+              <a:srgbClr val="D5DEEA"/>
             </a:solidFill>
           </a:ln>
         </p:spPr>
@@ -8051,44 +7148,81 @@
       </p:sp>
       <p:sp>
         <p:nvSpPr>
-          <p:cNvPr id="7" name="Rectangle 6"/>
-          <p:cNvSpPr/>
-          <p:nvPr/>
-        </p:nvSpPr>
-        <p:spPr>
-          <a:xfrm>
-            <a:off x="502920" y="2423160"/>
-            <a:ext cx="5577840" cy="109728"/>
-          </a:xfrm>
-          <a:prstGeom prst="rect">
-            <a:avLst/>
-          </a:prstGeom>
-          <a:solidFill>
-            <a:srgbClr val="0F9F6E"/>
-          </a:solidFill>
-          <a:ln>
-            <a:noFill/>
-          </a:ln>
-        </p:spPr>
-        <p:style>
-          <a:lnRef idx="1">
-            <a:schemeClr val="accent1"/>
-          </a:lnRef>
-          <a:fillRef idx="3">
-            <a:schemeClr val="accent1"/>
-          </a:fillRef>
-          <a:effectRef idx="2">
-            <a:schemeClr val="accent1"/>
-          </a:effectRef>
-          <a:fontRef idx="minor">
-            <a:schemeClr val="lt1"/>
-          </a:fontRef>
-        </p:style>
-        <p:txBody>
-          <a:bodyPr rtlCol="0" anchor="ctr"/>
-          <a:lstStyle/>
-          <a:p>
-            <a:pPr algn="ctr"/>
+          <p:cNvPr id="6" name="TextBox 5"/>
+          <p:cNvSpPr txBox="1"/>
+          <p:nvPr/>
+        </p:nvSpPr>
+        <p:spPr>
+          <a:xfrm>
+            <a:off x="777240" y="1737360"/>
+            <a:ext cx="3200400" cy="411480"/>
+          </a:xfrm>
+          <a:prstGeom prst="rect">
+            <a:avLst/>
+          </a:prstGeom>
+          <a:noFill/>
+        </p:spPr>
+        <p:txBody>
+          <a:bodyPr wrap="square" lIns="0" rIns="0" tIns="0" bIns="0"/>
+          <a:lstStyle/>
+          <a:p>
+            <a:pPr algn="l">
+              <a:spcBef>
+                <a:spcPts val="0"/>
+              </a:spcBef>
+              <a:spcAft>
+                <a:spcPts val="0"/>
+              </a:spcAft>
+            </a:pPr>
+            <a:r>
+              <a:rPr sz="1600" b="1" i="0">
+                <a:solidFill>
+                  <a:srgbClr val="0F9F6E"/>
+                </a:solidFill>
+                <a:latin typeface="Calibri"/>
+              </a:rPr>
+              <a:t/>
+            </a:r>
+          </a:p>
+        </p:txBody>
+      </p:sp>
+      <p:sp>
+        <p:nvSpPr>
+          <p:cNvPr id="7" name="TextBox 6"/>
+          <p:cNvSpPr txBox="1"/>
+          <p:nvPr/>
+        </p:nvSpPr>
+        <p:spPr>
+          <a:xfrm>
+            <a:off x="4206240" y="1737360"/>
+            <a:ext cx="3200400" cy="411480"/>
+          </a:xfrm>
+          <a:prstGeom prst="rect">
+            <a:avLst/>
+          </a:prstGeom>
+          <a:noFill/>
+        </p:spPr>
+        <p:txBody>
+          <a:bodyPr wrap="square" lIns="0" rIns="0" tIns="0" bIns="0"/>
+          <a:lstStyle/>
+          <a:p>
+            <a:pPr algn="l">
+              <a:spcBef>
+                <a:spcPts val="0"/>
+              </a:spcBef>
+              <a:spcAft>
+                <a:spcPts val="0"/>
+              </a:spcAft>
+            </a:pPr>
+            <a:r>
+              <a:rPr sz="1600" b="1" i="0">
+                <a:solidFill>
+                  <a:srgbClr val="0F9F6E"/>
+                </a:solidFill>
+                <a:latin typeface="Calibri"/>
+              </a:rPr>
+              <a:t>FinSight</a:t>
+            </a:r>
           </a:p>
         </p:txBody>
       </p:sp>
@@ -8100,16 +7234,16 @@
         </p:nvSpPr>
         <p:spPr>
           <a:xfrm>
-            <a:off x="822960" y="2743200"/>
-            <a:ext cx="4937760" cy="640080"/>
-          </a:xfrm>
-          <a:prstGeom prst="rect">
-            <a:avLst/>
-          </a:prstGeom>
-          <a:noFill/>
-        </p:spPr>
-        <p:txBody>
-          <a:bodyPr wrap="square" lIns="0" rIns="0" tIns="0" bIns="0" anchor="t"/>
+            <a:off x="7589520" y="1737360"/>
+            <a:ext cx="3200400" cy="411480"/>
+          </a:xfrm>
+          <a:prstGeom prst="rect">
+            <a:avLst/>
+          </a:prstGeom>
+          <a:noFill/>
+        </p:spPr>
+        <p:txBody>
+          <a:bodyPr wrap="square" lIns="0" rIns="0" tIns="0" bIns="0"/>
           <a:lstStyle/>
           <a:p>
             <a:pPr algn="l">
@@ -8121,35 +7255,75 @@
               </a:spcAft>
             </a:pPr>
             <a:r>
-              <a:rPr sz="2600" b="1" i="0">
+              <a:rPr sz="1600" b="1" i="0">
+                <a:solidFill>
+                  <a:srgbClr val="0F9F6E"/>
+                </a:solidFill>
+                <a:latin typeface="Calibri"/>
+              </a:rPr>
+              <a:t>Last month, repeated</a:t>
+            </a:r>
+          </a:p>
+        </p:txBody>
+      </p:sp>
+      <p:sp>
+        <p:nvSpPr>
+          <p:cNvPr id="9" name="TextBox 8"/>
+          <p:cNvSpPr txBox="1"/>
+          <p:nvPr/>
+        </p:nvSpPr>
+        <p:spPr>
+          <a:xfrm>
+            <a:off x="777240" y="2286000"/>
+            <a:ext cx="3291840" cy="457200"/>
+          </a:xfrm>
+          <a:prstGeom prst="rect">
+            <a:avLst/>
+          </a:prstGeom>
+          <a:noFill/>
+        </p:spPr>
+        <p:txBody>
+          <a:bodyPr wrap="square" lIns="0" rIns="0" tIns="0" bIns="0"/>
+          <a:lstStyle/>
+          <a:p>
+            <a:pPr algn="l">
+              <a:spcBef>
+                <a:spcPts val="0"/>
+              </a:spcBef>
+              <a:spcAft>
+                <a:spcPts val="0"/>
+              </a:spcAft>
+            </a:pPr>
+            <a:r>
+              <a:rPr sz="2000" b="1" i="0">
                 <a:solidFill>
                   <a:srgbClr val="0F172A"/>
                 </a:solidFill>
                 <a:latin typeface="Calibri"/>
               </a:rPr>
-              <a:t>Bank statement</a:t>
-            </a:r>
-          </a:p>
-        </p:txBody>
-      </p:sp>
-      <p:sp>
-        <p:nvSpPr>
-          <p:cNvPr id="9" name="TextBox 8"/>
-          <p:cNvSpPr txBox="1"/>
-          <p:nvPr/>
-        </p:nvSpPr>
-        <p:spPr>
-          <a:xfrm>
-            <a:off x="822960" y="3429000"/>
-            <a:ext cx="4937760" cy="1005840"/>
-          </a:xfrm>
-          <a:prstGeom prst="rect">
-            <a:avLst/>
-          </a:prstGeom>
-          <a:noFill/>
-        </p:spPr>
-        <p:txBody>
-          <a:bodyPr wrap="square" lIns="0" rIns="0" tIns="0" bIns="0" anchor="t"/>
+              <a:t>Error on past days</a:t>
+            </a:r>
+          </a:p>
+        </p:txBody>
+      </p:sp>
+      <p:sp>
+        <p:nvSpPr>
+          <p:cNvPr id="10" name="TextBox 9"/>
+          <p:cNvSpPr txBox="1"/>
+          <p:nvPr/>
+        </p:nvSpPr>
+        <p:spPr>
+          <a:xfrm>
+            <a:off x="4206240" y="2286000"/>
+            <a:ext cx="3291840" cy="457200"/>
+          </a:xfrm>
+          <a:prstGeom prst="rect">
+            <a:avLst/>
+          </a:prstGeom>
+          <a:noFill/>
+        </p:spPr>
+        <p:txBody>
+          <a:bodyPr wrap="square" lIns="0" rIns="0" tIns="0" bIns="0"/>
           <a:lstStyle/>
           <a:p>
             <a:pPr algn="l">
@@ -8161,35 +7335,35 @@
               </a:spcAft>
             </a:pPr>
             <a:r>
-              <a:rPr sz="1600" b="0" i="0">
-                <a:solidFill>
-                  <a:srgbClr val="5B6B82"/>
-                </a:solidFill>
-                <a:latin typeface="Calibri"/>
-              </a:rPr>
-              <a:t>Every line. Money out, money in, and the balance left after each one.</a:t>
-            </a:r>
-          </a:p>
-        </p:txBody>
-      </p:sp>
-      <p:sp>
-        <p:nvSpPr>
-          <p:cNvPr id="10" name="TextBox 9"/>
-          <p:cNvSpPr txBox="1"/>
-          <p:nvPr/>
-        </p:nvSpPr>
-        <p:spPr>
-          <a:xfrm>
-            <a:off x="822960" y="4617720"/>
-            <a:ext cx="4937760" cy="365760"/>
-          </a:xfrm>
-          <a:prstGeom prst="rect">
-            <a:avLst/>
-          </a:prstGeom>
-          <a:noFill/>
-        </p:spPr>
-        <p:txBody>
-          <a:bodyPr wrap="square" lIns="0" rIns="0" tIns="0" bIns="0" anchor="t"/>
+              <a:rPr sz="2000" b="0" i="0">
+                <a:solidFill>
+                  <a:srgbClr val="0F172A"/>
+                </a:solidFill>
+                <a:latin typeface="Calibri"/>
+              </a:rPr>
+              <a:t>USD 2,819</a:t>
+            </a:r>
+          </a:p>
+        </p:txBody>
+      </p:sp>
+      <p:sp>
+        <p:nvSpPr>
+          <p:cNvPr id="11" name="TextBox 10"/>
+          <p:cNvSpPr txBox="1"/>
+          <p:nvPr/>
+        </p:nvSpPr>
+        <p:spPr>
+          <a:xfrm>
+            <a:off x="7589520" y="2286000"/>
+            <a:ext cx="3291840" cy="457200"/>
+          </a:xfrm>
+          <a:prstGeom prst="rect">
+            <a:avLst/>
+          </a:prstGeom>
+          <a:noFill/>
+        </p:spPr>
+        <p:txBody>
+          <a:bodyPr wrap="square" lIns="0" rIns="0" tIns="0" bIns="0"/>
           <a:lstStyle/>
           <a:p>
             <a:pPr algn="l">
@@ -8201,35 +7375,35 @@
               </a:spcAft>
             </a:pPr>
             <a:r>
-              <a:rPr sz="1800" b="1" i="0">
-                <a:solidFill>
-                  <a:srgbClr val="0F9F6E"/>
-                </a:solidFill>
-                <a:latin typeface="Calibri"/>
-              </a:rPr>
-              <a:t>44 lines</a:t>
-            </a:r>
-          </a:p>
-        </p:txBody>
-      </p:sp>
-      <p:sp>
-        <p:nvSpPr>
-          <p:cNvPr id="11" name="TextBox 10"/>
-          <p:cNvSpPr txBox="1"/>
-          <p:nvPr/>
-        </p:nvSpPr>
-        <p:spPr>
-          <a:xfrm>
-            <a:off x="822960" y="5029200"/>
-            <a:ext cx="4937760" cy="640080"/>
-          </a:xfrm>
-          <a:prstGeom prst="rect">
-            <a:avLst/>
-          </a:prstGeom>
-          <a:noFill/>
-        </p:spPr>
-        <p:txBody>
-          <a:bodyPr wrap="square" lIns="0" rIns="0" tIns="0" bIns="0" anchor="t"/>
+              <a:rPr sz="2000" b="0" i="0">
+                <a:solidFill>
+                  <a:srgbClr val="0F172A"/>
+                </a:solidFill>
+                <a:latin typeface="Calibri"/>
+              </a:rPr>
+              <a:t>USD 17,847</a:t>
+            </a:r>
+          </a:p>
+        </p:txBody>
+      </p:sp>
+      <p:sp>
+        <p:nvSpPr>
+          <p:cNvPr id="12" name="TextBox 11"/>
+          <p:cNvSpPr txBox="1"/>
+          <p:nvPr/>
+        </p:nvSpPr>
+        <p:spPr>
+          <a:xfrm>
+            <a:off x="777240" y="2852928"/>
+            <a:ext cx="3291840" cy="457200"/>
+          </a:xfrm>
+          <a:prstGeom prst="rect">
+            <a:avLst/>
+          </a:prstGeom>
+          <a:noFill/>
+        </p:spPr>
+        <p:txBody>
+          <a:bodyPr wrap="square" lIns="0" rIns="0" tIns="0" bIns="0"/>
           <a:lstStyle/>
           <a:p>
             <a:pPr algn="l">
@@ -8241,104 +7415,54 @@
               </a:spcAft>
             </a:pPr>
             <a:r>
-              <a:rPr sz="1500" b="0" i="0">
-                <a:solidFill>
-                  <a:srgbClr val="5B6B82"/>
-                </a:solidFill>
-                <a:latin typeface="Calibri"/>
-              </a:rPr>
-              <a:t>In the Harbor &amp; Co. example, from October 2025 through 2 March 2026.</a:t>
-            </a:r>
-          </a:p>
-        </p:txBody>
-      </p:sp>
-      <p:sp>
-        <p:nvSpPr>
-          <p:cNvPr id="12" name="Rounded Rectangle 11"/>
-          <p:cNvSpPr/>
-          <p:nvPr/>
-        </p:nvSpPr>
-        <p:spPr>
-          <a:xfrm>
-            <a:off x="6309359" y="2423160"/>
-            <a:ext cx="5577840" cy="3611880"/>
-          </a:xfrm>
-          <a:prstGeom prst="roundRect">
-            <a:avLst>
-              <a:gd name="adj" fmla="val 8000"/>
-            </a:avLst>
-          </a:prstGeom>
-          <a:solidFill>
-            <a:srgbClr val="FFFFFF"/>
-          </a:solidFill>
-          <a:ln w="12700">
-            <a:solidFill>
-              <a:srgbClr val="E2E8F0"/>
-            </a:solidFill>
-          </a:ln>
-        </p:spPr>
-        <p:style>
-          <a:lnRef idx="1">
-            <a:schemeClr val="accent1"/>
-          </a:lnRef>
-          <a:fillRef idx="3">
-            <a:schemeClr val="accent1"/>
-          </a:fillRef>
-          <a:effectRef idx="2">
-            <a:schemeClr val="accent1"/>
-          </a:effectRef>
-          <a:fontRef idx="minor">
-            <a:schemeClr val="lt1"/>
-          </a:fontRef>
-        </p:style>
-        <p:txBody>
-          <a:bodyPr rtlCol="0" anchor="ctr"/>
-          <a:lstStyle/>
-          <a:p>
-            <a:pPr algn="ctr"/>
-          </a:p>
-        </p:txBody>
-      </p:sp>
-      <p:sp>
-        <p:nvSpPr>
-          <p:cNvPr id="13" name="Rectangle 12"/>
-          <p:cNvSpPr/>
-          <p:nvPr/>
-        </p:nvSpPr>
-        <p:spPr>
-          <a:xfrm>
-            <a:off x="6309359" y="2423160"/>
-            <a:ext cx="5577840" cy="109728"/>
-          </a:xfrm>
-          <a:prstGeom prst="rect">
-            <a:avLst/>
-          </a:prstGeom>
-          <a:solidFill>
-            <a:srgbClr val="0E7490"/>
-          </a:solidFill>
-          <a:ln>
-            <a:noFill/>
-          </a:ln>
-        </p:spPr>
-        <p:style>
-          <a:lnRef idx="1">
-            <a:schemeClr val="accent1"/>
-          </a:lnRef>
-          <a:fillRef idx="3">
-            <a:schemeClr val="accent1"/>
-          </a:fillRef>
-          <a:effectRef idx="2">
-            <a:schemeClr val="accent1"/>
-          </a:effectRef>
-          <a:fontRef idx="minor">
-            <a:schemeClr val="lt1"/>
-          </a:fontRef>
-        </p:style>
-        <p:txBody>
-          <a:bodyPr rtlCol="0" anchor="ctr"/>
-          <a:lstStyle/>
-          <a:p>
-            <a:pPr algn="ctr"/>
+              <a:rPr sz="2000" b="1" i="0">
+                <a:solidFill>
+                  <a:srgbClr val="0F172A"/>
+                </a:solidFill>
+                <a:latin typeface="Calibri"/>
+              </a:rPr>
+              <a:t>Holdout shortfall</a:t>
+            </a:r>
+          </a:p>
+        </p:txBody>
+      </p:sp>
+      <p:sp>
+        <p:nvSpPr>
+          <p:cNvPr id="13" name="TextBox 12"/>
+          <p:cNvSpPr txBox="1"/>
+          <p:nvPr/>
+        </p:nvSpPr>
+        <p:spPr>
+          <a:xfrm>
+            <a:off x="4206240" y="2852928"/>
+            <a:ext cx="3291840" cy="457200"/>
+          </a:xfrm>
+          <a:prstGeom prst="rect">
+            <a:avLst/>
+          </a:prstGeom>
+          <a:noFill/>
+        </p:spPr>
+        <p:txBody>
+          <a:bodyPr wrap="square" lIns="0" rIns="0" tIns="0" bIns="0"/>
+          <a:lstStyle/>
+          <a:p>
+            <a:pPr algn="l">
+              <a:spcBef>
+                <a:spcPts val="0"/>
+              </a:spcBef>
+              <a:spcAft>
+                <a:spcPts val="0"/>
+              </a:spcAft>
+            </a:pPr>
+            <a:r>
+              <a:rPr sz="2000" b="0" i="0">
+                <a:solidFill>
+                  <a:srgbClr val="0F172A"/>
+                </a:solidFill>
+                <a:latin typeface="Calibri"/>
+              </a:rPr>
+              <a:t>23 January 2026</a:t>
+            </a:r>
           </a:p>
         </p:txBody>
       </p:sp>
@@ -8350,16 +7474,16 @@
         </p:nvSpPr>
         <p:spPr>
           <a:xfrm>
-            <a:off x="6629399" y="2743200"/>
-            <a:ext cx="4937760" cy="640080"/>
-          </a:xfrm>
-          <a:prstGeom prst="rect">
-            <a:avLst/>
-          </a:prstGeom>
-          <a:noFill/>
-        </p:spPr>
-        <p:txBody>
-          <a:bodyPr wrap="square" lIns="0" rIns="0" tIns="0" bIns="0" anchor="t"/>
+            <a:off x="7589520" y="2852928"/>
+            <a:ext cx="3291840" cy="457200"/>
+          </a:xfrm>
+          <a:prstGeom prst="rect">
+            <a:avLst/>
+          </a:prstGeom>
+          <a:noFill/>
+        </p:spPr>
+        <p:txBody>
+          <a:bodyPr wrap="square" lIns="0" rIns="0" tIns="0" bIns="0"/>
           <a:lstStyle/>
           <a:p>
             <a:pPr algn="l">
@@ -8371,13 +7495,13 @@
               </a:spcAft>
             </a:pPr>
             <a:r>
-              <a:rPr sz="2600" b="1" i="0">
+              <a:rPr sz="2000" b="0" i="0">
                 <a:solidFill>
                   <a:srgbClr val="0F172A"/>
                 </a:solidFill>
                 <a:latin typeface="Calibri"/>
               </a:rPr>
-              <a:t>Invoices</a:t>
+              <a:t>23 January 2026</a:t>
             </a:r>
           </a:p>
         </p:txBody>
@@ -8390,16 +7514,16 @@
         </p:nvSpPr>
         <p:spPr>
           <a:xfrm>
-            <a:off x="6629399" y="3429000"/>
-            <a:ext cx="4937760" cy="1005840"/>
-          </a:xfrm>
-          <a:prstGeom prst="rect">
-            <a:avLst/>
-          </a:prstGeom>
-          <a:noFill/>
-        </p:spPr>
-        <p:txBody>
-          <a:bodyPr wrap="square" lIns="0" rIns="0" tIns="0" bIns="0" anchor="t"/>
+            <a:off x="777240" y="3419856"/>
+            <a:ext cx="3291840" cy="457200"/>
+          </a:xfrm>
+          <a:prstGeom prst="rect">
+            <a:avLst/>
+          </a:prstGeom>
+          <a:noFill/>
+        </p:spPr>
+        <p:txBody>
+          <a:bodyPr wrap="square" lIns="0" rIns="0" tIns="0" bIns="0"/>
           <a:lstStyle/>
           <a:p>
             <a:pPr algn="l">
@@ -8411,13 +7535,13 @@
               </a:spcAft>
             </a:pPr>
             <a:r>
-              <a:rPr sz="1600" b="0" i="0">
-                <a:solidFill>
-                  <a:srgbClr val="5B6B82"/>
-                </a:solidFill>
-                <a:latin typeface="Calibri"/>
-              </a:rPr>
-              <a:t>Who was billed, when it was due, and whether it was paid.</a:t>
+              <a:rPr sz="2000" b="1" i="0">
+                <a:solidFill>
+                  <a:srgbClr val="0F172A"/>
+                </a:solidFill>
+                <a:latin typeface="Calibri"/>
+              </a:rPr>
+              <a:t>Early warning</a:t>
             </a:r>
           </a:p>
         </p:txBody>
@@ -8430,16 +7554,16 @@
         </p:nvSpPr>
         <p:spPr>
           <a:xfrm>
-            <a:off x="6629399" y="4617720"/>
-            <a:ext cx="4937760" cy="365760"/>
-          </a:xfrm>
-          <a:prstGeom prst="rect">
-            <a:avLst/>
-          </a:prstGeom>
-          <a:noFill/>
-        </p:spPr>
-        <p:txBody>
-          <a:bodyPr wrap="square" lIns="0" rIns="0" tIns="0" bIns="0" anchor="t"/>
+            <a:off x="4206240" y="3419856"/>
+            <a:ext cx="3291840" cy="457200"/>
+          </a:xfrm>
+          <a:prstGeom prst="rect">
+            <a:avLst/>
+          </a:prstGeom>
+          <a:noFill/>
+        </p:spPr>
+        <p:txBody>
+          <a:bodyPr wrap="square" lIns="0" rIns="0" tIns="0" bIns="0"/>
           <a:lstStyle/>
           <a:p>
             <a:pPr algn="l">
@@ -8451,13 +7575,13 @@
               </a:spcAft>
             </a:pPr>
             <a:r>
-              <a:rPr sz="1800" b="1" i="0">
-                <a:solidFill>
-                  <a:srgbClr val="0F9F6E"/>
-                </a:solidFill>
-                <a:latin typeface="Calibri"/>
-              </a:rPr>
-              <a:t>1 still unpaid</a:t>
+              <a:rPr sz="2000" b="0" i="0">
+                <a:solidFill>
+                  <a:srgbClr val="0F172A"/>
+                </a:solidFill>
+                <a:latin typeface="Calibri"/>
+              </a:rPr>
+              <a:t>15 days</a:t>
             </a:r>
           </a:p>
         </p:txBody>
@@ -8470,16 +7594,16 @@
         </p:nvSpPr>
         <p:spPr>
           <a:xfrm>
-            <a:off x="6629399" y="5029200"/>
-            <a:ext cx="4937760" cy="640080"/>
-          </a:xfrm>
-          <a:prstGeom prst="rect">
-            <a:avLst/>
-          </a:prstGeom>
-          <a:noFill/>
-        </p:spPr>
-        <p:txBody>
-          <a:bodyPr wrap="square" lIns="0" rIns="0" tIns="0" bIns="0" anchor="t"/>
+            <a:off x="7589520" y="3419856"/>
+            <a:ext cx="3291840" cy="457200"/>
+          </a:xfrm>
+          <a:prstGeom prst="rect">
+            <a:avLst/>
+          </a:prstGeom>
+          <a:noFill/>
+        </p:spPr>
+        <p:txBody>
+          <a:bodyPr wrap="square" lIns="0" rIns="0" tIns="0" bIns="0"/>
           <a:lstStyle/>
           <a:p>
             <a:pPr algn="l">
@@ -8491,13 +7615,13 @@
               </a:spcAft>
             </a:pPr>
             <a:r>
-              <a:rPr sz="1500" b="0" i="0">
-                <a:solidFill>
-                  <a:srgbClr val="5B6B82"/>
-                </a:solidFill>
-                <a:latin typeface="Calibri"/>
-              </a:rPr>
-              <a:t>BR-109, Brightline Studio, $20,000, due 10 March 2026.</a:t>
+              <a:rPr sz="2000" b="0" i="0">
+                <a:solidFill>
+                  <a:srgbClr val="0F172A"/>
+                </a:solidFill>
+                <a:latin typeface="Calibri"/>
+              </a:rPr>
+              <a:t>Not flagged</a:t>
             </a:r>
           </a:p>
         </p:txBody>
@@ -8510,16 +7634,16 @@
         </p:nvSpPr>
         <p:spPr>
           <a:xfrm>
-            <a:off x="502920" y="6473952"/>
-            <a:ext cx="7315200" cy="256032"/>
-          </a:xfrm>
-          <a:prstGeom prst="rect">
-            <a:avLst/>
-          </a:prstGeom>
-          <a:noFill/>
-        </p:spPr>
-        <p:txBody>
-          <a:bodyPr wrap="square" lIns="0" rIns="0" tIns="0" bIns="0" anchor="t"/>
+            <a:off x="777240" y="3986783"/>
+            <a:ext cx="3291840" cy="457200"/>
+          </a:xfrm>
+          <a:prstGeom prst="rect">
+            <a:avLst/>
+          </a:prstGeom>
+          <a:noFill/>
+        </p:spPr>
+        <p:txBody>
+          <a:bodyPr wrap="square" lIns="0" rIns="0" tIns="0" bIns="0"/>
           <a:lstStyle/>
           <a:p>
             <a:pPr algn="l">
@@ -8531,13 +7655,13 @@
               </a:spcAft>
             </a:pPr>
             <a:r>
-              <a:rPr sz="1200" b="1" i="0">
-                <a:solidFill>
-                  <a:srgbClr val="5B6B82"/>
-                </a:solidFill>
-                <a:latin typeface="Calibri"/>
-              </a:rPr>
-              <a:t>FinSight</a:t>
+              <a:rPr sz="2000" b="1" i="0">
+                <a:solidFill>
+                  <a:srgbClr val="0F172A"/>
+                </a:solidFill>
+                <a:latin typeface="Calibri"/>
+              </a:rPr>
+              <a:t>Test</a:t>
             </a:r>
           </a:p>
         </p:txBody>
@@ -8550,8 +7674,168 @@
         </p:nvSpPr>
         <p:spPr>
           <a:xfrm>
-            <a:off x="2011680" y="6473952"/>
-            <a:ext cx="7498079" cy="256032"/>
+            <a:off x="4206240" y="3986783"/>
+            <a:ext cx="3291840" cy="457200"/>
+          </a:xfrm>
+          <a:prstGeom prst="rect">
+            <a:avLst/>
+          </a:prstGeom>
+          <a:noFill/>
+        </p:spPr>
+        <p:txBody>
+          <a:bodyPr wrap="square" lIns="0" rIns="0" tIns="0" bIns="0"/>
+          <a:lstStyle/>
+          <a:p>
+            <a:pPr algn="l">
+              <a:spcBef>
+                <a:spcPts val="0"/>
+              </a:spcBef>
+              <a:spcAft>
+                <a:spcPts val="0"/>
+              </a:spcAft>
+            </a:pPr>
+            <a:r>
+              <a:rPr sz="2000" b="0" i="0">
+                <a:solidFill>
+                  <a:srgbClr val="0F172A"/>
+                </a:solidFill>
+                <a:latin typeface="Calibri"/>
+              </a:rPr>
+              <a:t>6 weekly origins, 21 days</a:t>
+            </a:r>
+          </a:p>
+        </p:txBody>
+      </p:sp>
+      <p:sp>
+        <p:nvSpPr>
+          <p:cNvPr id="20" name="TextBox 19"/>
+          <p:cNvSpPr txBox="1"/>
+          <p:nvPr/>
+        </p:nvSpPr>
+        <p:spPr>
+          <a:xfrm>
+            <a:off x="7589520" y="3986783"/>
+            <a:ext cx="3291840" cy="457200"/>
+          </a:xfrm>
+          <a:prstGeom prst="rect">
+            <a:avLst/>
+          </a:prstGeom>
+          <a:noFill/>
+        </p:spPr>
+        <p:txBody>
+          <a:bodyPr wrap="square" lIns="0" rIns="0" tIns="0" bIns="0"/>
+          <a:lstStyle/>
+          <a:p>
+            <a:pPr algn="l">
+              <a:spcBef>
+                <a:spcPts val="0"/>
+              </a:spcBef>
+              <a:spcAft>
+                <a:spcPts val="0"/>
+              </a:spcAft>
+            </a:pPr>
+            <a:r>
+              <a:rPr sz="2000" b="0" i="0">
+                <a:solidFill>
+                  <a:srgbClr val="0F172A"/>
+                </a:solidFill>
+                <a:latin typeface="Calibri"/>
+              </a:rPr>
+              <a:t>Same origins</a:t>
+            </a:r>
+          </a:p>
+        </p:txBody>
+      </p:sp>
+      <p:sp>
+        <p:nvSpPr>
+          <p:cNvPr id="21" name="TextBox 20"/>
+          <p:cNvSpPr txBox="1"/>
+          <p:nvPr/>
+        </p:nvSpPr>
+        <p:spPr>
+          <a:xfrm>
+            <a:off x="502920" y="5029200"/>
+            <a:ext cx="11155680" cy="1097280"/>
+          </a:xfrm>
+          <a:prstGeom prst="rect">
+            <a:avLst/>
+          </a:prstGeom>
+          <a:noFill/>
+        </p:spPr>
+        <p:txBody>
+          <a:bodyPr wrap="square" lIns="0" rIns="0" tIns="0" bIns="0"/>
+          <a:lstStyle/>
+          <a:p>
+            <a:pPr algn="l">
+              <a:spcBef>
+                <a:spcPts val="0"/>
+              </a:spcBef>
+              <a:spcAft>
+                <a:spcPts val="0"/>
+              </a:spcAft>
+            </a:pPr>
+            <a:r>
+              <a:rPr sz="1800" b="0" i="0">
+                <a:solidFill>
+                  <a:srgbClr val="3E4C63"/>
+                </a:solidFill>
+                <a:latin typeface="Calibri"/>
+              </a:rPr>
+              <a:t>Payroll of USD 22,000 on 23 March 2026 is the item that takes cash through zero, to about USD −12,469. These numbers apply only to this synthetic protocol.</a:t>
+            </a:r>
+          </a:p>
+        </p:txBody>
+      </p:sp>
+      <p:sp>
+        <p:nvSpPr>
+          <p:cNvPr id="22" name="TextBox 21"/>
+          <p:cNvSpPr txBox="1"/>
+          <p:nvPr/>
+        </p:nvSpPr>
+        <p:spPr>
+          <a:xfrm>
+            <a:off x="502920" y="6446520"/>
+            <a:ext cx="6858000" cy="292608"/>
+          </a:xfrm>
+          <a:prstGeom prst="rect">
+            <a:avLst/>
+          </a:prstGeom>
+          <a:noFill/>
+        </p:spPr>
+        <p:txBody>
+          <a:bodyPr wrap="square" lIns="0" rIns="0" tIns="0" bIns="0"/>
+          <a:lstStyle/>
+          <a:p>
+            <a:pPr algn="l">
+              <a:spcBef>
+                <a:spcPts val="0"/>
+              </a:spcBef>
+              <a:spcAft>
+                <a:spcPts val="0"/>
+              </a:spcAft>
+            </a:pPr>
+            <a:r>
+              <a:rPr sz="1400" b="1" i="0">
+                <a:solidFill>
+                  <a:srgbClr val="3E4C63"/>
+                </a:solidFill>
+                <a:latin typeface="Calibri"/>
+              </a:rPr>
+              <a:t>FinSight AI  ·  Team 65  ·  Manipal University</a:t>
+            </a:r>
+          </a:p>
+        </p:txBody>
+      </p:sp>
+      <p:sp>
+        <p:nvSpPr>
+          <p:cNvPr id="23" name="TextBox 22"/>
+          <p:cNvSpPr txBox="1"/>
+          <p:nvPr/>
+        </p:nvSpPr>
+        <p:spPr>
+          <a:xfrm>
+            <a:off x="7406640" y="6446520"/>
+            <a:ext cx="3108960" cy="292608"/>
           </a:xfrm>
           <a:prstGeom prst="rect">
             <a:avLst/>
@@ -8564,37 +7848,38 @@
           </a:bodyPr>
           <a:lstStyle/>
           <a:p>
-            <a:r>
-              <a:rPr sz="1200" b="0" i="0" u="sng">
+            <a:pPr algn="r"/>
+            <a:r>
+              <a:rPr sz="1400" b="1" i="0" u="sng">
                 <a:solidFill>
                   <a:srgbClr val="0E7490"/>
                 </a:solidFill>
                 <a:latin typeface="Calibri"/>
                 <a:hlinkClick r:id="rId2"/>
               </a:rPr>
-              <a:t>https://finsight-off.vercel.app</a:t>
-            </a:r>
-          </a:p>
-        </p:txBody>
-      </p:sp>
-      <p:sp>
-        <p:nvSpPr>
-          <p:cNvPr id="20" name="TextBox 19"/>
-          <p:cNvSpPr txBox="1"/>
-          <p:nvPr/>
-        </p:nvSpPr>
-        <p:spPr>
-          <a:xfrm>
-            <a:off x="10607040" y="6473952"/>
-            <a:ext cx="1097280" cy="256032"/>
-          </a:xfrm>
-          <a:prstGeom prst="rect">
-            <a:avLst/>
-          </a:prstGeom>
-          <a:noFill/>
-        </p:spPr>
-        <p:txBody>
-          <a:bodyPr wrap="square" lIns="0" rIns="0" tIns="0" bIns="0" anchor="t"/>
+              <a:t>finsight-off.vercel.app</a:t>
+            </a:r>
+          </a:p>
+        </p:txBody>
+      </p:sp>
+      <p:sp>
+        <p:nvSpPr>
+          <p:cNvPr id="24" name="TextBox 23"/>
+          <p:cNvSpPr txBox="1"/>
+          <p:nvPr/>
+        </p:nvSpPr>
+        <p:spPr>
+          <a:xfrm>
+            <a:off x="10698480" y="6446520"/>
+            <a:ext cx="1005840" cy="292608"/>
+          </a:xfrm>
+          <a:prstGeom prst="rect">
+            <a:avLst/>
+          </a:prstGeom>
+          <a:noFill/>
+        </p:spPr>
+        <p:txBody>
+          <a:bodyPr wrap="square" lIns="0" rIns="0" tIns="0" bIns="0"/>
           <a:lstStyle/>
           <a:p>
             <a:pPr algn="r">
@@ -8606,13 +7891,13 @@
               </a:spcAft>
             </a:pPr>
             <a:r>
-              <a:rPr sz="1200" b="1" i="0">
-                <a:solidFill>
-                  <a:srgbClr val="5B6B82"/>
-                </a:solidFill>
-                <a:latin typeface="Calibri"/>
-              </a:rPr>
-              <a:t>6  /  8</a:t>
+              <a:rPr sz="1400" b="1" i="0">
+                <a:solidFill>
+                  <a:srgbClr val="3E4C63"/>
+                </a:solidFill>
+                <a:latin typeface="Calibri"/>
+              </a:rPr>
+              <a:t>6  /  9</a:t>
             </a:r>
           </a:p>
         </p:txBody>
@@ -8650,7 +7935,7 @@
             <a:avLst/>
           </a:prstGeom>
           <a:solidFill>
-            <a:srgbClr val="F3F6FB"/>
+            <a:srgbClr val="F4F7FB"/>
           </a:solidFill>
           <a:ln>
             <a:noFill/>
@@ -8686,16 +7971,16 @@
         </p:nvSpPr>
         <p:spPr>
           <a:xfrm>
-            <a:off x="502920" y="347472"/>
-            <a:ext cx="7315200" cy="256032"/>
-          </a:xfrm>
-          <a:prstGeom prst="rect">
-            <a:avLst/>
-          </a:prstGeom>
-          <a:noFill/>
-        </p:spPr>
-        <p:txBody>
-          <a:bodyPr wrap="square" lIns="0" rIns="0" tIns="0" bIns="0" anchor="t"/>
+            <a:off x="502920" y="292608"/>
+            <a:ext cx="9144000" cy="292608"/>
+          </a:xfrm>
+          <a:prstGeom prst="rect">
+            <a:avLst/>
+          </a:prstGeom>
+          <a:noFill/>
+        </p:spPr>
+        <p:txBody>
+          <a:bodyPr wrap="square" lIns="0" rIns="0" tIns="0" bIns="0"/>
           <a:lstStyle/>
           <a:p>
             <a:pPr algn="l">
@@ -8707,13 +7992,13 @@
               </a:spcAft>
             </a:pPr>
             <a:r>
-              <a:rPr sz="1200" b="1" i="0">
-                <a:solidFill>
-                  <a:srgbClr val="0E7490"/>
-                </a:solidFill>
-                <a:latin typeface="Calibri"/>
-              </a:rPr>
-              <a:t>EASY TO SHOW A JUDGE</a:t>
+              <a:rPr sz="1400" b="1" i="0">
+                <a:solidFill>
+                  <a:srgbClr val="0F9F6E"/>
+                </a:solidFill>
+                <a:latin typeface="Calibri"/>
+              </a:rPr>
+              <a:t>A CHANGE YOU CAN TRY</a:t>
             </a:r>
           </a:p>
         </p:txBody>
@@ -8735,7 +8020,7 @@
           <a:noFill/>
         </p:spPr>
         <p:txBody>
-          <a:bodyPr wrap="square" lIns="0" rIns="0" tIns="0" bIns="0" anchor="t"/>
+          <a:bodyPr wrap="square" lIns="0" rIns="0" tIns="0" bIns="0"/>
           <a:lstStyle/>
           <a:p>
             <a:pPr algn="l">
@@ -8753,7 +8038,7 @@
                 </a:solidFill>
                 <a:latin typeface="Calibri"/>
               </a:rPr>
-              <a:t>The same story, in five languages.</a:t>
+              <a:t>Move one payment. Cut one bill.</a:t>
             </a:r>
           </a:p>
         </p:txBody>
@@ -8767,19 +8052,19 @@
         <p:spPr>
           <a:xfrm>
             <a:off x="502920" y="1691640"/>
-            <a:ext cx="2148840" cy="1417320"/>
+            <a:ext cx="11155680" cy="1280160"/>
           </a:xfrm>
           <a:prstGeom prst="roundRect">
             <a:avLst>
-              <a:gd name="adj" fmla="val 10000"/>
+              <a:gd name="adj" fmla="val 8000"/>
             </a:avLst>
           </a:prstGeom>
           <a:solidFill>
             <a:srgbClr val="FFFFFF"/>
           </a:solidFill>
-          <a:ln w="12700">
+          <a:ln w="15875">
             <a:solidFill>
-              <a:srgbClr val="E2E8F0"/>
+              <a:srgbClr val="D5DEEA"/>
             </a:solidFill>
           </a:ln>
         </p:spPr>
@@ -8813,34 +8098,34 @@
         </p:nvSpPr>
         <p:spPr>
           <a:xfrm>
-            <a:off x="502920" y="1874519"/>
-            <a:ext cx="2148840" cy="548640"/>
-          </a:xfrm>
-          <a:prstGeom prst="rect">
-            <a:avLst/>
-          </a:prstGeom>
-          <a:noFill/>
-        </p:spPr>
-        <p:txBody>
-          <a:bodyPr wrap="square" lIns="0" rIns="0" tIns="0" bIns="0" anchor="t"/>
-          <a:lstStyle/>
-          <a:p>
-            <a:pPr algn="ctr">
-              <a:spcBef>
-                <a:spcPts val="0"/>
-              </a:spcBef>
-              <a:spcAft>
-                <a:spcPts val="0"/>
-              </a:spcAft>
-            </a:pPr>
-            <a:r>
-              <a:rPr sz="2600" b="1" i="0">
+            <a:off x="777240" y="1856232"/>
+            <a:ext cx="10515600" cy="411480"/>
+          </a:xfrm>
+          <a:prstGeom prst="rect">
+            <a:avLst/>
+          </a:prstGeom>
+          <a:noFill/>
+        </p:spPr>
+        <p:txBody>
+          <a:bodyPr wrap="square" lIns="0" rIns="0" tIns="0" bIns="0"/>
+          <a:lstStyle/>
+          <a:p>
+            <a:pPr algn="l">
+              <a:spcBef>
+                <a:spcPts val="0"/>
+              </a:spcBef>
+              <a:spcAft>
+                <a:spcPts val="0"/>
+              </a:spcAft>
+            </a:pPr>
+            <a:r>
+              <a:rPr sz="2200" b="1" i="0">
                 <a:solidFill>
                   <a:srgbClr val="0F172A"/>
                 </a:solidFill>
                 <a:latin typeface="Calibri"/>
               </a:rPr>
-              <a:t>EN</a:t>
+              <a:t>Base path</a:t>
             </a:r>
           </a:p>
         </p:txBody>
@@ -8853,34 +8138,34 @@
         </p:nvSpPr>
         <p:spPr>
           <a:xfrm>
-            <a:off x="502920" y="2468880"/>
-            <a:ext cx="2148840" cy="365760"/>
-          </a:xfrm>
-          <a:prstGeom prst="rect">
-            <a:avLst/>
-          </a:prstGeom>
-          <a:noFill/>
-        </p:spPr>
-        <p:txBody>
-          <a:bodyPr wrap="square" lIns="0" rIns="0" tIns="0" bIns="0" anchor="t"/>
-          <a:lstStyle/>
-          <a:p>
-            <a:pPr algn="ctr">
-              <a:spcBef>
-                <a:spcPts val="0"/>
-              </a:spcBef>
-              <a:spcAft>
-                <a:spcPts val="0"/>
-              </a:spcAft>
-            </a:pPr>
-            <a:r>
-              <a:rPr sz="1400" b="0" i="0">
-                <a:solidFill>
-                  <a:srgbClr val="5B6B82"/>
-                </a:solidFill>
-                <a:latin typeface="Calibri"/>
-              </a:rPr>
-              <a:t>English</a:t>
+            <a:off x="777240" y="2331720"/>
+            <a:ext cx="10515600" cy="457200"/>
+          </a:xfrm>
+          <a:prstGeom prst="rect">
+            <a:avLst/>
+          </a:prstGeom>
+          <a:noFill/>
+        </p:spPr>
+        <p:txBody>
+          <a:bodyPr wrap="square" lIns="0" rIns="0" tIns="0" bIns="0"/>
+          <a:lstStyle/>
+          <a:p>
+            <a:pPr algn="l">
+              <a:spcBef>
+                <a:spcPts val="0"/>
+              </a:spcBef>
+              <a:spcAft>
+                <a:spcPts val="0"/>
+              </a:spcAft>
+            </a:pPr>
+            <a:r>
+              <a:rPr sz="1800" b="0" i="0">
+                <a:solidFill>
+                  <a:srgbClr val="3E4C63"/>
+                </a:solidFill>
+                <a:latin typeface="Calibri"/>
+              </a:rPr>
+              <a:t>Shortfall on 23 March 2026. Lowest cash in 30 days is about USD −15,771.</a:t>
             </a:r>
           </a:p>
         </p:txBody>
@@ -8893,20 +8178,20 @@
         </p:nvSpPr>
         <p:spPr>
           <a:xfrm>
-            <a:off x="2788920" y="1691640"/>
-            <a:ext cx="2148840" cy="1417320"/>
+            <a:off x="502920" y="3108960"/>
+            <a:ext cx="11155680" cy="1280160"/>
           </a:xfrm>
           <a:prstGeom prst="roundRect">
             <a:avLst>
-              <a:gd name="adj" fmla="val 10000"/>
+              <a:gd name="adj" fmla="val 8000"/>
             </a:avLst>
           </a:prstGeom>
           <a:solidFill>
             <a:srgbClr val="FFFFFF"/>
           </a:solidFill>
-          <a:ln w="12700">
+          <a:ln w="15875">
             <a:solidFill>
-              <a:srgbClr val="E2E8F0"/>
+              <a:srgbClr val="D5DEEA"/>
             </a:solidFill>
           </a:ln>
         </p:spPr>
@@ -8940,34 +8225,34 @@
         </p:nvSpPr>
         <p:spPr>
           <a:xfrm>
-            <a:off x="2788920" y="1874519"/>
-            <a:ext cx="2148840" cy="548640"/>
-          </a:xfrm>
-          <a:prstGeom prst="rect">
-            <a:avLst/>
-          </a:prstGeom>
-          <a:noFill/>
-        </p:spPr>
-        <p:txBody>
-          <a:bodyPr wrap="square" lIns="0" rIns="0" tIns="0" bIns="0" anchor="t"/>
-          <a:lstStyle/>
-          <a:p>
-            <a:pPr algn="ctr">
-              <a:spcBef>
-                <a:spcPts val="0"/>
-              </a:spcBef>
-              <a:spcAft>
-                <a:spcPts val="0"/>
-              </a:spcAft>
-            </a:pPr>
-            <a:r>
-              <a:rPr sz="2600" b="1" i="0">
+            <a:off x="777240" y="3273552"/>
+            <a:ext cx="10515600" cy="411480"/>
+          </a:xfrm>
+          <a:prstGeom prst="rect">
+            <a:avLst/>
+          </a:prstGeom>
+          <a:noFill/>
+        </p:spPr>
+        <p:txBody>
+          <a:bodyPr wrap="square" lIns="0" rIns="0" tIns="0" bIns="0"/>
+          <a:lstStyle/>
+          <a:p>
+            <a:pPr algn="l">
+              <a:spcBef>
+                <a:spcPts val="0"/>
+              </a:spcBef>
+              <a:spcAft>
+                <a:spcPts val="0"/>
+              </a:spcAft>
+            </a:pPr>
+            <a:r>
+              <a:rPr sz="2200" b="1" i="0">
                 <a:solidFill>
                   <a:srgbClr val="0F172A"/>
                 </a:solidFill>
                 <a:latin typeface="Calibri"/>
               </a:rPr>
-              <a:t>ES</a:t>
+              <a:t>Collect BR-109 on 12 March</a:t>
             </a:r>
           </a:p>
         </p:txBody>
@@ -8980,34 +8265,34 @@
         </p:nvSpPr>
         <p:spPr>
           <a:xfrm>
-            <a:off x="2788920" y="2468880"/>
-            <a:ext cx="2148840" cy="365760"/>
-          </a:xfrm>
-          <a:prstGeom prst="rect">
-            <a:avLst/>
-          </a:prstGeom>
-          <a:noFill/>
-        </p:spPr>
-        <p:txBody>
-          <a:bodyPr wrap="square" lIns="0" rIns="0" tIns="0" bIns="0" anchor="t"/>
-          <a:lstStyle/>
-          <a:p>
-            <a:pPr algn="ctr">
-              <a:spcBef>
-                <a:spcPts val="0"/>
-              </a:spcBef>
-              <a:spcAft>
-                <a:spcPts val="0"/>
-              </a:spcAft>
-            </a:pPr>
-            <a:r>
-              <a:rPr sz="1400" b="0" i="0">
-                <a:solidFill>
-                  <a:srgbClr val="5B6B82"/>
-                </a:solidFill>
-                <a:latin typeface="Calibri"/>
-              </a:rPr>
-              <a:t>Español</a:t>
+            <a:off x="777240" y="3749040"/>
+            <a:ext cx="10515600" cy="457200"/>
+          </a:xfrm>
+          <a:prstGeom prst="rect">
+            <a:avLst/>
+          </a:prstGeom>
+          <a:noFill/>
+        </p:spPr>
+        <p:txBody>
+          <a:bodyPr wrap="square" lIns="0" rIns="0" tIns="0" bIns="0"/>
+          <a:lstStyle/>
+          <a:p>
+            <a:pPr algn="l">
+              <a:spcBef>
+                <a:spcPts val="0"/>
+              </a:spcBef>
+              <a:spcAft>
+                <a:spcPts val="0"/>
+              </a:spcAft>
+            </a:pPr>
+            <a:r>
+              <a:rPr sz="1800" b="0" i="0">
+                <a:solidFill>
+                  <a:srgbClr val="3E4C63"/>
+                </a:solidFill>
+                <a:latin typeface="Calibri"/>
+              </a:rPr>
+              <a:t>Shortfall moves to 1 April 2026. The 30-day low rises by about USD 14,934 and is still slightly negative.</a:t>
             </a:r>
           </a:p>
         </p:txBody>
@@ -9020,20 +8305,20 @@
         </p:nvSpPr>
         <p:spPr>
           <a:xfrm>
-            <a:off x="5074920" y="1691640"/>
-            <a:ext cx="2148840" cy="1417320"/>
+            <a:off x="502920" y="4526280"/>
+            <a:ext cx="11155680" cy="1280160"/>
           </a:xfrm>
           <a:prstGeom prst="roundRect">
             <a:avLst>
-              <a:gd name="adj" fmla="val 10000"/>
+              <a:gd name="adj" fmla="val 8000"/>
             </a:avLst>
           </a:prstGeom>
           <a:solidFill>
             <a:srgbClr val="FFFFFF"/>
           </a:solidFill>
-          <a:ln w="12700">
+          <a:ln w="15875">
             <a:solidFill>
-              <a:srgbClr val="E2E8F0"/>
+              <a:srgbClr val="D5DEEA"/>
             </a:solidFill>
           </a:ln>
         </p:spPr>
@@ -9067,34 +8352,34 @@
         </p:nvSpPr>
         <p:spPr>
           <a:xfrm>
-            <a:off x="5074920" y="1874519"/>
-            <a:ext cx="2148840" cy="548640"/>
-          </a:xfrm>
-          <a:prstGeom prst="rect">
-            <a:avLst/>
-          </a:prstGeom>
-          <a:noFill/>
-        </p:spPr>
-        <p:txBody>
-          <a:bodyPr wrap="square" lIns="0" rIns="0" tIns="0" bIns="0" anchor="t"/>
-          <a:lstStyle/>
-          <a:p>
-            <a:pPr algn="ctr">
-              <a:spcBef>
-                <a:spcPts val="0"/>
-              </a:spcBef>
-              <a:spcAft>
-                <a:spcPts val="0"/>
-              </a:spcAft>
-            </a:pPr>
-            <a:r>
-              <a:rPr sz="2600" b="1" i="0">
+            <a:off x="777240" y="4690872"/>
+            <a:ext cx="10515600" cy="411480"/>
+          </a:xfrm>
+          <a:prstGeom prst="rect">
+            <a:avLst/>
+          </a:prstGeom>
+          <a:noFill/>
+        </p:spPr>
+        <p:txBody>
+          <a:bodyPr wrap="square" lIns="0" rIns="0" tIns="0" bIns="0"/>
+          <a:lstStyle/>
+          <a:p>
+            <a:pPr algn="l">
+              <a:spcBef>
+                <a:spcPts val="0"/>
+              </a:spcBef>
+              <a:spcAft>
+                <a:spcPts val="0"/>
+              </a:spcAft>
+            </a:pPr>
+            <a:r>
+              <a:rPr sz="2200" b="1" i="0">
                 <a:solidFill>
                   <a:srgbClr val="0F172A"/>
                 </a:solidFill>
                 <a:latin typeface="Calibri"/>
               </a:rPr>
-              <a:t>FR</a:t>
+              <a:t>Also cut March marketing</a:t>
             </a:r>
           </a:p>
         </p:txBody>
@@ -9107,82 +8392,75 @@
         </p:nvSpPr>
         <p:spPr>
           <a:xfrm>
-            <a:off x="5074920" y="2468880"/>
-            <a:ext cx="2148840" cy="365760"/>
-          </a:xfrm>
-          <a:prstGeom prst="rect">
-            <a:avLst/>
-          </a:prstGeom>
-          <a:noFill/>
-        </p:spPr>
-        <p:txBody>
-          <a:bodyPr wrap="square" lIns="0" rIns="0" tIns="0" bIns="0" anchor="t"/>
-          <a:lstStyle/>
-          <a:p>
-            <a:pPr algn="ctr">
-              <a:spcBef>
-                <a:spcPts val="0"/>
-              </a:spcBef>
-              <a:spcAft>
-                <a:spcPts val="0"/>
-              </a:spcAft>
-            </a:pPr>
-            <a:r>
-              <a:rPr sz="1400" b="0" i="0">
-                <a:solidFill>
-                  <a:srgbClr val="5B6B82"/>
-                </a:solidFill>
-                <a:latin typeface="Calibri"/>
-              </a:rPr>
-              <a:t>Français</a:t>
-            </a:r>
-          </a:p>
-        </p:txBody>
-      </p:sp>
-      <p:sp>
-        <p:nvSpPr>
-          <p:cNvPr id="14" name="Rounded Rectangle 13"/>
-          <p:cNvSpPr/>
-          <p:nvPr/>
-        </p:nvSpPr>
-        <p:spPr>
-          <a:xfrm>
-            <a:off x="7360920" y="1691640"/>
-            <a:ext cx="2148840" cy="1417320"/>
-          </a:xfrm>
-          <a:prstGeom prst="roundRect">
-            <a:avLst>
-              <a:gd name="adj" fmla="val 10000"/>
-            </a:avLst>
-          </a:prstGeom>
-          <a:solidFill>
-            <a:srgbClr val="FFFFFF"/>
-          </a:solidFill>
-          <a:ln w="12700">
-            <a:solidFill>
-              <a:srgbClr val="E2E8F0"/>
-            </a:solidFill>
-          </a:ln>
-        </p:spPr>
-        <p:style>
-          <a:lnRef idx="1">
-            <a:schemeClr val="accent1"/>
-          </a:lnRef>
-          <a:fillRef idx="3">
-            <a:schemeClr val="accent1"/>
-          </a:fillRef>
-          <a:effectRef idx="2">
-            <a:schemeClr val="accent1"/>
-          </a:effectRef>
-          <a:fontRef idx="minor">
-            <a:schemeClr val="lt1"/>
-          </a:fontRef>
-        </p:style>
-        <p:txBody>
-          <a:bodyPr rtlCol="0" anchor="ctr"/>
-          <a:lstStyle/>
-          <a:p>
-            <a:pPr algn="ctr"/>
+            <a:off x="777240" y="5166360"/>
+            <a:ext cx="10515600" cy="457200"/>
+          </a:xfrm>
+          <a:prstGeom prst="rect">
+            <a:avLst/>
+          </a:prstGeom>
+          <a:noFill/>
+        </p:spPr>
+        <p:txBody>
+          <a:bodyPr wrap="square" lIns="0" rIns="0" tIns="0" bIns="0"/>
+          <a:lstStyle/>
+          <a:p>
+            <a:pPr algn="l">
+              <a:spcBef>
+                <a:spcPts val="0"/>
+              </a:spcBef>
+              <a:spcAft>
+                <a:spcPts val="0"/>
+              </a:spcAft>
+            </a:pPr>
+            <a:r>
+              <a:rPr sz="1800" b="0" i="0">
+                <a:solidFill>
+                  <a:srgbClr val="3E4C63"/>
+                </a:solidFill>
+                <a:latin typeface="Calibri"/>
+              </a:rPr>
+              <a:t>With a 100 percent cut, the shortfall is 10 April 2026 and the 30-day low is USD 1,562.</a:t>
+            </a:r>
+          </a:p>
+        </p:txBody>
+      </p:sp>
+      <p:sp>
+        <p:nvSpPr>
+          <p:cNvPr id="14" name="TextBox 13"/>
+          <p:cNvSpPr txBox="1"/>
+          <p:nvPr/>
+        </p:nvSpPr>
+        <p:spPr>
+          <a:xfrm>
+            <a:off x="502920" y="6446520"/>
+            <a:ext cx="6858000" cy="292608"/>
+          </a:xfrm>
+          <a:prstGeom prst="rect">
+            <a:avLst/>
+          </a:prstGeom>
+          <a:noFill/>
+        </p:spPr>
+        <p:txBody>
+          <a:bodyPr wrap="square" lIns="0" rIns="0" tIns="0" bIns="0"/>
+          <a:lstStyle/>
+          <a:p>
+            <a:pPr algn="l">
+              <a:spcBef>
+                <a:spcPts val="0"/>
+              </a:spcBef>
+              <a:spcAft>
+                <a:spcPts val="0"/>
+              </a:spcAft>
+            </a:pPr>
+            <a:r>
+              <a:rPr sz="1400" b="1" i="0">
+                <a:solidFill>
+                  <a:srgbClr val="3E4C63"/>
+                </a:solidFill>
+                <a:latin typeface="Calibri"/>
+              </a:rPr>
+              <a:t>FinSight AI  ·  Team 65  ·  Manipal University</a:t>
+            </a:r>
           </a:p>
         </p:txBody>
       </p:sp>
@@ -9194,636 +8472,8 @@
         </p:nvSpPr>
         <p:spPr>
           <a:xfrm>
-            <a:off x="7360920" y="1874519"/>
-            <a:ext cx="2148840" cy="548640"/>
-          </a:xfrm>
-          <a:prstGeom prst="rect">
-            <a:avLst/>
-          </a:prstGeom>
-          <a:noFill/>
-        </p:spPr>
-        <p:txBody>
-          <a:bodyPr wrap="square" lIns="0" rIns="0" tIns="0" bIns="0" anchor="t"/>
-          <a:lstStyle/>
-          <a:p>
-            <a:pPr algn="ctr">
-              <a:spcBef>
-                <a:spcPts val="0"/>
-              </a:spcBef>
-              <a:spcAft>
-                <a:spcPts val="0"/>
-              </a:spcAft>
-            </a:pPr>
-            <a:r>
-              <a:rPr sz="2600" b="1" i="0">
-                <a:solidFill>
-                  <a:srgbClr val="0F172A"/>
-                </a:solidFill>
-                <a:latin typeface="Calibri"/>
-              </a:rPr>
-              <a:t>HI</a:t>
-            </a:r>
-          </a:p>
-        </p:txBody>
-      </p:sp>
-      <p:sp>
-        <p:nvSpPr>
-          <p:cNvPr id="16" name="TextBox 15"/>
-          <p:cNvSpPr txBox="1"/>
-          <p:nvPr/>
-        </p:nvSpPr>
-        <p:spPr>
-          <a:xfrm>
-            <a:off x="7360920" y="2468880"/>
-            <a:ext cx="2148840" cy="365760"/>
-          </a:xfrm>
-          <a:prstGeom prst="rect">
-            <a:avLst/>
-          </a:prstGeom>
-          <a:noFill/>
-        </p:spPr>
-        <p:txBody>
-          <a:bodyPr wrap="square" lIns="0" rIns="0" tIns="0" bIns="0" anchor="t"/>
-          <a:lstStyle/>
-          <a:p>
-            <a:pPr algn="ctr">
-              <a:spcBef>
-                <a:spcPts val="0"/>
-              </a:spcBef>
-              <a:spcAft>
-                <a:spcPts val="0"/>
-              </a:spcAft>
-            </a:pPr>
-            <a:r>
-              <a:rPr sz="1400" b="0" i="0">
-                <a:solidFill>
-                  <a:srgbClr val="5B6B82"/>
-                </a:solidFill>
-                <a:latin typeface="Calibri"/>
-              </a:rPr>
-              <a:t>हिन्दी</a:t>
-            </a:r>
-          </a:p>
-        </p:txBody>
-      </p:sp>
-      <p:sp>
-        <p:nvSpPr>
-          <p:cNvPr id="17" name="Rounded Rectangle 16"/>
-          <p:cNvSpPr/>
-          <p:nvPr/>
-        </p:nvSpPr>
-        <p:spPr>
-          <a:xfrm>
-            <a:off x="9646920" y="1691640"/>
-            <a:ext cx="2148840" cy="1417320"/>
-          </a:xfrm>
-          <a:prstGeom prst="roundRect">
-            <a:avLst>
-              <a:gd name="adj" fmla="val 10000"/>
-            </a:avLst>
-          </a:prstGeom>
-          <a:solidFill>
-            <a:srgbClr val="FFFFFF"/>
-          </a:solidFill>
-          <a:ln w="12700">
-            <a:solidFill>
-              <a:srgbClr val="E2E8F0"/>
-            </a:solidFill>
-          </a:ln>
-        </p:spPr>
-        <p:style>
-          <a:lnRef idx="1">
-            <a:schemeClr val="accent1"/>
-          </a:lnRef>
-          <a:fillRef idx="3">
-            <a:schemeClr val="accent1"/>
-          </a:fillRef>
-          <a:effectRef idx="2">
-            <a:schemeClr val="accent1"/>
-          </a:effectRef>
-          <a:fontRef idx="minor">
-            <a:schemeClr val="lt1"/>
-          </a:fontRef>
-        </p:style>
-        <p:txBody>
-          <a:bodyPr rtlCol="0" anchor="ctr"/>
-          <a:lstStyle/>
-          <a:p>
-            <a:pPr algn="ctr"/>
-          </a:p>
-        </p:txBody>
-      </p:sp>
-      <p:sp>
-        <p:nvSpPr>
-          <p:cNvPr id="18" name="TextBox 17"/>
-          <p:cNvSpPr txBox="1"/>
-          <p:nvPr/>
-        </p:nvSpPr>
-        <p:spPr>
-          <a:xfrm>
-            <a:off x="9646920" y="1874519"/>
-            <a:ext cx="2148840" cy="548640"/>
-          </a:xfrm>
-          <a:prstGeom prst="rect">
-            <a:avLst/>
-          </a:prstGeom>
-          <a:noFill/>
-        </p:spPr>
-        <p:txBody>
-          <a:bodyPr wrap="square" lIns="0" rIns="0" tIns="0" bIns="0" anchor="t"/>
-          <a:lstStyle/>
-          <a:p>
-            <a:pPr algn="ctr">
-              <a:spcBef>
-                <a:spcPts val="0"/>
-              </a:spcBef>
-              <a:spcAft>
-                <a:spcPts val="0"/>
-              </a:spcAft>
-            </a:pPr>
-            <a:r>
-              <a:rPr sz="2600" b="1" i="0">
-                <a:solidFill>
-                  <a:srgbClr val="0F172A"/>
-                </a:solidFill>
-                <a:latin typeface="Calibri"/>
-              </a:rPr>
-              <a:t>ZH</a:t>
-            </a:r>
-          </a:p>
-        </p:txBody>
-      </p:sp>
-      <p:sp>
-        <p:nvSpPr>
-          <p:cNvPr id="19" name="TextBox 18"/>
-          <p:cNvSpPr txBox="1"/>
-          <p:nvPr/>
-        </p:nvSpPr>
-        <p:spPr>
-          <a:xfrm>
-            <a:off x="9646920" y="2468880"/>
-            <a:ext cx="2148840" cy="365760"/>
-          </a:xfrm>
-          <a:prstGeom prst="rect">
-            <a:avLst/>
-          </a:prstGeom>
-          <a:noFill/>
-        </p:spPr>
-        <p:txBody>
-          <a:bodyPr wrap="square" lIns="0" rIns="0" tIns="0" bIns="0" anchor="t"/>
-          <a:lstStyle/>
-          <a:p>
-            <a:pPr algn="ctr">
-              <a:spcBef>
-                <a:spcPts val="0"/>
-              </a:spcBef>
-              <a:spcAft>
-                <a:spcPts val="0"/>
-              </a:spcAft>
-            </a:pPr>
-            <a:r>
-              <a:rPr sz="1400" b="0" i="0">
-                <a:solidFill>
-                  <a:srgbClr val="5B6B82"/>
-                </a:solidFill>
-                <a:latin typeface="Calibri"/>
-              </a:rPr>
-              <a:t>中文</a:t>
-            </a:r>
-          </a:p>
-        </p:txBody>
-      </p:sp>
-      <p:sp>
-        <p:nvSpPr>
-          <p:cNvPr id="20" name="Rounded Rectangle 19"/>
-          <p:cNvSpPr/>
-          <p:nvPr/>
-        </p:nvSpPr>
-        <p:spPr>
-          <a:xfrm>
-            <a:off x="502920" y="3383280"/>
-            <a:ext cx="3611880" cy="2697480"/>
-          </a:xfrm>
-          <a:prstGeom prst="roundRect">
-            <a:avLst>
-              <a:gd name="adj" fmla="val 8000"/>
-            </a:avLst>
-          </a:prstGeom>
-          <a:solidFill>
-            <a:srgbClr val="FFFFFF"/>
-          </a:solidFill>
-          <a:ln w="12700">
-            <a:solidFill>
-              <a:srgbClr val="E2E8F0"/>
-            </a:solidFill>
-          </a:ln>
-        </p:spPr>
-        <p:style>
-          <a:lnRef idx="1">
-            <a:schemeClr val="accent1"/>
-          </a:lnRef>
-          <a:fillRef idx="3">
-            <a:schemeClr val="accent1"/>
-          </a:fillRef>
-          <a:effectRef idx="2">
-            <a:schemeClr val="accent1"/>
-          </a:effectRef>
-          <a:fontRef idx="minor">
-            <a:schemeClr val="lt1"/>
-          </a:fontRef>
-        </p:style>
-        <p:txBody>
-          <a:bodyPr rtlCol="0" anchor="ctr"/>
-          <a:lstStyle/>
-          <a:p>
-            <a:pPr algn="ctr"/>
-          </a:p>
-        </p:txBody>
-      </p:sp>
-      <p:sp>
-        <p:nvSpPr>
-          <p:cNvPr id="21" name="TextBox 20"/>
-          <p:cNvSpPr txBox="1"/>
-          <p:nvPr/>
-        </p:nvSpPr>
-        <p:spPr>
-          <a:xfrm>
-            <a:off x="758952" y="3611880"/>
-            <a:ext cx="3108960" cy="731520"/>
-          </a:xfrm>
-          <a:prstGeom prst="rect">
-            <a:avLst/>
-          </a:prstGeom>
-          <a:noFill/>
-        </p:spPr>
-        <p:txBody>
-          <a:bodyPr wrap="square" lIns="0" rIns="0" tIns="0" bIns="0" anchor="t"/>
-          <a:lstStyle/>
-          <a:p>
-            <a:pPr algn="l">
-              <a:spcBef>
-                <a:spcPts val="0"/>
-              </a:spcBef>
-              <a:spcAft>
-                <a:spcPts val="0"/>
-              </a:spcAft>
-            </a:pPr>
-            <a:r>
-              <a:rPr sz="2000" b="1" i="0">
-                <a:solidFill>
-                  <a:srgbClr val="0F172A"/>
-                </a:solidFill>
-                <a:latin typeface="Calibri"/>
-              </a:rPr>
-              <a:t>Light and dark</a:t>
-            </a:r>
-          </a:p>
-        </p:txBody>
-      </p:sp>
-      <p:sp>
-        <p:nvSpPr>
-          <p:cNvPr id="22" name="TextBox 21"/>
-          <p:cNvSpPr txBox="1"/>
-          <p:nvPr/>
-        </p:nvSpPr>
-        <p:spPr>
-          <a:xfrm>
-            <a:off x="758952" y="4434840"/>
-            <a:ext cx="3108960" cy="1325880"/>
-          </a:xfrm>
-          <a:prstGeom prst="rect">
-            <a:avLst/>
-          </a:prstGeom>
-          <a:noFill/>
-        </p:spPr>
-        <p:txBody>
-          <a:bodyPr wrap="square" lIns="0" rIns="0" tIns="0" bIns="0" anchor="t"/>
-          <a:lstStyle/>
-          <a:p>
-            <a:pPr algn="l">
-              <a:spcBef>
-                <a:spcPts val="0"/>
-              </a:spcBef>
-              <a:spcAft>
-                <a:spcPts val="0"/>
-              </a:spcAft>
-            </a:pPr>
-            <a:r>
-              <a:rPr sz="1500" b="0" i="0">
-                <a:solidFill>
-                  <a:srgbClr val="5B6B82"/>
-                </a:solidFill>
-                <a:latin typeface="Calibri"/>
-              </a:rPr>
-              <a:t>Light is the default. Dark is one click. The chart lines stay readable in both.</a:t>
-            </a:r>
-          </a:p>
-        </p:txBody>
-      </p:sp>
-      <p:sp>
-        <p:nvSpPr>
-          <p:cNvPr id="23" name="Rounded Rectangle 22"/>
-          <p:cNvSpPr/>
-          <p:nvPr/>
-        </p:nvSpPr>
-        <p:spPr>
-          <a:xfrm>
-            <a:off x="4297680" y="3383280"/>
-            <a:ext cx="3611880" cy="2697480"/>
-          </a:xfrm>
-          <a:prstGeom prst="roundRect">
-            <a:avLst>
-              <a:gd name="adj" fmla="val 8000"/>
-            </a:avLst>
-          </a:prstGeom>
-          <a:solidFill>
-            <a:srgbClr val="FFFFFF"/>
-          </a:solidFill>
-          <a:ln w="12700">
-            <a:solidFill>
-              <a:srgbClr val="E2E8F0"/>
-            </a:solidFill>
-          </a:ln>
-        </p:spPr>
-        <p:style>
-          <a:lnRef idx="1">
-            <a:schemeClr val="accent1"/>
-          </a:lnRef>
-          <a:fillRef idx="3">
-            <a:schemeClr val="accent1"/>
-          </a:fillRef>
-          <a:effectRef idx="2">
-            <a:schemeClr val="accent1"/>
-          </a:effectRef>
-          <a:fontRef idx="minor">
-            <a:schemeClr val="lt1"/>
-          </a:fontRef>
-        </p:style>
-        <p:txBody>
-          <a:bodyPr rtlCol="0" anchor="ctr"/>
-          <a:lstStyle/>
-          <a:p>
-            <a:pPr algn="ctr"/>
-          </a:p>
-        </p:txBody>
-      </p:sp>
-      <p:sp>
-        <p:nvSpPr>
-          <p:cNvPr id="24" name="TextBox 23"/>
-          <p:cNvSpPr txBox="1"/>
-          <p:nvPr/>
-        </p:nvSpPr>
-        <p:spPr>
-          <a:xfrm>
-            <a:off x="4553712" y="3611880"/>
-            <a:ext cx="3108960" cy="731520"/>
-          </a:xfrm>
-          <a:prstGeom prst="rect">
-            <a:avLst/>
-          </a:prstGeom>
-          <a:noFill/>
-        </p:spPr>
-        <p:txBody>
-          <a:bodyPr wrap="square" lIns="0" rIns="0" tIns="0" bIns="0" anchor="t"/>
-          <a:lstStyle/>
-          <a:p>
-            <a:pPr algn="l">
-              <a:spcBef>
-                <a:spcPts val="0"/>
-              </a:spcBef>
-              <a:spcAft>
-                <a:spcPts val="0"/>
-              </a:spcAft>
-            </a:pPr>
-            <a:r>
-              <a:rPr sz="2000" b="1" i="0">
-                <a:solidFill>
-                  <a:srgbClr val="0F172A"/>
-                </a:solidFill>
-                <a:latin typeface="Calibri"/>
-              </a:rPr>
-              <a:t>A live side chart</a:t>
-            </a:r>
-          </a:p>
-        </p:txBody>
-      </p:sp>
-      <p:sp>
-        <p:nvSpPr>
-          <p:cNvPr id="25" name="TextBox 24"/>
-          <p:cNvSpPr txBox="1"/>
-          <p:nvPr/>
-        </p:nvSpPr>
-        <p:spPr>
-          <a:xfrm>
-            <a:off x="4553712" y="4434840"/>
-            <a:ext cx="3108960" cy="1325880"/>
-          </a:xfrm>
-          <a:prstGeom prst="rect">
-            <a:avLst/>
-          </a:prstGeom>
-          <a:noFill/>
-        </p:spPr>
-        <p:txBody>
-          <a:bodyPr wrap="square" lIns="0" rIns="0" tIns="0" bIns="0" anchor="t"/>
-          <a:lstStyle/>
-          <a:p>
-            <a:pPr algn="l">
-              <a:spcBef>
-                <a:spcPts val="0"/>
-              </a:spcBef>
-              <a:spcAft>
-                <a:spcPts val="0"/>
-              </a:spcAft>
-            </a:pPr>
-            <a:r>
-              <a:rPr sz="1500" b="0" i="0">
-                <a:solidFill>
-                  <a:srgbClr val="5B6B82"/>
-                </a:solidFill>
-                <a:latin typeface="Calibri"/>
-              </a:rPr>
-              <a:t>Change a collection date or cut marketing. The panel on the right redraws.</a:t>
-            </a:r>
-          </a:p>
-        </p:txBody>
-      </p:sp>
-      <p:sp>
-        <p:nvSpPr>
-          <p:cNvPr id="26" name="Rounded Rectangle 25"/>
-          <p:cNvSpPr/>
-          <p:nvPr/>
-        </p:nvSpPr>
-        <p:spPr>
-          <a:xfrm>
-            <a:off x="8092440" y="3383280"/>
-            <a:ext cx="3611880" cy="2697480"/>
-          </a:xfrm>
-          <a:prstGeom prst="roundRect">
-            <a:avLst>
-              <a:gd name="adj" fmla="val 8000"/>
-            </a:avLst>
-          </a:prstGeom>
-          <a:solidFill>
-            <a:srgbClr val="FFFFFF"/>
-          </a:solidFill>
-          <a:ln w="12700">
-            <a:solidFill>
-              <a:srgbClr val="E2E8F0"/>
-            </a:solidFill>
-          </a:ln>
-        </p:spPr>
-        <p:style>
-          <a:lnRef idx="1">
-            <a:schemeClr val="accent1"/>
-          </a:lnRef>
-          <a:fillRef idx="3">
-            <a:schemeClr val="accent1"/>
-          </a:fillRef>
-          <a:effectRef idx="2">
-            <a:schemeClr val="accent1"/>
-          </a:effectRef>
-          <a:fontRef idx="minor">
-            <a:schemeClr val="lt1"/>
-          </a:fontRef>
-        </p:style>
-        <p:txBody>
-          <a:bodyPr rtlCol="0" anchor="ctr"/>
-          <a:lstStyle/>
-          <a:p>
-            <a:pPr algn="ctr"/>
-          </a:p>
-        </p:txBody>
-      </p:sp>
-      <p:sp>
-        <p:nvSpPr>
-          <p:cNvPr id="27" name="TextBox 26"/>
-          <p:cNvSpPr txBox="1"/>
-          <p:nvPr/>
-        </p:nvSpPr>
-        <p:spPr>
-          <a:xfrm>
-            <a:off x="8348472" y="3611880"/>
-            <a:ext cx="3108960" cy="731520"/>
-          </a:xfrm>
-          <a:prstGeom prst="rect">
-            <a:avLst/>
-          </a:prstGeom>
-          <a:noFill/>
-        </p:spPr>
-        <p:txBody>
-          <a:bodyPr wrap="square" lIns="0" rIns="0" tIns="0" bIns="0" anchor="t"/>
-          <a:lstStyle/>
-          <a:p>
-            <a:pPr algn="l">
-              <a:spcBef>
-                <a:spcPts val="0"/>
-              </a:spcBef>
-              <a:spcAft>
-                <a:spcPts val="0"/>
-              </a:spcAft>
-            </a:pPr>
-            <a:r>
-              <a:rPr sz="2000" b="1" i="0">
-                <a:solidFill>
-                  <a:srgbClr val="0F172A"/>
-                </a:solidFill>
-                <a:latin typeface="Calibri"/>
-              </a:rPr>
-              <a:t>A check on the past</a:t>
-            </a:r>
-          </a:p>
-        </p:txBody>
-      </p:sp>
-      <p:sp>
-        <p:nvSpPr>
-          <p:cNvPr id="28" name="TextBox 27"/>
-          <p:cNvSpPr txBox="1"/>
-          <p:nvPr/>
-        </p:nvSpPr>
-        <p:spPr>
-          <a:xfrm>
-            <a:off x="8348472" y="4434840"/>
-            <a:ext cx="3108960" cy="1325880"/>
-          </a:xfrm>
-          <a:prstGeom prst="rect">
-            <a:avLst/>
-          </a:prstGeom>
-          <a:noFill/>
-        </p:spPr>
-        <p:txBody>
-          <a:bodyPr wrap="square" lIns="0" rIns="0" tIns="0" bIns="0" anchor="t"/>
-          <a:lstStyle/>
-          <a:p>
-            <a:pPr algn="l">
-              <a:spcBef>
-                <a:spcPts val="0"/>
-              </a:spcBef>
-              <a:spcAft>
-                <a:spcPts val="0"/>
-              </a:spcAft>
-            </a:pPr>
-            <a:r>
-              <a:rPr sz="1500" b="0" i="0">
-                <a:solidFill>
-                  <a:srgbClr val="5B6B82"/>
-                </a:solidFill>
-                <a:latin typeface="Calibri"/>
-              </a:rPr>
-              <a:t>We hide recent days and compare the forecast with repeating last month.</a:t>
-            </a:r>
-          </a:p>
-        </p:txBody>
-      </p:sp>
-      <p:sp>
-        <p:nvSpPr>
-          <p:cNvPr id="29" name="TextBox 28"/>
-          <p:cNvSpPr txBox="1"/>
-          <p:nvPr/>
-        </p:nvSpPr>
-        <p:spPr>
-          <a:xfrm>
-            <a:off x="502920" y="6473952"/>
-            <a:ext cx="7315200" cy="256032"/>
-          </a:xfrm>
-          <a:prstGeom prst="rect">
-            <a:avLst/>
-          </a:prstGeom>
-          <a:noFill/>
-        </p:spPr>
-        <p:txBody>
-          <a:bodyPr wrap="square" lIns="0" rIns="0" tIns="0" bIns="0" anchor="t"/>
-          <a:lstStyle/>
-          <a:p>
-            <a:pPr algn="l">
-              <a:spcBef>
-                <a:spcPts val="0"/>
-              </a:spcBef>
-              <a:spcAft>
-                <a:spcPts val="0"/>
-              </a:spcAft>
-            </a:pPr>
-            <a:r>
-              <a:rPr sz="1200" b="1" i="0">
-                <a:solidFill>
-                  <a:srgbClr val="5B6B82"/>
-                </a:solidFill>
-                <a:latin typeface="Calibri"/>
-              </a:rPr>
-              <a:t>FinSight</a:t>
-            </a:r>
-          </a:p>
-        </p:txBody>
-      </p:sp>
-      <p:sp>
-        <p:nvSpPr>
-          <p:cNvPr id="30" name="TextBox 29"/>
-          <p:cNvSpPr txBox="1"/>
-          <p:nvPr/>
-        </p:nvSpPr>
-        <p:spPr>
-          <a:xfrm>
-            <a:off x="2011680" y="6473952"/>
-            <a:ext cx="7498079" cy="256032"/>
+            <a:off x="7406640" y="6446520"/>
+            <a:ext cx="3108960" cy="292608"/>
           </a:xfrm>
           <a:prstGeom prst="rect">
             <a:avLst/>
@@ -9836,37 +8486,38 @@
           </a:bodyPr>
           <a:lstStyle/>
           <a:p>
-            <a:r>
-              <a:rPr sz="1200" b="0" i="0" u="sng">
+            <a:pPr algn="r"/>
+            <a:r>
+              <a:rPr sz="1400" b="1" i="0" u="sng">
                 <a:solidFill>
                   <a:srgbClr val="0E7490"/>
                 </a:solidFill>
                 <a:latin typeface="Calibri"/>
                 <a:hlinkClick r:id="rId2"/>
               </a:rPr>
-              <a:t>https://finsight-off.vercel.app</a:t>
-            </a:r>
-          </a:p>
-        </p:txBody>
-      </p:sp>
-      <p:sp>
-        <p:nvSpPr>
-          <p:cNvPr id="31" name="TextBox 30"/>
-          <p:cNvSpPr txBox="1"/>
-          <p:nvPr/>
-        </p:nvSpPr>
-        <p:spPr>
-          <a:xfrm>
-            <a:off x="10607040" y="6473952"/>
-            <a:ext cx="1097280" cy="256032"/>
-          </a:xfrm>
-          <a:prstGeom prst="rect">
-            <a:avLst/>
-          </a:prstGeom>
-          <a:noFill/>
-        </p:spPr>
-        <p:txBody>
-          <a:bodyPr wrap="square" lIns="0" rIns="0" tIns="0" bIns="0" anchor="t"/>
+              <a:t>finsight-off.vercel.app</a:t>
+            </a:r>
+          </a:p>
+        </p:txBody>
+      </p:sp>
+      <p:sp>
+        <p:nvSpPr>
+          <p:cNvPr id="16" name="TextBox 15"/>
+          <p:cNvSpPr txBox="1"/>
+          <p:nvPr/>
+        </p:nvSpPr>
+        <p:spPr>
+          <a:xfrm>
+            <a:off x="10698480" y="6446520"/>
+            <a:ext cx="1005840" cy="292608"/>
+          </a:xfrm>
+          <a:prstGeom prst="rect">
+            <a:avLst/>
+          </a:prstGeom>
+          <a:noFill/>
+        </p:spPr>
+        <p:txBody>
+          <a:bodyPr wrap="square" lIns="0" rIns="0" tIns="0" bIns="0"/>
           <a:lstStyle/>
           <a:p>
             <a:pPr algn="r">
@@ -9878,13 +8529,13 @@
               </a:spcAft>
             </a:pPr>
             <a:r>
-              <a:rPr sz="1200" b="1" i="0">
-                <a:solidFill>
-                  <a:srgbClr val="5B6B82"/>
-                </a:solidFill>
-                <a:latin typeface="Calibri"/>
-              </a:rPr>
-              <a:t>7  /  8</a:t>
+              <a:rPr sz="1400" b="1" i="0">
+                <a:solidFill>
+                  <a:srgbClr val="3E4C63"/>
+                </a:solidFill>
+                <a:latin typeface="Calibri"/>
+              </a:rPr>
+              <a:t>7  /  9</a:t>
             </a:r>
           </a:p>
         </p:txBody>
@@ -9922,6 +8573,789 @@
             <a:avLst/>
           </a:prstGeom>
           <a:solidFill>
+            <a:srgbClr val="F4F7FB"/>
+          </a:solidFill>
+          <a:ln>
+            <a:noFill/>
+          </a:ln>
+        </p:spPr>
+        <p:style>
+          <a:lnRef idx="1">
+            <a:schemeClr val="accent1"/>
+          </a:lnRef>
+          <a:fillRef idx="3">
+            <a:schemeClr val="accent1"/>
+          </a:fillRef>
+          <a:effectRef idx="2">
+            <a:schemeClr val="accent1"/>
+          </a:effectRef>
+          <a:fontRef idx="minor">
+            <a:schemeClr val="lt1"/>
+          </a:fontRef>
+        </p:style>
+        <p:txBody>
+          <a:bodyPr rtlCol="0" anchor="ctr"/>
+          <a:lstStyle/>
+          <a:p>
+            <a:pPr algn="ctr"/>
+          </a:p>
+        </p:txBody>
+      </p:sp>
+      <p:sp>
+        <p:nvSpPr>
+          <p:cNvPr id="3" name="TextBox 2"/>
+          <p:cNvSpPr txBox="1"/>
+          <p:nvPr/>
+        </p:nvSpPr>
+        <p:spPr>
+          <a:xfrm>
+            <a:off x="502920" y="292608"/>
+            <a:ext cx="9144000" cy="292608"/>
+          </a:xfrm>
+          <a:prstGeom prst="rect">
+            <a:avLst/>
+          </a:prstGeom>
+          <a:noFill/>
+        </p:spPr>
+        <p:txBody>
+          <a:bodyPr wrap="square" lIns="0" rIns="0" tIns="0" bIns="0"/>
+          <a:lstStyle/>
+          <a:p>
+            <a:pPr algn="l">
+              <a:spcBef>
+                <a:spcPts val="0"/>
+              </a:spcBef>
+              <a:spcAft>
+                <a:spcPts val="0"/>
+              </a:spcAft>
+            </a:pPr>
+            <a:r>
+              <a:rPr sz="1400" b="1" i="0">
+                <a:solidFill>
+                  <a:srgbClr val="0F9F6E"/>
+                </a:solidFill>
+                <a:latin typeface="Calibri"/>
+              </a:rPr>
+              <a:t>OPEN IT</a:t>
+            </a:r>
+          </a:p>
+        </p:txBody>
+      </p:sp>
+      <p:sp>
+        <p:nvSpPr>
+          <p:cNvPr id="4" name="TextBox 3"/>
+          <p:cNvSpPr txBox="1"/>
+          <p:nvPr/>
+        </p:nvSpPr>
+        <p:spPr>
+          <a:xfrm>
+            <a:off x="502920" y="640080"/>
+            <a:ext cx="10972800" cy="640080"/>
+          </a:xfrm>
+          <a:prstGeom prst="rect">
+            <a:avLst/>
+          </a:prstGeom>
+          <a:noFill/>
+        </p:spPr>
+        <p:txBody>
+          <a:bodyPr wrap="square" lIns="0" rIns="0" tIns="0" bIns="0"/>
+          <a:lstStyle/>
+          <a:p>
+            <a:pPr algn="l">
+              <a:spcBef>
+                <a:spcPts val="0"/>
+              </a:spcBef>
+              <a:spcAft>
+                <a:spcPts val="0"/>
+              </a:spcAft>
+            </a:pPr>
+            <a:r>
+              <a:rPr sz="3600" b="1" i="0">
+                <a:solidFill>
+                  <a:srgbClr val="0F172A"/>
+                </a:solidFill>
+                <a:latin typeface="Calibri"/>
+              </a:rPr>
+              <a:t>The demo is already live.</a:t>
+            </a:r>
+          </a:p>
+        </p:txBody>
+      </p:sp>
+      <p:sp>
+        <p:nvSpPr>
+          <p:cNvPr id="5" name="Rounded Rectangle 4"/>
+          <p:cNvSpPr/>
+          <p:nvPr/>
+        </p:nvSpPr>
+        <p:spPr>
+          <a:xfrm>
+            <a:off x="502920" y="1645920"/>
+            <a:ext cx="3611880" cy="3017520"/>
+          </a:xfrm>
+          <a:prstGeom prst="roundRect">
+            <a:avLst>
+              <a:gd name="adj" fmla="val 8000"/>
+            </a:avLst>
+          </a:prstGeom>
+          <a:solidFill>
+            <a:srgbClr val="FFFFFF"/>
+          </a:solidFill>
+          <a:ln w="15875">
+            <a:solidFill>
+              <a:srgbClr val="D5DEEA"/>
+            </a:solidFill>
+          </a:ln>
+        </p:spPr>
+        <p:style>
+          <a:lnRef idx="1">
+            <a:schemeClr val="accent1"/>
+          </a:lnRef>
+          <a:fillRef idx="3">
+            <a:schemeClr val="accent1"/>
+          </a:fillRef>
+          <a:effectRef idx="2">
+            <a:schemeClr val="accent1"/>
+          </a:effectRef>
+          <a:fontRef idx="minor">
+            <a:schemeClr val="lt1"/>
+          </a:fontRef>
+        </p:style>
+        <p:txBody>
+          <a:bodyPr rtlCol="0" anchor="ctr"/>
+          <a:lstStyle/>
+          <a:p>
+            <a:pPr algn="ctr"/>
+          </a:p>
+        </p:txBody>
+      </p:sp>
+      <p:sp>
+        <p:nvSpPr>
+          <p:cNvPr id="6" name="TextBox 5"/>
+          <p:cNvSpPr txBox="1"/>
+          <p:nvPr/>
+        </p:nvSpPr>
+        <p:spPr>
+          <a:xfrm>
+            <a:off x="731520" y="1874519"/>
+            <a:ext cx="3154680" cy="457200"/>
+          </a:xfrm>
+          <a:prstGeom prst="rect">
+            <a:avLst/>
+          </a:prstGeom>
+          <a:noFill/>
+        </p:spPr>
+        <p:txBody>
+          <a:bodyPr wrap="square" lIns="0" rIns="0" tIns="0" bIns="0"/>
+          <a:lstStyle/>
+          <a:p>
+            <a:pPr algn="l">
+              <a:spcBef>
+                <a:spcPts val="0"/>
+              </a:spcBef>
+              <a:spcAft>
+                <a:spcPts val="0"/>
+              </a:spcAft>
+            </a:pPr>
+            <a:r>
+              <a:rPr sz="2200" b="1" i="0">
+                <a:solidFill>
+                  <a:srgbClr val="0F172A"/>
+                </a:solidFill>
+                <a:latin typeface="Calibri"/>
+              </a:rPr>
+              <a:t>Live site</a:t>
+            </a:r>
+          </a:p>
+        </p:txBody>
+      </p:sp>
+      <p:sp>
+        <p:nvSpPr>
+          <p:cNvPr id="7" name="TextBox 6"/>
+          <p:cNvSpPr txBox="1"/>
+          <p:nvPr/>
+        </p:nvSpPr>
+        <p:spPr>
+          <a:xfrm>
+            <a:off x="731520" y="2423160"/>
+            <a:ext cx="3154680" cy="822960"/>
+          </a:xfrm>
+          <a:prstGeom prst="rect">
+            <a:avLst/>
+          </a:prstGeom>
+          <a:noFill/>
+        </p:spPr>
+        <p:txBody>
+          <a:bodyPr wrap="square" lIns="0" rIns="0" tIns="0" bIns="0"/>
+          <a:lstStyle/>
+          <a:p>
+            <a:pPr algn="l">
+              <a:spcBef>
+                <a:spcPts val="0"/>
+              </a:spcBef>
+              <a:spcAft>
+                <a:spcPts val="0"/>
+              </a:spcAft>
+            </a:pPr>
+            <a:r>
+              <a:rPr sz="1600" b="0" i="0">
+                <a:solidFill>
+                  <a:srgbClr val="3E4C63"/>
+                </a:solidFill>
+                <a:latin typeface="Calibri"/>
+              </a:rPr>
+              <a:t>The forecast, the example, and the upload.</a:t>
+            </a:r>
+          </a:p>
+        </p:txBody>
+      </p:sp>
+      <p:sp>
+        <p:nvSpPr>
+          <p:cNvPr id="8" name="TextBox 7"/>
+          <p:cNvSpPr txBox="1"/>
+          <p:nvPr/>
+        </p:nvSpPr>
+        <p:spPr>
+          <a:xfrm>
+            <a:off x="731520" y="3383280"/>
+            <a:ext cx="3154680" cy="960120"/>
+          </a:xfrm>
+          <a:prstGeom prst="rect">
+            <a:avLst/>
+          </a:prstGeom>
+          <a:noFill/>
+        </p:spPr>
+        <p:txBody>
+          <a:bodyPr wrap="square">
+            <a:spAutoFit/>
+          </a:bodyPr>
+          <a:lstStyle/>
+          <a:p>
+            <a:r>
+              <a:rPr sz="1400" b="1" i="0" u="sng">
+                <a:solidFill>
+                  <a:srgbClr val="0E7490"/>
+                </a:solidFill>
+                <a:latin typeface="Calibri"/>
+                <a:hlinkClick r:id="rId2"/>
+              </a:rPr>
+              <a:t>finsight-off.vercel.app</a:t>
+            </a:r>
+          </a:p>
+        </p:txBody>
+      </p:sp>
+      <p:sp>
+        <p:nvSpPr>
+          <p:cNvPr id="9" name="Rounded Rectangle 8"/>
+          <p:cNvSpPr/>
+          <p:nvPr/>
+        </p:nvSpPr>
+        <p:spPr>
+          <a:xfrm>
+            <a:off x="4297680" y="1645920"/>
+            <a:ext cx="3611880" cy="3017520"/>
+          </a:xfrm>
+          <a:prstGeom prst="roundRect">
+            <a:avLst>
+              <a:gd name="adj" fmla="val 8000"/>
+            </a:avLst>
+          </a:prstGeom>
+          <a:solidFill>
+            <a:srgbClr val="FFFFFF"/>
+          </a:solidFill>
+          <a:ln w="15875">
+            <a:solidFill>
+              <a:srgbClr val="D5DEEA"/>
+            </a:solidFill>
+          </a:ln>
+        </p:spPr>
+        <p:style>
+          <a:lnRef idx="1">
+            <a:schemeClr val="accent1"/>
+          </a:lnRef>
+          <a:fillRef idx="3">
+            <a:schemeClr val="accent1"/>
+          </a:fillRef>
+          <a:effectRef idx="2">
+            <a:schemeClr val="accent1"/>
+          </a:effectRef>
+          <a:fontRef idx="minor">
+            <a:schemeClr val="lt1"/>
+          </a:fontRef>
+        </p:style>
+        <p:txBody>
+          <a:bodyPr rtlCol="0" anchor="ctr"/>
+          <a:lstStyle/>
+          <a:p>
+            <a:pPr algn="ctr"/>
+          </a:p>
+        </p:txBody>
+      </p:sp>
+      <p:sp>
+        <p:nvSpPr>
+          <p:cNvPr id="10" name="TextBox 9"/>
+          <p:cNvSpPr txBox="1"/>
+          <p:nvPr/>
+        </p:nvSpPr>
+        <p:spPr>
+          <a:xfrm>
+            <a:off x="4526280" y="1874519"/>
+            <a:ext cx="3154680" cy="457200"/>
+          </a:xfrm>
+          <a:prstGeom prst="rect">
+            <a:avLst/>
+          </a:prstGeom>
+          <a:noFill/>
+        </p:spPr>
+        <p:txBody>
+          <a:bodyPr wrap="square" lIns="0" rIns="0" tIns="0" bIns="0"/>
+          <a:lstStyle/>
+          <a:p>
+            <a:pPr algn="l">
+              <a:spcBef>
+                <a:spcPts val="0"/>
+              </a:spcBef>
+              <a:spcAft>
+                <a:spcPts val="0"/>
+              </a:spcAft>
+            </a:pPr>
+            <a:r>
+              <a:rPr sz="2200" b="1" i="0">
+                <a:solidFill>
+                  <a:srgbClr val="0F172A"/>
+                </a:solidFill>
+                <a:latin typeface="Calibri"/>
+              </a:rPr>
+              <a:t>Example</a:t>
+            </a:r>
+          </a:p>
+        </p:txBody>
+      </p:sp>
+      <p:sp>
+        <p:nvSpPr>
+          <p:cNvPr id="11" name="TextBox 10"/>
+          <p:cNvSpPr txBox="1"/>
+          <p:nvPr/>
+        </p:nvSpPr>
+        <p:spPr>
+          <a:xfrm>
+            <a:off x="4526280" y="2423160"/>
+            <a:ext cx="3154680" cy="822960"/>
+          </a:xfrm>
+          <a:prstGeom prst="rect">
+            <a:avLst/>
+          </a:prstGeom>
+          <a:noFill/>
+        </p:spPr>
+        <p:txBody>
+          <a:bodyPr wrap="square" lIns="0" rIns="0" tIns="0" bIns="0"/>
+          <a:lstStyle/>
+          <a:p>
+            <a:pPr algn="l">
+              <a:spcBef>
+                <a:spcPts val="0"/>
+              </a:spcBef>
+              <a:spcAft>
+                <a:spcPts val="0"/>
+              </a:spcAft>
+            </a:pPr>
+            <a:r>
+              <a:rPr sz="1600" b="0" i="0">
+                <a:solidFill>
+                  <a:srgbClr val="3E4C63"/>
+                </a:solidFill>
+                <a:latin typeface="Calibri"/>
+              </a:rPr>
+              <a:t>Harbor &amp; Co. Open the rows behind the chart.</a:t>
+            </a:r>
+          </a:p>
+        </p:txBody>
+      </p:sp>
+      <p:sp>
+        <p:nvSpPr>
+          <p:cNvPr id="12" name="TextBox 11"/>
+          <p:cNvSpPr txBox="1"/>
+          <p:nvPr/>
+        </p:nvSpPr>
+        <p:spPr>
+          <a:xfrm>
+            <a:off x="4526280" y="3383280"/>
+            <a:ext cx="3154680" cy="960120"/>
+          </a:xfrm>
+          <a:prstGeom prst="rect">
+            <a:avLst/>
+          </a:prstGeom>
+          <a:noFill/>
+        </p:spPr>
+        <p:txBody>
+          <a:bodyPr wrap="square">
+            <a:spAutoFit/>
+          </a:bodyPr>
+          <a:lstStyle/>
+          <a:p>
+            <a:r>
+              <a:rPr sz="1400" b="1" i="0" u="sng">
+                <a:solidFill>
+                  <a:srgbClr val="0E7490"/>
+                </a:solidFill>
+                <a:latin typeface="Calibri"/>
+                <a:hlinkClick r:id="rId3"/>
+              </a:rPr>
+              <a:t>finsight-off.vercel.app/demo</a:t>
+            </a:r>
+          </a:p>
+        </p:txBody>
+      </p:sp>
+      <p:sp>
+        <p:nvSpPr>
+          <p:cNvPr id="13" name="Rounded Rectangle 12"/>
+          <p:cNvSpPr/>
+          <p:nvPr/>
+        </p:nvSpPr>
+        <p:spPr>
+          <a:xfrm>
+            <a:off x="8092440" y="1645920"/>
+            <a:ext cx="3611880" cy="3017520"/>
+          </a:xfrm>
+          <a:prstGeom prst="roundRect">
+            <a:avLst>
+              <a:gd name="adj" fmla="val 8000"/>
+            </a:avLst>
+          </a:prstGeom>
+          <a:solidFill>
+            <a:srgbClr val="FFFFFF"/>
+          </a:solidFill>
+          <a:ln w="15875">
+            <a:solidFill>
+              <a:srgbClr val="D5DEEA"/>
+            </a:solidFill>
+          </a:ln>
+        </p:spPr>
+        <p:style>
+          <a:lnRef idx="1">
+            <a:schemeClr val="accent1"/>
+          </a:lnRef>
+          <a:fillRef idx="3">
+            <a:schemeClr val="accent1"/>
+          </a:fillRef>
+          <a:effectRef idx="2">
+            <a:schemeClr val="accent1"/>
+          </a:effectRef>
+          <a:fontRef idx="minor">
+            <a:schemeClr val="lt1"/>
+          </a:fontRef>
+        </p:style>
+        <p:txBody>
+          <a:bodyPr rtlCol="0" anchor="ctr"/>
+          <a:lstStyle/>
+          <a:p>
+            <a:pPr algn="ctr"/>
+          </a:p>
+        </p:txBody>
+      </p:sp>
+      <p:sp>
+        <p:nvSpPr>
+          <p:cNvPr id="14" name="TextBox 13"/>
+          <p:cNvSpPr txBox="1"/>
+          <p:nvPr/>
+        </p:nvSpPr>
+        <p:spPr>
+          <a:xfrm>
+            <a:off x="8321040" y="1874519"/>
+            <a:ext cx="3154680" cy="457200"/>
+          </a:xfrm>
+          <a:prstGeom prst="rect">
+            <a:avLst/>
+          </a:prstGeom>
+          <a:noFill/>
+        </p:spPr>
+        <p:txBody>
+          <a:bodyPr wrap="square" lIns="0" rIns="0" tIns="0" bIns="0"/>
+          <a:lstStyle/>
+          <a:p>
+            <a:pPr algn="l">
+              <a:spcBef>
+                <a:spcPts val="0"/>
+              </a:spcBef>
+              <a:spcAft>
+                <a:spcPts val="0"/>
+              </a:spcAft>
+            </a:pPr>
+            <a:r>
+              <a:rPr sz="2200" b="1" i="0">
+                <a:solidFill>
+                  <a:srgbClr val="0F172A"/>
+                </a:solidFill>
+                <a:latin typeface="Calibri"/>
+              </a:rPr>
+              <a:t>GitHub</a:t>
+            </a:r>
+          </a:p>
+        </p:txBody>
+      </p:sp>
+      <p:sp>
+        <p:nvSpPr>
+          <p:cNvPr id="15" name="TextBox 14"/>
+          <p:cNvSpPr txBox="1"/>
+          <p:nvPr/>
+        </p:nvSpPr>
+        <p:spPr>
+          <a:xfrm>
+            <a:off x="8321040" y="2423160"/>
+            <a:ext cx="3154680" cy="822960"/>
+          </a:xfrm>
+          <a:prstGeom prst="rect">
+            <a:avLst/>
+          </a:prstGeom>
+          <a:noFill/>
+        </p:spPr>
+        <p:txBody>
+          <a:bodyPr wrap="square" lIns="0" rIns="0" tIns="0" bIns="0"/>
+          <a:lstStyle/>
+          <a:p>
+            <a:pPr algn="l">
+              <a:spcBef>
+                <a:spcPts val="0"/>
+              </a:spcBef>
+              <a:spcAft>
+                <a:spcPts val="0"/>
+              </a:spcAft>
+            </a:pPr>
+            <a:r>
+              <a:rPr sz="1600" b="0" i="0">
+                <a:solidFill>
+                  <a:srgbClr val="3E4C63"/>
+                </a:solidFill>
+                <a:latin typeface="Calibri"/>
+              </a:rPr>
+              <a:t>The report, the deck, and the code.</a:t>
+            </a:r>
+          </a:p>
+        </p:txBody>
+      </p:sp>
+      <p:sp>
+        <p:nvSpPr>
+          <p:cNvPr id="16" name="TextBox 15"/>
+          <p:cNvSpPr txBox="1"/>
+          <p:nvPr/>
+        </p:nvSpPr>
+        <p:spPr>
+          <a:xfrm>
+            <a:off x="8321040" y="3383280"/>
+            <a:ext cx="3154680" cy="960120"/>
+          </a:xfrm>
+          <a:prstGeom prst="rect">
+            <a:avLst/>
+          </a:prstGeom>
+          <a:noFill/>
+        </p:spPr>
+        <p:txBody>
+          <a:bodyPr wrap="square">
+            <a:spAutoFit/>
+          </a:bodyPr>
+          <a:lstStyle/>
+          <a:p>
+            <a:r>
+              <a:rPr sz="1400" b="1" i="0" u="sng">
+                <a:solidFill>
+                  <a:srgbClr val="0E7490"/>
+                </a:solidFill>
+                <a:latin typeface="Calibri"/>
+                <a:hlinkClick r:id="rId4"/>
+              </a:rPr>
+              <a:t>github.com/Nancy20052020/finsight_off</a:t>
+            </a:r>
+          </a:p>
+        </p:txBody>
+      </p:sp>
+      <p:sp>
+        <p:nvSpPr>
+          <p:cNvPr id="17" name="TextBox 16"/>
+          <p:cNvSpPr txBox="1"/>
+          <p:nvPr/>
+        </p:nvSpPr>
+        <p:spPr>
+          <a:xfrm>
+            <a:off x="502920" y="4937760"/>
+            <a:ext cx="11155680" cy="1097280"/>
+          </a:xfrm>
+          <a:prstGeom prst="rect">
+            <a:avLst/>
+          </a:prstGeom>
+          <a:noFill/>
+        </p:spPr>
+        <p:txBody>
+          <a:bodyPr wrap="square" lIns="0" rIns="0" tIns="0" bIns="0"/>
+          <a:lstStyle/>
+          <a:p>
+            <a:pPr algn="l">
+              <a:spcBef>
+                <a:spcPts val="0"/>
+              </a:spcBef>
+              <a:spcAft>
+                <a:spcPts val="0"/>
+              </a:spcAft>
+            </a:pPr>
+            <a:r>
+              <a:rPr sz="1800" b="0" i="0">
+                <a:solidFill>
+                  <a:srgbClr val="3E4C63"/>
+                </a:solidFill>
+                <a:latin typeface="Calibri"/>
+              </a:rPr>
+              <a:t>Upload needs both files: a bank CSV and an invoice CSV. If one is missing, the page says so. Nothing is stored. The example is synthetic. These are calculations, not a promise.</a:t>
+            </a:r>
+          </a:p>
+        </p:txBody>
+      </p:sp>
+      <p:sp>
+        <p:nvSpPr>
+          <p:cNvPr id="18" name="TextBox 17"/>
+          <p:cNvSpPr txBox="1"/>
+          <p:nvPr/>
+        </p:nvSpPr>
+        <p:spPr>
+          <a:xfrm>
+            <a:off x="502920" y="6446520"/>
+            <a:ext cx="6858000" cy="292608"/>
+          </a:xfrm>
+          <a:prstGeom prst="rect">
+            <a:avLst/>
+          </a:prstGeom>
+          <a:noFill/>
+        </p:spPr>
+        <p:txBody>
+          <a:bodyPr wrap="square" lIns="0" rIns="0" tIns="0" bIns="0"/>
+          <a:lstStyle/>
+          <a:p>
+            <a:pPr algn="l">
+              <a:spcBef>
+                <a:spcPts val="0"/>
+              </a:spcBef>
+              <a:spcAft>
+                <a:spcPts val="0"/>
+              </a:spcAft>
+            </a:pPr>
+            <a:r>
+              <a:rPr sz="1400" b="1" i="0">
+                <a:solidFill>
+                  <a:srgbClr val="3E4C63"/>
+                </a:solidFill>
+                <a:latin typeface="Calibri"/>
+              </a:rPr>
+              <a:t>FinSight AI  ·  Team 65  ·  Manipal University</a:t>
+            </a:r>
+          </a:p>
+        </p:txBody>
+      </p:sp>
+      <p:sp>
+        <p:nvSpPr>
+          <p:cNvPr id="19" name="TextBox 18"/>
+          <p:cNvSpPr txBox="1"/>
+          <p:nvPr/>
+        </p:nvSpPr>
+        <p:spPr>
+          <a:xfrm>
+            <a:off x="7406640" y="6446520"/>
+            <a:ext cx="3108960" cy="292608"/>
+          </a:xfrm>
+          <a:prstGeom prst="rect">
+            <a:avLst/>
+          </a:prstGeom>
+          <a:noFill/>
+        </p:spPr>
+        <p:txBody>
+          <a:bodyPr wrap="none" lIns="0" tIns="0">
+            <a:spAutoFit/>
+          </a:bodyPr>
+          <a:lstStyle/>
+          <a:p>
+            <a:pPr algn="r"/>
+            <a:r>
+              <a:rPr sz="1400" b="1" i="0" u="sng">
+                <a:solidFill>
+                  <a:srgbClr val="0E7490"/>
+                </a:solidFill>
+                <a:latin typeface="Calibri"/>
+                <a:hlinkClick r:id="rId2"/>
+              </a:rPr>
+              <a:t>finsight-off.vercel.app</a:t>
+            </a:r>
+          </a:p>
+        </p:txBody>
+      </p:sp>
+      <p:sp>
+        <p:nvSpPr>
+          <p:cNvPr id="20" name="TextBox 19"/>
+          <p:cNvSpPr txBox="1"/>
+          <p:nvPr/>
+        </p:nvSpPr>
+        <p:spPr>
+          <a:xfrm>
+            <a:off x="10698480" y="6446520"/>
+            <a:ext cx="1005840" cy="292608"/>
+          </a:xfrm>
+          <a:prstGeom prst="rect">
+            <a:avLst/>
+          </a:prstGeom>
+          <a:noFill/>
+        </p:spPr>
+        <p:txBody>
+          <a:bodyPr wrap="square" lIns="0" rIns="0" tIns="0" bIns="0"/>
+          <a:lstStyle/>
+          <a:p>
+            <a:pPr algn="r">
+              <a:spcBef>
+                <a:spcPts val="0"/>
+              </a:spcBef>
+              <a:spcAft>
+                <a:spcPts val="0"/>
+              </a:spcAft>
+            </a:pPr>
+            <a:r>
+              <a:rPr sz="1400" b="1" i="0">
+                <a:solidFill>
+                  <a:srgbClr val="3E4C63"/>
+                </a:solidFill>
+                <a:latin typeface="Calibri"/>
+              </a:rPr>
+              <a:t>8  /  9</a:t>
+            </a:r>
+          </a:p>
+        </p:txBody>
+      </p:sp>
+    </p:spTree>
+  </p:cSld>
+  <p:clrMapOvr>
+    <a:masterClrMapping/>
+  </p:clrMapOvr>
+</p:sld>
+</file>
+
+<file path=ppt/slides/slide9.xml><?xml version="1.0" encoding="utf-8"?>
+<p:sld xmlns:a="http://schemas.openxmlformats.org/drawingml/2006/main" xmlns:p="http://schemas.openxmlformats.org/presentationml/2006/main" xmlns:r="http://schemas.openxmlformats.org/officeDocument/2006/relationships">
+  <p:cSld>
+    <p:spTree>
+      <p:nvGrpSpPr>
+        <p:cNvPr id="1" name=""/>
+        <p:cNvGrpSpPr/>
+        <p:nvPr/>
+      </p:nvGrpSpPr>
+      <p:grpSpPr/>
+      <p:sp>
+        <p:nvSpPr>
+          <p:cNvPr id="2" name="Rectangle 1"/>
+          <p:cNvSpPr/>
+          <p:nvPr/>
+        </p:nvSpPr>
+        <p:spPr>
+          <a:xfrm>
+            <a:off x="0" y="0"/>
+            <a:ext cx="12191695" cy="6858000"/>
+          </a:xfrm>
+          <a:prstGeom prst="rect">
+            <a:avLst/>
+          </a:prstGeom>
+          <a:solidFill>
             <a:srgbClr val="0B1220"/>
           </a:solidFill>
           <a:ln>
@@ -9959,7 +9393,7 @@
         <p:spPr>
           <a:xfrm>
             <a:off x="0" y="0"/>
-            <a:ext cx="109728" cy="6858000"/>
+            <a:ext cx="146304" cy="6858000"/>
           </a:xfrm>
           <a:prstGeom prst="rect">
             <a:avLst/>
@@ -10001,16 +9435,16 @@
         </p:nvSpPr>
         <p:spPr>
           <a:xfrm>
-            <a:off x="640080" y="411480"/>
-            <a:ext cx="7315200" cy="256032"/>
-          </a:xfrm>
-          <a:prstGeom prst="rect">
-            <a:avLst/>
-          </a:prstGeom>
-          <a:noFill/>
-        </p:spPr>
-        <p:txBody>
-          <a:bodyPr wrap="square" lIns="0" rIns="0" tIns="0" bIns="0" anchor="t"/>
+            <a:off x="685800" y="1234440"/>
+            <a:ext cx="10972800" cy="1005840"/>
+          </a:xfrm>
+          <a:prstGeom prst="rect">
+            <a:avLst/>
+          </a:prstGeom>
+          <a:noFill/>
+        </p:spPr>
+        <p:txBody>
+          <a:bodyPr wrap="square" lIns="0" rIns="0" tIns="0" bIns="0"/>
           <a:lstStyle/>
           <a:p>
             <a:pPr algn="l">
@@ -10022,13 +9456,13 @@
               </a:spcAft>
             </a:pPr>
             <a:r>
-              <a:rPr sz="1200" b="1" i="0">
-                <a:solidFill>
-                  <a:srgbClr val="6EE7B7"/>
-                </a:solidFill>
-                <a:latin typeface="Calibri"/>
-              </a:rPr>
-              <a:t>OPEN IT</a:t>
+              <a:rPr sz="6000" b="1" i="0">
+                <a:solidFill>
+                  <a:srgbClr val="FFFFFF"/>
+                </a:solidFill>
+                <a:latin typeface="Calibri"/>
+              </a:rPr>
+              <a:t>Thank you.</a:t>
             </a:r>
           </a:p>
         </p:txBody>
@@ -10041,16 +9475,16 @@
         </p:nvSpPr>
         <p:spPr>
           <a:xfrm>
-            <a:off x="640080" y="777240"/>
-            <a:ext cx="10972800" cy="1097280"/>
-          </a:xfrm>
-          <a:prstGeom prst="rect">
-            <a:avLst/>
-          </a:prstGeom>
-          <a:noFill/>
-        </p:spPr>
-        <p:txBody>
-          <a:bodyPr wrap="square" lIns="0" rIns="0" tIns="0" bIns="0" anchor="t"/>
+            <a:off x="685800" y="2377440"/>
+            <a:ext cx="10058400" cy="548640"/>
+          </a:xfrm>
+          <a:prstGeom prst="rect">
+            <a:avLst/>
+          </a:prstGeom>
+          <a:noFill/>
+        </p:spPr>
+        <p:txBody>
+          <a:bodyPr wrap="square" lIns="0" rIns="0" tIns="0" bIns="0"/>
           <a:lstStyle/>
           <a:p>
             <a:pPr algn="l">
@@ -10062,133 +9496,163 @@
               </a:spcAft>
             </a:pPr>
             <a:r>
-              <a:rPr sz="4000" b="1" i="0">
+              <a:rPr sz="2200" b="0" i="0">
+                <a:solidFill>
+                  <a:srgbClr val="C5D0E0"/>
+                </a:solidFill>
+                <a:latin typeface="Calibri"/>
+              </a:rPr>
+              <a:t>Team 65  ·  Manipal University  ·  Track 3, FinTech AI</a:t>
+            </a:r>
+          </a:p>
+        </p:txBody>
+      </p:sp>
+      <p:sp>
+        <p:nvSpPr>
+          <p:cNvPr id="6" name="TextBox 5"/>
+          <p:cNvSpPr txBox="1"/>
+          <p:nvPr/>
+        </p:nvSpPr>
+        <p:spPr>
+          <a:xfrm>
+            <a:off x="685800" y="3200400"/>
+            <a:ext cx="5486400" cy="457200"/>
+          </a:xfrm>
+          <a:prstGeom prst="rect">
+            <a:avLst/>
+          </a:prstGeom>
+          <a:noFill/>
+        </p:spPr>
+        <p:txBody>
+          <a:bodyPr wrap="square" lIns="0" rIns="0" tIns="0" bIns="0"/>
+          <a:lstStyle/>
+          <a:p>
+            <a:pPr algn="l">
+              <a:spcBef>
+                <a:spcPts val="0"/>
+              </a:spcBef>
+              <a:spcAft>
+                <a:spcPts val="0"/>
+              </a:spcAft>
+            </a:pPr>
+            <a:r>
+              <a:rPr sz="2800" b="1" i="0">
                 <a:solidFill>
                   <a:srgbClr val="FFFFFF"/>
                 </a:solidFill>
                 <a:latin typeface="Calibri"/>
               </a:rPr>
-              <a:t>The demo is already live.</a:t>
-            </a:r>
-          </a:p>
-        </p:txBody>
-      </p:sp>
-      <p:sp>
-        <p:nvSpPr>
-          <p:cNvPr id="6" name="TextBox 5"/>
-          <p:cNvSpPr txBox="1"/>
-          <p:nvPr/>
-        </p:nvSpPr>
-        <p:spPr>
-          <a:xfrm>
-            <a:off x="640080" y="2057400"/>
-            <a:ext cx="10972800" cy="548640"/>
-          </a:xfrm>
-          <a:prstGeom prst="rect">
-            <a:avLst/>
-          </a:prstGeom>
-          <a:noFill/>
-        </p:spPr>
-        <p:txBody>
-          <a:bodyPr wrap="none">
+              <a:t>Amisha Singh</a:t>
+            </a:r>
+          </a:p>
+        </p:txBody>
+      </p:sp>
+      <p:sp>
+        <p:nvSpPr>
+          <p:cNvPr id="7" name="TextBox 6"/>
+          <p:cNvSpPr txBox="1"/>
+          <p:nvPr/>
+        </p:nvSpPr>
+        <p:spPr>
+          <a:xfrm>
+            <a:off x="6217920" y="3200400"/>
+            <a:ext cx="5486400" cy="457200"/>
+          </a:xfrm>
+          <a:prstGeom prst="rect">
+            <a:avLst/>
+          </a:prstGeom>
+          <a:noFill/>
+        </p:spPr>
+        <p:txBody>
+          <a:bodyPr wrap="square" lIns="0" rIns="0" tIns="0" bIns="0"/>
+          <a:lstStyle/>
+          <a:p>
+            <a:pPr algn="l">
+              <a:spcBef>
+                <a:spcPts val="0"/>
+              </a:spcBef>
+              <a:spcAft>
+                <a:spcPts val="0"/>
+              </a:spcAft>
+            </a:pPr>
+            <a:r>
+              <a:rPr sz="2800" b="1" i="0">
+                <a:solidFill>
+                  <a:srgbClr val="FFFFFF"/>
+                </a:solidFill>
+                <a:latin typeface="Calibri"/>
+              </a:rPr>
+              <a:t>Nancy Verma</a:t>
+            </a:r>
+          </a:p>
+        </p:txBody>
+      </p:sp>
+      <p:sp>
+        <p:nvSpPr>
+          <p:cNvPr id="8" name="TextBox 7"/>
+          <p:cNvSpPr txBox="1"/>
+          <p:nvPr/>
+        </p:nvSpPr>
+        <p:spPr>
+          <a:xfrm>
+            <a:off x="685800" y="4297680"/>
+            <a:ext cx="10515600" cy="1188720"/>
+          </a:xfrm>
+          <a:prstGeom prst="rect">
+            <a:avLst/>
+          </a:prstGeom>
+          <a:noFill/>
+        </p:spPr>
+        <p:txBody>
+          <a:bodyPr wrap="square">
             <a:spAutoFit/>
           </a:bodyPr>
           <a:lstStyle/>
           <a:p>
             <a:r>
-              <a:rPr sz="2800" b="1" i="0" u="sng">
+              <a:rPr sz="2000" b="0" i="0">
+                <a:solidFill>
+                  <a:srgbClr val="C5D0E0"/>
+                </a:solidFill>
+                <a:latin typeface="Calibri"/>
+              </a:rPr>
+              <a:t>Live site    </a:t>
+            </a:r>
+            <a:r>
+              <a:rPr sz="2200" b="1" i="0" u="sng">
                 <a:solidFill>
                   <a:srgbClr val="6EE7B7"/>
                 </a:solidFill>
                 <a:latin typeface="Calibri"/>
                 <a:hlinkClick r:id="rId2"/>
               </a:rPr>
-              <a:t>https://finsight-off.vercel.app</a:t>
-            </a:r>
-          </a:p>
-        </p:txBody>
-      </p:sp>
-      <p:sp>
-        <p:nvSpPr>
-          <p:cNvPr id="7" name="Rounded Rectangle 6"/>
-          <p:cNvSpPr/>
-          <p:nvPr/>
-        </p:nvSpPr>
-        <p:spPr>
-          <a:xfrm>
-            <a:off x="640080" y="3017520"/>
-            <a:ext cx="5394960" cy="1965960"/>
-          </a:xfrm>
-          <a:prstGeom prst="roundRect">
-            <a:avLst>
-              <a:gd name="adj" fmla="val 8000"/>
-            </a:avLst>
-          </a:prstGeom>
-          <a:solidFill>
-            <a:srgbClr val="152238"/>
-          </a:solidFill>
-          <a:ln>
-            <a:noFill/>
-          </a:ln>
-        </p:spPr>
-        <p:style>
-          <a:lnRef idx="1">
-            <a:schemeClr val="accent1"/>
-          </a:lnRef>
-          <a:fillRef idx="3">
-            <a:schemeClr val="accent1"/>
-          </a:fillRef>
-          <a:effectRef idx="2">
-            <a:schemeClr val="accent1"/>
-          </a:effectRef>
-          <a:fontRef idx="minor">
-            <a:schemeClr val="lt1"/>
-          </a:fontRef>
-        </p:style>
-        <p:txBody>
-          <a:bodyPr rtlCol="0" anchor="ctr"/>
-          <a:lstStyle/>
-          <a:p>
-            <a:pPr algn="ctr"/>
-          </a:p>
-        </p:txBody>
-      </p:sp>
-      <p:sp>
-        <p:nvSpPr>
-          <p:cNvPr id="8" name="TextBox 7"/>
-          <p:cNvSpPr txBox="1"/>
-          <p:nvPr/>
-        </p:nvSpPr>
-        <p:spPr>
-          <a:xfrm>
-            <a:off x="960120" y="3246120"/>
-            <a:ext cx="4754880" cy="457200"/>
-          </a:xfrm>
-          <a:prstGeom prst="rect">
-            <a:avLst/>
-          </a:prstGeom>
-          <a:noFill/>
-        </p:spPr>
-        <p:txBody>
-          <a:bodyPr wrap="square" lIns="0" rIns="0" tIns="0" bIns="0" anchor="t"/>
-          <a:lstStyle/>
-          <a:p>
-            <a:pPr algn="l">
-              <a:spcBef>
-                <a:spcPts val="0"/>
-              </a:spcBef>
-              <a:spcAft>
-                <a:spcPts val="0"/>
-              </a:spcAft>
-            </a:pPr>
-            <a:r>
-              <a:rPr sz="2400" b="1" i="0">
-                <a:solidFill>
-                  <a:srgbClr val="FFFFFF"/>
-                </a:solidFill>
-                <a:latin typeface="Calibri"/>
-              </a:rPr>
-              <a:t>Try your files</a:t>
+              <a:t>finsight-off.vercel.app</a:t>
+            </a:r>
+          </a:p>
+          <a:p>
+            <a:pPr>
+              <a:spcBef>
+                <a:spcPts val="1000"/>
+              </a:spcBef>
+            </a:pPr>
+            <a:r>
+              <a:rPr sz="2000" b="0" i="0">
+                <a:solidFill>
+                  <a:srgbClr val="C5D0E0"/>
+                </a:solidFill>
+                <a:latin typeface="Calibri"/>
+              </a:rPr>
+              <a:t>GitHub    </a:t>
+            </a:r>
+            <a:r>
+              <a:rPr sz="2200" b="1" i="0" u="sng">
+                <a:solidFill>
+                  <a:srgbClr val="6EE7B7"/>
+                </a:solidFill>
+                <a:latin typeface="Calibri"/>
+                <a:hlinkClick r:id="rId3"/>
+              </a:rPr>
+              <a:t>github.com/Nancy20052020/finsight_off</a:t>
             </a:r>
           </a:p>
         </p:txBody>
@@ -10201,269 +9665,34 @@
         </p:nvSpPr>
         <p:spPr>
           <a:xfrm>
-            <a:off x="960120" y="3794760"/>
-            <a:ext cx="4754880" cy="365760"/>
-          </a:xfrm>
-          <a:prstGeom prst="rect">
-            <a:avLst/>
-          </a:prstGeom>
-          <a:noFill/>
-        </p:spPr>
-        <p:txBody>
-          <a:bodyPr wrap="square" lIns="0" rIns="0" tIns="0" bIns="0" anchor="t"/>
-          <a:lstStyle/>
-          <a:p>
-            <a:pPr algn="l">
-              <a:spcBef>
-                <a:spcPts val="0"/>
-              </a:spcBef>
-              <a:spcAft>
-                <a:spcPts val="0"/>
-              </a:spcAft>
-            </a:pPr>
-            <a:r>
-              <a:rPr sz="1500" b="0" i="0">
-                <a:solidFill>
-                  <a:srgbClr val="C5D0E0"/>
-                </a:solidFill>
-                <a:latin typeface="Calibri"/>
-              </a:rPr>
-              <a:t>Add a bank CSV and an invoice CSV.</a:t>
-            </a:r>
-          </a:p>
-        </p:txBody>
-      </p:sp>
-      <p:sp>
-        <p:nvSpPr>
-          <p:cNvPr id="10" name="TextBox 9"/>
-          <p:cNvSpPr txBox="1"/>
-          <p:nvPr/>
-        </p:nvSpPr>
-        <p:spPr>
-          <a:xfrm>
-            <a:off x="960120" y="4297680"/>
-            <a:ext cx="4754880" cy="365760"/>
-          </a:xfrm>
-          <a:prstGeom prst="rect">
-            <a:avLst/>
-          </a:prstGeom>
-          <a:noFill/>
-        </p:spPr>
-        <p:txBody>
-          <a:bodyPr wrap="none">
-            <a:spAutoFit/>
-          </a:bodyPr>
-          <a:lstStyle/>
-          <a:p>
-            <a:r>
-              <a:rPr sz="1400" b="1" i="0" u="sng">
-                <a:solidFill>
-                  <a:srgbClr val="6EE7B7"/>
-                </a:solidFill>
-                <a:latin typeface="Calibri"/>
-                <a:hlinkClick r:id="rId3"/>
-              </a:rPr>
-              <a:t>finsight-off.vercel.app/try</a:t>
-            </a:r>
-          </a:p>
-        </p:txBody>
-      </p:sp>
-      <p:sp>
-        <p:nvSpPr>
-          <p:cNvPr id="11" name="Rounded Rectangle 10"/>
-          <p:cNvSpPr/>
-          <p:nvPr/>
-        </p:nvSpPr>
-        <p:spPr>
-          <a:xfrm>
-            <a:off x="6309360" y="3017520"/>
-            <a:ext cx="5394960" cy="1965960"/>
-          </a:xfrm>
-          <a:prstGeom prst="roundRect">
-            <a:avLst>
-              <a:gd name="adj" fmla="val 8000"/>
-            </a:avLst>
-          </a:prstGeom>
-          <a:solidFill>
-            <a:srgbClr val="152238"/>
-          </a:solidFill>
-          <a:ln>
-            <a:noFill/>
-          </a:ln>
-        </p:spPr>
-        <p:style>
-          <a:lnRef idx="1">
-            <a:schemeClr val="accent1"/>
-          </a:lnRef>
-          <a:fillRef idx="3">
-            <a:schemeClr val="accent1"/>
-          </a:fillRef>
-          <a:effectRef idx="2">
-            <a:schemeClr val="accent1"/>
-          </a:effectRef>
-          <a:fontRef idx="minor">
-            <a:schemeClr val="lt1"/>
-          </a:fontRef>
-        </p:style>
-        <p:txBody>
-          <a:bodyPr rtlCol="0" anchor="ctr"/>
-          <a:lstStyle/>
-          <a:p>
-            <a:pPr algn="ctr"/>
-          </a:p>
-        </p:txBody>
-      </p:sp>
-      <p:sp>
-        <p:nvSpPr>
-          <p:cNvPr id="12" name="TextBox 11"/>
-          <p:cNvSpPr txBox="1"/>
-          <p:nvPr/>
-        </p:nvSpPr>
-        <p:spPr>
-          <a:xfrm>
-            <a:off x="6629400" y="3246120"/>
-            <a:ext cx="4754880" cy="457200"/>
-          </a:xfrm>
-          <a:prstGeom prst="rect">
-            <a:avLst/>
-          </a:prstGeom>
-          <a:noFill/>
-        </p:spPr>
-        <p:txBody>
-          <a:bodyPr wrap="square" lIns="0" rIns="0" tIns="0" bIns="0" anchor="t"/>
-          <a:lstStyle/>
-          <a:p>
-            <a:pPr algn="l">
-              <a:spcBef>
-                <a:spcPts val="0"/>
-              </a:spcBef>
-              <a:spcAft>
-                <a:spcPts val="0"/>
-              </a:spcAft>
-            </a:pPr>
-            <a:r>
-              <a:rPr sz="2400" b="1" i="0">
-                <a:solidFill>
-                  <a:srgbClr val="FFFFFF"/>
-                </a:solidFill>
-                <a:latin typeface="Calibri"/>
-              </a:rPr>
-              <a:t>See the example</a:t>
-            </a:r>
-          </a:p>
-        </p:txBody>
-      </p:sp>
-      <p:sp>
-        <p:nvSpPr>
-          <p:cNvPr id="13" name="TextBox 12"/>
-          <p:cNvSpPr txBox="1"/>
-          <p:nvPr/>
-        </p:nvSpPr>
-        <p:spPr>
-          <a:xfrm>
-            <a:off x="6629400" y="3794760"/>
-            <a:ext cx="4754880" cy="365760"/>
-          </a:xfrm>
-          <a:prstGeom prst="rect">
-            <a:avLst/>
-          </a:prstGeom>
-          <a:noFill/>
-        </p:spPr>
-        <p:txBody>
-          <a:bodyPr wrap="square" lIns="0" rIns="0" tIns="0" bIns="0" anchor="t"/>
-          <a:lstStyle/>
-          <a:p>
-            <a:pPr algn="l">
-              <a:spcBef>
-                <a:spcPts val="0"/>
-              </a:spcBef>
-              <a:spcAft>
-                <a:spcPts val="0"/>
-              </a:spcAft>
-            </a:pPr>
-            <a:r>
-              <a:rPr sz="1500" b="0" i="0">
-                <a:solidFill>
-                  <a:srgbClr val="C5D0E0"/>
-                </a:solidFill>
-                <a:latin typeface="Calibri"/>
-              </a:rPr>
-              <a:t>Harbor &amp; Co., then open the rows.</a:t>
-            </a:r>
-          </a:p>
-        </p:txBody>
-      </p:sp>
-      <p:sp>
-        <p:nvSpPr>
-          <p:cNvPr id="14" name="TextBox 13"/>
-          <p:cNvSpPr txBox="1"/>
-          <p:nvPr/>
-        </p:nvSpPr>
-        <p:spPr>
-          <a:xfrm>
-            <a:off x="6629400" y="4297680"/>
-            <a:ext cx="4754880" cy="365760"/>
-          </a:xfrm>
-          <a:prstGeom prst="rect">
-            <a:avLst/>
-          </a:prstGeom>
-          <a:noFill/>
-        </p:spPr>
-        <p:txBody>
-          <a:bodyPr wrap="none">
-            <a:spAutoFit/>
-          </a:bodyPr>
-          <a:lstStyle/>
-          <a:p>
-            <a:r>
-              <a:rPr sz="1400" b="1" i="0" u="sng">
-                <a:solidFill>
-                  <a:srgbClr val="6EE7B7"/>
-                </a:solidFill>
-                <a:latin typeface="Calibri"/>
-                <a:hlinkClick r:id="rId4"/>
-              </a:rPr>
-              <a:t>finsight-off.vercel.app/demo</a:t>
-            </a:r>
-          </a:p>
-        </p:txBody>
-      </p:sp>
-      <p:sp>
-        <p:nvSpPr>
-          <p:cNvPr id="15" name="TextBox 14"/>
-          <p:cNvSpPr txBox="1"/>
-          <p:nvPr/>
-        </p:nvSpPr>
-        <p:spPr>
-          <a:xfrm>
-            <a:off x="640080" y="6126480"/>
-            <a:ext cx="10972800" cy="365760"/>
-          </a:xfrm>
-          <a:prstGeom prst="rect">
-            <a:avLst/>
-          </a:prstGeom>
-          <a:noFill/>
-        </p:spPr>
-        <p:txBody>
-          <a:bodyPr wrap="square" lIns="0" rIns="0" tIns="0" bIns="0" anchor="t"/>
-          <a:lstStyle/>
-          <a:p>
-            <a:pPr algn="l">
-              <a:spcBef>
-                <a:spcPts val="0"/>
-              </a:spcBef>
-              <a:spcAft>
-                <a:spcPts val="0"/>
-              </a:spcAft>
-            </a:pPr>
-            <a:r>
-              <a:rPr sz="1400" b="0" i="0">
+            <a:off x="10698480" y="6446520"/>
+            <a:ext cx="1005840" cy="292608"/>
+          </a:xfrm>
+          <a:prstGeom prst="rect">
+            <a:avLst/>
+          </a:prstGeom>
+          <a:noFill/>
+        </p:spPr>
+        <p:txBody>
+          <a:bodyPr wrap="square" lIns="0" rIns="0" tIns="0" bIns="0"/>
+          <a:lstStyle/>
+          <a:p>
+            <a:pPr algn="r">
+              <a:spcBef>
+                <a:spcPts val="0"/>
+              </a:spcBef>
+              <a:spcAft>
+                <a:spcPts val="0"/>
+              </a:spcAft>
+            </a:pPr>
+            <a:r>
+              <a:rPr sz="1400" b="1" i="0">
                 <a:solidFill>
                   <a:srgbClr val="93A0B8"/>
                 </a:solidFill>
                 <a:latin typeface="Calibri"/>
               </a:rPr>
-              <a:t>Calculations under the stated assumptions, not a promise. The example is synthetic.</a:t>
+              <a:t>9  /  9</a:t>
             </a:r>
           </a:p>
         </p:txBody>

--- a/public/FinSight.pptx
+++ b/public/FinSight.pptx
@@ -3186,8 +3186,8 @@
         </p:nvSpPr>
         <p:spPr>
           <a:xfrm>
-            <a:off x="777240" y="438912"/>
-            <a:ext cx="10058400" cy="329184"/>
+            <a:off x="777240" y="347472"/>
+            <a:ext cx="10058400" cy="310896"/>
           </a:xfrm>
           <a:prstGeom prst="rect">
             <a:avLst/>
@@ -3228,8 +3228,8 @@
         </p:nvSpPr>
         <p:spPr>
           <a:xfrm>
-            <a:off x="777240" y="1234440"/>
-            <a:ext cx="10515600" cy="1051560"/>
+            <a:off x="777240" y="777240"/>
+            <a:ext cx="10515600" cy="868680"/>
           </a:xfrm>
           <a:prstGeom prst="rect">
             <a:avLst/>
@@ -3249,7 +3249,7 @@
               </a:spcAft>
             </a:pPr>
             <a:r>
-              <a:rPr sz="6600" b="1" i="0">
+              <a:rPr sz="6000" b="1" i="0">
                 <a:solidFill>
                   <a:srgbClr val="FFFFFF"/>
                 </a:solidFill>
@@ -3270,8 +3270,8 @@
         </p:nvSpPr>
         <p:spPr>
           <a:xfrm>
-            <a:off x="777240" y="2331720"/>
-            <a:ext cx="10058400" cy="548640"/>
+            <a:off x="777240" y="1691640"/>
+            <a:ext cx="10058400" cy="457200"/>
           </a:xfrm>
           <a:prstGeom prst="rect">
             <a:avLst/>
@@ -3291,7 +3291,7 @@
               </a:spcAft>
             </a:pPr>
             <a:r>
-              <a:rPr sz="2800" b="0" i="0">
+              <a:rPr sz="2600" b="0" i="0">
                 <a:solidFill>
                   <a:srgbClr val="E7F3EE"/>
                 </a:solidFill>
@@ -3312,7 +3312,7 @@
         </p:nvSpPr>
         <p:spPr>
           <a:xfrm>
-            <a:off x="777240" y="3108960"/>
+            <a:off x="777240" y="2331720"/>
             <a:ext cx="2194560" cy="54864"/>
           </a:xfrm>
           <a:prstGeom prst="rect">
@@ -3353,8 +3353,8 @@
         </p:nvSpPr>
         <p:spPr>
           <a:xfrm>
-            <a:off x="777240" y="3429000"/>
-            <a:ext cx="5120640" cy="548640"/>
+            <a:off x="777240" y="2606040"/>
+            <a:ext cx="9144000" cy="502920"/>
           </a:xfrm>
           <a:prstGeom prst="rect">
             <a:avLst/>
@@ -3374,7 +3374,7 @@
               </a:spcAft>
             </a:pPr>
             <a:r>
-              <a:rPr sz="3200" b="1" i="0">
+              <a:rPr sz="3000" b="1" i="0">
                 <a:solidFill>
                   <a:srgbClr val="FFFFFF"/>
                 </a:solidFill>
@@ -3382,6 +3382,48 @@
                 <a:cs typeface="Calibri"/>
                 <a:ea typeface="Calibri"/>
               </a:rPr>
+              <a:t>Nancy Verma</a:t>
+            </a:r>
+          </a:p>
+        </p:txBody>
+      </p:sp>
+      <p:sp>
+        <p:nvSpPr>
+          <p:cNvPr id="9" name="TextBox 8"/>
+          <p:cNvSpPr txBox="1"/>
+          <p:nvPr/>
+        </p:nvSpPr>
+        <p:spPr>
+          <a:xfrm>
+            <a:off x="777240" y="3154680"/>
+            <a:ext cx="9144000" cy="502920"/>
+          </a:xfrm>
+          <a:prstGeom prst="rect">
+            <a:avLst/>
+          </a:prstGeom>
+          <a:noFill/>
+        </p:spPr>
+        <p:txBody>
+          <a:bodyPr wrap="square" lIns="0" rIns="0" tIns="0" bIns="0" anchor="t"/>
+          <a:lstStyle/>
+          <a:p>
+            <a:pPr algn="l">
+              <a:spcBef>
+                <a:spcPts val="0"/>
+              </a:spcBef>
+              <a:spcAft>
+                <a:spcPts val="0"/>
+              </a:spcAft>
+            </a:pPr>
+            <a:r>
+              <a:rPr sz="3000" b="1" i="0">
+                <a:solidFill>
+                  <a:srgbClr val="FFFFFF"/>
+                </a:solidFill>
+                <a:latin typeface="Calibri"/>
+                <a:cs typeface="Calibri"/>
+                <a:ea typeface="Calibri"/>
+              </a:rPr>
               <a:t>Amisha Singh</a:t>
             </a:r>
           </a:p>
@@ -3389,14 +3431,14 @@
       </p:sp>
       <p:sp>
         <p:nvSpPr>
-          <p:cNvPr id="9" name="TextBox 8"/>
-          <p:cNvSpPr txBox="1"/>
-          <p:nvPr/>
-        </p:nvSpPr>
-        <p:spPr>
-          <a:xfrm>
-            <a:off x="6126480" y="3429000"/>
-            <a:ext cx="5120640" cy="548640"/>
+          <p:cNvPr id="10" name="TextBox 9"/>
+          <p:cNvSpPr txBox="1"/>
+          <p:nvPr/>
+        </p:nvSpPr>
+        <p:spPr>
+          <a:xfrm>
+            <a:off x="777240" y="3840480"/>
+            <a:ext cx="9144000" cy="384048"/>
           </a:xfrm>
           <a:prstGeom prst="rect">
             <a:avLst/>
@@ -3416,7 +3458,49 @@
               </a:spcAft>
             </a:pPr>
             <a:r>
-              <a:rPr sz="3200" b="1" i="0">
+              <a:rPr sz="2200" b="1" i="0">
+                <a:solidFill>
+                  <a:srgbClr val="C4922A"/>
+                </a:solidFill>
+                <a:latin typeface="Calibri"/>
+                <a:cs typeface="Calibri"/>
+                <a:ea typeface="Calibri"/>
+              </a:rPr>
+              <a:t>Manipal University</a:t>
+            </a:r>
+          </a:p>
+        </p:txBody>
+      </p:sp>
+      <p:sp>
+        <p:nvSpPr>
+          <p:cNvPr id="11" name="TextBox 10"/>
+          <p:cNvSpPr txBox="1"/>
+          <p:nvPr/>
+        </p:nvSpPr>
+        <p:spPr>
+          <a:xfrm>
+            <a:off x="777240" y="4297680"/>
+            <a:ext cx="9144000" cy="365760"/>
+          </a:xfrm>
+          <a:prstGeom prst="rect">
+            <a:avLst/>
+          </a:prstGeom>
+          <a:noFill/>
+        </p:spPr>
+        <p:txBody>
+          <a:bodyPr wrap="square" lIns="0" rIns="0" tIns="0" bIns="0" anchor="t"/>
+          <a:lstStyle/>
+          <a:p>
+            <a:pPr algn="l">
+              <a:spcBef>
+                <a:spcPts val="0"/>
+              </a:spcBef>
+              <a:spcAft>
+                <a:spcPts val="0"/>
+              </a:spcAft>
+            </a:pPr>
+            <a:r>
+              <a:rPr sz="2000" b="1" i="0">
                 <a:solidFill>
                   <a:srgbClr val="FFFFFF"/>
                 </a:solidFill>
@@ -3424,21 +3508,21 @@
                 <a:cs typeface="Calibri"/>
                 <a:ea typeface="Calibri"/>
               </a:rPr>
-              <a:t>Nancy Verma</a:t>
-            </a:r>
-          </a:p>
-        </p:txBody>
-      </p:sp>
-      <p:sp>
-        <p:nvSpPr>
-          <p:cNvPr id="10" name="TextBox 9"/>
-          <p:cNvSpPr txBox="1"/>
-          <p:nvPr/>
-        </p:nvSpPr>
-        <p:spPr>
-          <a:xfrm>
-            <a:off x="777240" y="4069080"/>
-            <a:ext cx="10058400" cy="411480"/>
+              <a:t>Team 65</a:t>
+            </a:r>
+          </a:p>
+        </p:txBody>
+      </p:sp>
+      <p:sp>
+        <p:nvSpPr>
+          <p:cNvPr id="12" name="TextBox 11"/>
+          <p:cNvSpPr txBox="1"/>
+          <p:nvPr/>
+        </p:nvSpPr>
+        <p:spPr>
+          <a:xfrm>
+            <a:off x="777240" y="5349240"/>
+            <a:ext cx="7315200" cy="292608"/>
           </a:xfrm>
           <a:prstGeom prst="rect">
             <a:avLst/>
@@ -3458,90 +3542,6 @@
               </a:spcAft>
             </a:pPr>
             <a:r>
-              <a:rPr sz="2200" b="1" i="0">
-                <a:solidFill>
-                  <a:srgbClr val="C4922A"/>
-                </a:solidFill>
-                <a:latin typeface="Calibri"/>
-                <a:cs typeface="Calibri"/>
-                <a:ea typeface="Calibri"/>
-              </a:rPr>
-              <a:t>Manipal University</a:t>
-            </a:r>
-          </a:p>
-        </p:txBody>
-      </p:sp>
-      <p:sp>
-        <p:nvSpPr>
-          <p:cNvPr id="11" name="TextBox 10"/>
-          <p:cNvSpPr txBox="1"/>
-          <p:nvPr/>
-        </p:nvSpPr>
-        <p:spPr>
-          <a:xfrm>
-            <a:off x="777240" y="4617720"/>
-            <a:ext cx="10058400" cy="365760"/>
-          </a:xfrm>
-          <a:prstGeom prst="rect">
-            <a:avLst/>
-          </a:prstGeom>
-          <a:noFill/>
-        </p:spPr>
-        <p:txBody>
-          <a:bodyPr wrap="square" lIns="0" rIns="0" tIns="0" bIns="0" anchor="t"/>
-          <a:lstStyle/>
-          <a:p>
-            <a:pPr algn="l">
-              <a:spcBef>
-                <a:spcPts val="0"/>
-              </a:spcBef>
-              <a:spcAft>
-                <a:spcPts val="0"/>
-              </a:spcAft>
-            </a:pPr>
-            <a:r>
-              <a:rPr sz="2000" b="1" i="0">
-                <a:solidFill>
-                  <a:srgbClr val="FFFFFF"/>
-                </a:solidFill>
-                <a:latin typeface="Calibri"/>
-                <a:cs typeface="Calibri"/>
-                <a:ea typeface="Calibri"/>
-              </a:rPr>
-              <a:t>Team 65</a:t>
-            </a:r>
-          </a:p>
-        </p:txBody>
-      </p:sp>
-      <p:sp>
-        <p:nvSpPr>
-          <p:cNvPr id="12" name="TextBox 11"/>
-          <p:cNvSpPr txBox="1"/>
-          <p:nvPr/>
-        </p:nvSpPr>
-        <p:spPr>
-          <a:xfrm>
-            <a:off x="777240" y="5623560"/>
-            <a:ext cx="2926080" cy="292608"/>
-          </a:xfrm>
-          <a:prstGeom prst="rect">
-            <a:avLst/>
-          </a:prstGeom>
-          <a:noFill/>
-        </p:spPr>
-        <p:txBody>
-          <a:bodyPr wrap="square" lIns="0" rIns="0" tIns="0" bIns="0" anchor="t"/>
-          <a:lstStyle/>
-          <a:p>
-            <a:pPr algn="l">
-              <a:spcBef>
-                <a:spcPts val="0"/>
-              </a:spcBef>
-              <a:spcAft>
-                <a:spcPts val="0"/>
-              </a:spcAft>
-            </a:pPr>
-            <a:r>
               <a:rPr sz="1500" b="0" i="0">
                 <a:solidFill>
                   <a:srgbClr val="C5D0DC"/>
@@ -3563,7 +3563,7 @@
         </p:nvSpPr>
         <p:spPr>
           <a:xfrm>
-            <a:off x="777240" y="5961888"/>
+            <a:off x="777240" y="5715000"/>
             <a:ext cx="7315200" cy="365760"/>
           </a:xfrm>
           <a:prstGeom prst="rect">
@@ -10118,8 +10118,8 @@
         </p:nvSpPr>
         <p:spPr>
           <a:xfrm>
-            <a:off x="777240" y="1234440"/>
-            <a:ext cx="10515600" cy="1005840"/>
+            <a:off x="777240" y="777240"/>
+            <a:ext cx="10515600" cy="914400"/>
           </a:xfrm>
           <a:prstGeom prst="rect">
             <a:avLst/>
@@ -10139,7 +10139,7 @@
               </a:spcAft>
             </a:pPr>
             <a:r>
-              <a:rPr sz="6400" b="1" i="0">
+              <a:rPr sz="6000" b="1" i="0">
                 <a:solidFill>
                   <a:srgbClr val="FFFFFF"/>
                 </a:solidFill>
@@ -10160,8 +10160,8 @@
         </p:nvSpPr>
         <p:spPr>
           <a:xfrm>
-            <a:off x="777240" y="2423160"/>
-            <a:ext cx="10058400" cy="411480"/>
+            <a:off x="777240" y="1874519"/>
+            <a:ext cx="10058400" cy="384048"/>
           </a:xfrm>
           <a:prstGeom prst="rect">
             <a:avLst/>
@@ -10202,8 +10202,8 @@
         </p:nvSpPr>
         <p:spPr>
           <a:xfrm>
-            <a:off x="777240" y="3246120"/>
-            <a:ext cx="5029200" cy="502920"/>
+            <a:off x="777240" y="2606040"/>
+            <a:ext cx="9144000" cy="502920"/>
           </a:xfrm>
           <a:prstGeom prst="rect">
             <a:avLst/>
@@ -10223,7 +10223,7 @@
               </a:spcAft>
             </a:pPr>
             <a:r>
-              <a:rPr sz="2800" b="1" i="0">
+              <a:rPr sz="3000" b="1" i="0">
                 <a:solidFill>
                   <a:srgbClr val="FFFFFF"/>
                 </a:solidFill>
@@ -10231,6 +10231,48 @@
                 <a:cs typeface="Calibri"/>
                 <a:ea typeface="Calibri"/>
               </a:rPr>
+              <a:t>Nancy Verma</a:t>
+            </a:r>
+          </a:p>
+        </p:txBody>
+      </p:sp>
+      <p:sp>
+        <p:nvSpPr>
+          <p:cNvPr id="7" name="TextBox 6"/>
+          <p:cNvSpPr txBox="1"/>
+          <p:nvPr/>
+        </p:nvSpPr>
+        <p:spPr>
+          <a:xfrm>
+            <a:off x="777240" y="3154680"/>
+            <a:ext cx="9144000" cy="502920"/>
+          </a:xfrm>
+          <a:prstGeom prst="rect">
+            <a:avLst/>
+          </a:prstGeom>
+          <a:noFill/>
+        </p:spPr>
+        <p:txBody>
+          <a:bodyPr wrap="square" lIns="0" rIns="0" tIns="0" bIns="0" anchor="t"/>
+          <a:lstStyle/>
+          <a:p>
+            <a:pPr algn="l">
+              <a:spcBef>
+                <a:spcPts val="0"/>
+              </a:spcBef>
+              <a:spcAft>
+                <a:spcPts val="0"/>
+              </a:spcAft>
+            </a:pPr>
+            <a:r>
+              <a:rPr sz="3000" b="1" i="0">
+                <a:solidFill>
+                  <a:srgbClr val="FFFFFF"/>
+                </a:solidFill>
+                <a:latin typeface="Calibri"/>
+                <a:cs typeface="Calibri"/>
+                <a:ea typeface="Calibri"/>
+              </a:rPr>
               <a:t>Amisha Singh</a:t>
             </a:r>
           </a:p>
@@ -10238,55 +10280,13 @@
       </p:sp>
       <p:sp>
         <p:nvSpPr>
-          <p:cNvPr id="7" name="TextBox 6"/>
-          <p:cNvSpPr txBox="1"/>
-          <p:nvPr/>
-        </p:nvSpPr>
-        <p:spPr>
-          <a:xfrm>
-            <a:off x="6035040" y="3246120"/>
-            <a:ext cx="5029200" cy="502920"/>
-          </a:xfrm>
-          <a:prstGeom prst="rect">
-            <a:avLst/>
-          </a:prstGeom>
-          <a:noFill/>
-        </p:spPr>
-        <p:txBody>
-          <a:bodyPr wrap="square" lIns="0" rIns="0" tIns="0" bIns="0" anchor="t"/>
-          <a:lstStyle/>
-          <a:p>
-            <a:pPr algn="l">
-              <a:spcBef>
-                <a:spcPts val="0"/>
-              </a:spcBef>
-              <a:spcAft>
-                <a:spcPts val="0"/>
-              </a:spcAft>
-            </a:pPr>
-            <a:r>
-              <a:rPr sz="2800" b="1" i="0">
-                <a:solidFill>
-                  <a:srgbClr val="FFFFFF"/>
-                </a:solidFill>
-                <a:latin typeface="Calibri"/>
-                <a:cs typeface="Calibri"/>
-                <a:ea typeface="Calibri"/>
-              </a:rPr>
-              <a:t>Nancy Verma</a:t>
-            </a:r>
-          </a:p>
-        </p:txBody>
-      </p:sp>
-      <p:sp>
-        <p:nvSpPr>
           <p:cNvPr id="8" name="TextBox 7"/>
           <p:cNvSpPr txBox="1"/>
           <p:nvPr/>
         </p:nvSpPr>
         <p:spPr>
           <a:xfrm>
-            <a:off x="777240" y="4434840"/>
+            <a:off x="777240" y="4160520"/>
             <a:ext cx="10058400" cy="365760"/>
           </a:xfrm>
           <a:prstGeom prst="rect">
@@ -10341,7 +10341,7 @@
         </p:nvSpPr>
         <p:spPr>
           <a:xfrm>
-            <a:off x="777240" y="4892040"/>
+            <a:off x="777240" y="4663440"/>
             <a:ext cx="10058400" cy="365760"/>
           </a:xfrm>
           <a:prstGeom prst="rect">

--- a/public/FinSight.pptx
+++ b/public/FinSight.pptx
@@ -3146,7 +3146,48 @@
         <p:spPr>
           <a:xfrm>
             <a:off x="0" y="0"/>
-            <a:ext cx="164592" cy="6858000"/>
+            <a:ext cx="4709160" cy="6858000"/>
+          </a:xfrm>
+          <a:prstGeom prst="rect">
+            <a:avLst/>
+          </a:prstGeom>
+          <a:solidFill>
+            <a:srgbClr val="081428"/>
+          </a:solidFill>
+          <a:ln>
+            <a:noFill/>
+          </a:ln>
+        </p:spPr>
+        <p:style>
+          <a:lnRef idx="1">
+            <a:schemeClr val="accent1"/>
+          </a:lnRef>
+          <a:fillRef idx="3">
+            <a:schemeClr val="accent1"/>
+          </a:fillRef>
+          <a:effectRef idx="2">
+            <a:schemeClr val="accent1"/>
+          </a:effectRef>
+          <a:fontRef idx="minor">
+            <a:schemeClr val="lt1"/>
+          </a:fontRef>
+        </p:style>
+        <p:txBody>
+          <a:bodyPr rtlCol="0" anchor="ctr"/>
+          <a:lstStyle/>
+          <a:p/>
+        </p:txBody>
+      </p:sp>
+      <p:sp>
+        <p:nvSpPr>
+          <p:cNvPr id="4" name="Rectangle 3"/>
+          <p:cNvSpPr/>
+          <p:nvPr/>
+        </p:nvSpPr>
+        <p:spPr>
+          <a:xfrm>
+            <a:off x="4709160" y="0"/>
+            <a:ext cx="73152" cy="6858000"/>
           </a:xfrm>
           <a:prstGeom prst="rect">
             <a:avLst/>
@@ -3180,14 +3221,14 @@
       </p:sp>
       <p:sp>
         <p:nvSpPr>
-          <p:cNvPr id="4" name="TextBox 3"/>
-          <p:cNvSpPr txBox="1"/>
-          <p:nvPr/>
-        </p:nvSpPr>
-        <p:spPr>
-          <a:xfrm>
-            <a:off x="777240" y="347472"/>
-            <a:ext cx="10058400" cy="310896"/>
+          <p:cNvPr id="5" name="TextBox 4"/>
+          <p:cNvSpPr txBox="1"/>
+          <p:nvPr/>
+        </p:nvSpPr>
+        <p:spPr>
+          <a:xfrm>
+            <a:off x="411480" y="1234440"/>
+            <a:ext cx="4023360" cy="640080"/>
           </a:xfrm>
           <a:prstGeom prst="rect">
             <a:avLst/>
@@ -3207,29 +3248,29 @@
               </a:spcAft>
             </a:pPr>
             <a:r>
-              <a:rPr sz="1600" b="1" i="0">
-                <a:solidFill>
-                  <a:srgbClr val="C4922A"/>
-                </a:solidFill>
-                <a:latin typeface="Calibri"/>
-                <a:cs typeface="Calibri"/>
-                <a:ea typeface="Calibri"/>
-              </a:rPr>
-              <a:t>TRACK 3   ·   FINTECH AI   ·   HACKATHON 4.0</a:t>
-            </a:r>
-          </a:p>
-        </p:txBody>
-      </p:sp>
-      <p:sp>
-        <p:nvSpPr>
-          <p:cNvPr id="5" name="TextBox 4"/>
-          <p:cNvSpPr txBox="1"/>
-          <p:nvPr/>
-        </p:nvSpPr>
-        <p:spPr>
-          <a:xfrm>
-            <a:off x="777240" y="777240"/>
-            <a:ext cx="10515600" cy="868680"/>
+              <a:rPr sz="2800" b="1" i="0">
+                <a:solidFill>
+                  <a:srgbClr val="FFFFFF"/>
+                </a:solidFill>
+                <a:latin typeface="Calibri"/>
+                <a:cs typeface="Calibri"/>
+                <a:ea typeface="Calibri"/>
+              </a:rPr>
+              <a:t>Nancy Verma</a:t>
+            </a:r>
+          </a:p>
+        </p:txBody>
+      </p:sp>
+      <p:sp>
+        <p:nvSpPr>
+          <p:cNvPr id="6" name="TextBox 5"/>
+          <p:cNvSpPr txBox="1"/>
+          <p:nvPr/>
+        </p:nvSpPr>
+        <p:spPr>
+          <a:xfrm>
+            <a:off x="411480" y="1965960"/>
+            <a:ext cx="4023360" cy="640080"/>
           </a:xfrm>
           <a:prstGeom prst="rect">
             <a:avLst/>
@@ -3249,7 +3290,7 @@
               </a:spcAft>
             </a:pPr>
             <a:r>
-              <a:rPr sz="6000" b="1" i="0">
+              <a:rPr sz="2800" b="1" i="0">
                 <a:solidFill>
                   <a:srgbClr val="FFFFFF"/>
                 </a:solidFill>
@@ -3257,49 +3298,7 @@
                 <a:cs typeface="Calibri"/>
                 <a:ea typeface="Calibri"/>
               </a:rPr>
-              <a:t>FinSight AI</a:t>
-            </a:r>
-          </a:p>
-        </p:txBody>
-      </p:sp>
-      <p:sp>
-        <p:nvSpPr>
-          <p:cNvPr id="6" name="TextBox 5"/>
-          <p:cNvSpPr txBox="1"/>
-          <p:nvPr/>
-        </p:nvSpPr>
-        <p:spPr>
-          <a:xfrm>
-            <a:off x="777240" y="1691640"/>
-            <a:ext cx="10058400" cy="457200"/>
-          </a:xfrm>
-          <a:prstGeom prst="rect">
-            <a:avLst/>
-          </a:prstGeom>
-          <a:noFill/>
-        </p:spPr>
-        <p:txBody>
-          <a:bodyPr wrap="square" lIns="0" rIns="0" tIns="0" bIns="0" anchor="t"/>
-          <a:lstStyle/>
-          <a:p>
-            <a:pPr algn="l">
-              <a:spcBef>
-                <a:spcPts val="0"/>
-              </a:spcBef>
-              <a:spcAft>
-                <a:spcPts val="0"/>
-              </a:spcAft>
-            </a:pPr>
-            <a:r>
-              <a:rPr sz="2600" b="0" i="0">
-                <a:solidFill>
-                  <a:srgbClr val="E7F3EE"/>
-                </a:solidFill>
-                <a:latin typeface="Calibri"/>
-                <a:cs typeface="Calibri"/>
-                <a:ea typeface="Calibri"/>
-              </a:rPr>
-              <a:t>Will you run out of cash before payday?</a:t>
+              <a:t>Amisha Singh</a:t>
             </a:r>
           </a:p>
         </p:txBody>
@@ -3312,8 +3311,8 @@
         </p:nvSpPr>
         <p:spPr>
           <a:xfrm>
-            <a:off x="777240" y="2331720"/>
-            <a:ext cx="2194560" cy="54864"/>
+            <a:off x="411480" y="2788920"/>
+            <a:ext cx="1463040" cy="54864"/>
           </a:xfrm>
           <a:prstGeom prst="rect">
             <a:avLst/>
@@ -3353,8 +3352,8 @@
         </p:nvSpPr>
         <p:spPr>
           <a:xfrm>
-            <a:off x="777240" y="2606040"/>
-            <a:ext cx="9144000" cy="502920"/>
+            <a:off x="411480" y="3017520"/>
+            <a:ext cx="4023360" cy="411480"/>
           </a:xfrm>
           <a:prstGeom prst="rect">
             <a:avLst/>
@@ -3374,7 +3373,49 @@
               </a:spcAft>
             </a:pPr>
             <a:r>
-              <a:rPr sz="3000" b="1" i="0">
+              <a:rPr sz="1800" b="1" i="0">
+                <a:solidFill>
+                  <a:srgbClr val="C4922A"/>
+                </a:solidFill>
+                <a:latin typeface="Calibri"/>
+                <a:cs typeface="Calibri"/>
+                <a:ea typeface="Calibri"/>
+              </a:rPr>
+              <a:t>Manipal University</a:t>
+            </a:r>
+          </a:p>
+        </p:txBody>
+      </p:sp>
+      <p:sp>
+        <p:nvSpPr>
+          <p:cNvPr id="9" name="TextBox 8"/>
+          <p:cNvSpPr txBox="1"/>
+          <p:nvPr/>
+        </p:nvSpPr>
+        <p:spPr>
+          <a:xfrm>
+            <a:off x="411480" y="3520440"/>
+            <a:ext cx="4023360" cy="365760"/>
+          </a:xfrm>
+          <a:prstGeom prst="rect">
+            <a:avLst/>
+          </a:prstGeom>
+          <a:noFill/>
+        </p:spPr>
+        <p:txBody>
+          <a:bodyPr wrap="square" lIns="0" rIns="0" tIns="0" bIns="0" anchor="t"/>
+          <a:lstStyle/>
+          <a:p>
+            <a:pPr algn="l">
+              <a:spcBef>
+                <a:spcPts val="0"/>
+              </a:spcBef>
+              <a:spcAft>
+                <a:spcPts val="0"/>
+              </a:spcAft>
+            </a:pPr>
+            <a:r>
+              <a:rPr sz="1800" b="1" i="0">
                 <a:solidFill>
                   <a:srgbClr val="FFFFFF"/>
                 </a:solidFill>
@@ -3382,21 +3423,21 @@
                 <a:cs typeface="Calibri"/>
                 <a:ea typeface="Calibri"/>
               </a:rPr>
-              <a:t>Nancy Verma</a:t>
-            </a:r>
-          </a:p>
-        </p:txBody>
-      </p:sp>
-      <p:sp>
-        <p:nvSpPr>
-          <p:cNvPr id="9" name="TextBox 8"/>
-          <p:cNvSpPr txBox="1"/>
-          <p:nvPr/>
-        </p:nvSpPr>
-        <p:spPr>
-          <a:xfrm>
-            <a:off x="777240" y="3154680"/>
-            <a:ext cx="9144000" cy="502920"/>
+              <a:t>Team 65</a:t>
+            </a:r>
+          </a:p>
+        </p:txBody>
+      </p:sp>
+      <p:sp>
+        <p:nvSpPr>
+          <p:cNvPr id="10" name="TextBox 9"/>
+          <p:cNvSpPr txBox="1"/>
+          <p:nvPr/>
+        </p:nvSpPr>
+        <p:spPr>
+          <a:xfrm>
+            <a:off x="411480" y="3931920"/>
+            <a:ext cx="4023360" cy="365760"/>
           </a:xfrm>
           <a:prstGeom prst="rect">
             <a:avLst/>
@@ -3416,7 +3457,91 @@
               </a:spcAft>
             </a:pPr>
             <a:r>
-              <a:rPr sz="3000" b="1" i="0">
+              <a:rPr sz="1600" b="0" i="0">
+                <a:solidFill>
+                  <a:srgbClr val="C5D0DC"/>
+                </a:solidFill>
+                <a:latin typeface="Calibri"/>
+                <a:cs typeface="Calibri"/>
+                <a:ea typeface="Calibri"/>
+              </a:rPr>
+              <a:t>Hackathon 4.0</a:t>
+            </a:r>
+          </a:p>
+        </p:txBody>
+      </p:sp>
+      <p:sp>
+        <p:nvSpPr>
+          <p:cNvPr id="11" name="TextBox 10"/>
+          <p:cNvSpPr txBox="1"/>
+          <p:nvPr/>
+        </p:nvSpPr>
+        <p:spPr>
+          <a:xfrm>
+            <a:off x="5120640" y="1417320"/>
+            <a:ext cx="6583680" cy="329184"/>
+          </a:xfrm>
+          <a:prstGeom prst="rect">
+            <a:avLst/>
+          </a:prstGeom>
+          <a:noFill/>
+        </p:spPr>
+        <p:txBody>
+          <a:bodyPr wrap="square" lIns="0" rIns="0" tIns="0" bIns="0" anchor="t"/>
+          <a:lstStyle/>
+          <a:p>
+            <a:pPr algn="l">
+              <a:spcBef>
+                <a:spcPts val="0"/>
+              </a:spcBef>
+              <a:spcAft>
+                <a:spcPts val="0"/>
+              </a:spcAft>
+            </a:pPr>
+            <a:r>
+              <a:rPr sz="1600" b="1" i="0">
+                <a:solidFill>
+                  <a:srgbClr val="C4922A"/>
+                </a:solidFill>
+                <a:latin typeface="Calibri"/>
+                <a:cs typeface="Calibri"/>
+                <a:ea typeface="Calibri"/>
+              </a:rPr>
+              <a:t>TRACK 3   ·   FINTECH AI</a:t>
+            </a:r>
+          </a:p>
+        </p:txBody>
+      </p:sp>
+      <p:sp>
+        <p:nvSpPr>
+          <p:cNvPr id="12" name="TextBox 11"/>
+          <p:cNvSpPr txBox="1"/>
+          <p:nvPr/>
+        </p:nvSpPr>
+        <p:spPr>
+          <a:xfrm>
+            <a:off x="5120640" y="1965960"/>
+            <a:ext cx="6583680" cy="1051560"/>
+          </a:xfrm>
+          <a:prstGeom prst="rect">
+            <a:avLst/>
+          </a:prstGeom>
+          <a:noFill/>
+        </p:spPr>
+        <p:txBody>
+          <a:bodyPr wrap="square" lIns="0" rIns="0" tIns="0" bIns="0" anchor="t"/>
+          <a:lstStyle/>
+          <a:p>
+            <a:pPr algn="l">
+              <a:spcBef>
+                <a:spcPts val="0"/>
+              </a:spcBef>
+              <a:spcAft>
+                <a:spcPts val="0"/>
+              </a:spcAft>
+            </a:pPr>
+            <a:r>
+              <a:rPr sz="4800" b="1" i="0">
                 <a:solidFill>
                   <a:srgbClr val="FFFFFF"/>
                 </a:solidFill>
@@ -3424,21 +3549,21 @@
                 <a:cs typeface="Calibri"/>
                 <a:ea typeface="Calibri"/>
               </a:rPr>
-              <a:t>Amisha Singh</a:t>
-            </a:r>
-          </a:p>
-        </p:txBody>
-      </p:sp>
-      <p:sp>
-        <p:nvSpPr>
-          <p:cNvPr id="10" name="TextBox 9"/>
-          <p:cNvSpPr txBox="1"/>
-          <p:nvPr/>
-        </p:nvSpPr>
-        <p:spPr>
-          <a:xfrm>
-            <a:off x="777240" y="3840480"/>
-            <a:ext cx="9144000" cy="384048"/>
+              <a:t>FinSight AI</a:t>
+            </a:r>
+          </a:p>
+        </p:txBody>
+      </p:sp>
+      <p:sp>
+        <p:nvSpPr>
+          <p:cNvPr id="13" name="TextBox 12"/>
+          <p:cNvSpPr txBox="1"/>
+          <p:nvPr/>
+        </p:nvSpPr>
+        <p:spPr>
+          <a:xfrm>
+            <a:off x="5120640" y="3154680"/>
+            <a:ext cx="6583680" cy="1005840"/>
           </a:xfrm>
           <a:prstGeom prst="rect">
             <a:avLst/>
@@ -3458,29 +3583,29 @@
               </a:spcAft>
             </a:pPr>
             <a:r>
-              <a:rPr sz="2200" b="1" i="0">
-                <a:solidFill>
-                  <a:srgbClr val="C4922A"/>
-                </a:solidFill>
-                <a:latin typeface="Calibri"/>
-                <a:cs typeface="Calibri"/>
-                <a:ea typeface="Calibri"/>
-              </a:rPr>
-              <a:t>Manipal University</a:t>
-            </a:r>
-          </a:p>
-        </p:txBody>
-      </p:sp>
-      <p:sp>
-        <p:nvSpPr>
-          <p:cNvPr id="11" name="TextBox 10"/>
-          <p:cNvSpPr txBox="1"/>
-          <p:nvPr/>
-        </p:nvSpPr>
-        <p:spPr>
-          <a:xfrm>
-            <a:off x="777240" y="4297680"/>
-            <a:ext cx="9144000" cy="365760"/>
+              <a:rPr sz="2600" b="0" i="0">
+                <a:solidFill>
+                  <a:srgbClr val="E7F3EE"/>
+                </a:solidFill>
+                <a:latin typeface="Calibri"/>
+                <a:cs typeface="Calibri"/>
+                <a:ea typeface="Calibri"/>
+              </a:rPr>
+              <a:t>Will you run out of cash before payday?</a:t>
+            </a:r>
+          </a:p>
+        </p:txBody>
+      </p:sp>
+      <p:sp>
+        <p:nvSpPr>
+          <p:cNvPr id="14" name="TextBox 13"/>
+          <p:cNvSpPr txBox="1"/>
+          <p:nvPr/>
+        </p:nvSpPr>
+        <p:spPr>
+          <a:xfrm>
+            <a:off x="5120640" y="4892040"/>
+            <a:ext cx="6583680" cy="292608"/>
           </a:xfrm>
           <a:prstGeom prst="rect">
             <a:avLst/>
@@ -3500,29 +3625,29 @@
               </a:spcAft>
             </a:pPr>
             <a:r>
-              <a:rPr sz="2000" b="1" i="0">
-                <a:solidFill>
-                  <a:srgbClr val="FFFFFF"/>
-                </a:solidFill>
-                <a:latin typeface="Calibri"/>
-                <a:cs typeface="Calibri"/>
-                <a:ea typeface="Calibri"/>
-              </a:rPr>
-              <a:t>Team 65</a:t>
-            </a:r>
-          </a:p>
-        </p:txBody>
-      </p:sp>
-      <p:sp>
-        <p:nvSpPr>
-          <p:cNvPr id="12" name="TextBox 11"/>
-          <p:cNvSpPr txBox="1"/>
-          <p:nvPr/>
-        </p:nvSpPr>
-        <p:spPr>
-          <a:xfrm>
-            <a:off x="777240" y="5349240"/>
-            <a:ext cx="7315200" cy="292608"/>
+              <a:rPr sz="1600" b="0" i="0">
+                <a:solidFill>
+                  <a:srgbClr val="C5D0DC"/>
+                </a:solidFill>
+                <a:latin typeface="Calibri"/>
+                <a:cs typeface="Calibri"/>
+                <a:ea typeface="Calibri"/>
+              </a:rPr>
+              <a:t>Live site</a:t>
+            </a:r>
+          </a:p>
+        </p:txBody>
+      </p:sp>
+      <p:sp>
+        <p:nvSpPr>
+          <p:cNvPr id="15" name="TextBox 14"/>
+          <p:cNvSpPr txBox="1"/>
+          <p:nvPr/>
+        </p:nvSpPr>
+        <p:spPr>
+          <a:xfrm>
+            <a:off x="5120640" y="5230368"/>
+            <a:ext cx="6583680" cy="365760"/>
           </a:xfrm>
           <a:prstGeom prst="rect">
             <a:avLst/>
@@ -3541,59 +3666,6 @@
                 <a:spcPts val="0"/>
               </a:spcAft>
             </a:pPr>
-            <a:r>
-              <a:rPr sz="1500" b="0" i="0">
-                <a:solidFill>
-                  <a:srgbClr val="C5D0DC"/>
-                </a:solidFill>
-                <a:latin typeface="Calibri"/>
-                <a:cs typeface="Calibri"/>
-                <a:ea typeface="Calibri"/>
-              </a:rPr>
-              <a:t>Report figures are Harbor &amp; Co.</a:t>
-            </a:r>
-          </a:p>
-        </p:txBody>
-      </p:sp>
-      <p:sp>
-        <p:nvSpPr>
-          <p:cNvPr id="13" name="TextBox 12"/>
-          <p:cNvSpPr txBox="1"/>
-          <p:nvPr/>
-        </p:nvSpPr>
-        <p:spPr>
-          <a:xfrm>
-            <a:off x="777240" y="5715000"/>
-            <a:ext cx="7315200" cy="365760"/>
-          </a:xfrm>
-          <a:prstGeom prst="rect">
-            <a:avLst/>
-          </a:prstGeom>
-          <a:noFill/>
-        </p:spPr>
-        <p:txBody>
-          <a:bodyPr wrap="square" lIns="0" rIns="0" tIns="0" bIns="0" anchor="t"/>
-          <a:lstStyle/>
-          <a:p>
-            <a:pPr algn="l">
-              <a:spcBef>
-                <a:spcPts val="0"/>
-              </a:spcBef>
-              <a:spcAft>
-                <a:spcPts val="0"/>
-              </a:spcAft>
-            </a:pPr>
-            <a:r>
-              <a:rPr sz="1800" b="0" i="0">
-                <a:solidFill>
-                  <a:srgbClr val="C5D0DC"/>
-                </a:solidFill>
-                <a:latin typeface="Calibri"/>
-                <a:cs typeface="Calibri"/>
-                <a:ea typeface="Calibri"/>
-              </a:rPr>
-              <a:t>Live site    </a:t>
-            </a:r>
             <a:r>
               <a:rPr sz="1800" b="1" i="0">
                 <a:solidFill>
@@ -10078,7 +10150,48 @@
         <p:spPr>
           <a:xfrm>
             <a:off x="0" y="0"/>
-            <a:ext cx="164592" cy="6858000"/>
+            <a:ext cx="4709160" cy="6858000"/>
+          </a:xfrm>
+          <a:prstGeom prst="rect">
+            <a:avLst/>
+          </a:prstGeom>
+          <a:solidFill>
+            <a:srgbClr val="081428"/>
+          </a:solidFill>
+          <a:ln>
+            <a:noFill/>
+          </a:ln>
+        </p:spPr>
+        <p:style>
+          <a:lnRef idx="1">
+            <a:schemeClr val="accent1"/>
+          </a:lnRef>
+          <a:fillRef idx="3">
+            <a:schemeClr val="accent1"/>
+          </a:fillRef>
+          <a:effectRef idx="2">
+            <a:schemeClr val="accent1"/>
+          </a:effectRef>
+          <a:fontRef idx="minor">
+            <a:schemeClr val="lt1"/>
+          </a:fontRef>
+        </p:style>
+        <p:txBody>
+          <a:bodyPr rtlCol="0" anchor="ctr"/>
+          <a:lstStyle/>
+          <a:p/>
+        </p:txBody>
+      </p:sp>
+      <p:sp>
+        <p:nvSpPr>
+          <p:cNvPr id="4" name="Rectangle 3"/>
+          <p:cNvSpPr/>
+          <p:nvPr/>
+        </p:nvSpPr>
+        <p:spPr>
+          <a:xfrm>
+            <a:off x="4709160" y="0"/>
+            <a:ext cx="73152" cy="6858000"/>
           </a:xfrm>
           <a:prstGeom prst="rect">
             <a:avLst/>
@@ -10112,14 +10225,14 @@
       </p:sp>
       <p:sp>
         <p:nvSpPr>
-          <p:cNvPr id="4" name="TextBox 3"/>
-          <p:cNvSpPr txBox="1"/>
-          <p:nvPr/>
-        </p:nvSpPr>
-        <p:spPr>
-          <a:xfrm>
-            <a:off x="777240" y="777240"/>
-            <a:ext cx="10515600" cy="914400"/>
+          <p:cNvPr id="5" name="TextBox 4"/>
+          <p:cNvSpPr txBox="1"/>
+          <p:nvPr/>
+        </p:nvSpPr>
+        <p:spPr>
+          <a:xfrm>
+            <a:off x="411480" y="1554480"/>
+            <a:ext cx="4023360" cy="640080"/>
           </a:xfrm>
           <a:prstGeom prst="rect">
             <a:avLst/>
@@ -10139,7 +10252,7 @@
               </a:spcAft>
             </a:pPr>
             <a:r>
-              <a:rPr sz="6000" b="1" i="0">
+              <a:rPr sz="2800" b="1" i="0">
                 <a:solidFill>
                   <a:srgbClr val="FFFFFF"/>
                 </a:solidFill>
@@ -10147,6 +10260,257 @@
                 <a:cs typeface="Calibri"/>
                 <a:ea typeface="Calibri"/>
               </a:rPr>
+              <a:t>Nancy Verma</a:t>
+            </a:r>
+          </a:p>
+        </p:txBody>
+      </p:sp>
+      <p:sp>
+        <p:nvSpPr>
+          <p:cNvPr id="6" name="TextBox 5"/>
+          <p:cNvSpPr txBox="1"/>
+          <p:nvPr/>
+        </p:nvSpPr>
+        <p:spPr>
+          <a:xfrm>
+            <a:off x="411480" y="2286000"/>
+            <a:ext cx="4023360" cy="640080"/>
+          </a:xfrm>
+          <a:prstGeom prst="rect">
+            <a:avLst/>
+          </a:prstGeom>
+          <a:noFill/>
+        </p:spPr>
+        <p:txBody>
+          <a:bodyPr wrap="square" lIns="0" rIns="0" tIns="0" bIns="0" anchor="t"/>
+          <a:lstStyle/>
+          <a:p>
+            <a:pPr algn="l">
+              <a:spcBef>
+                <a:spcPts val="0"/>
+              </a:spcBef>
+              <a:spcAft>
+                <a:spcPts val="0"/>
+              </a:spcAft>
+            </a:pPr>
+            <a:r>
+              <a:rPr sz="2800" b="1" i="0">
+                <a:solidFill>
+                  <a:srgbClr val="FFFFFF"/>
+                </a:solidFill>
+                <a:latin typeface="Calibri"/>
+                <a:cs typeface="Calibri"/>
+                <a:ea typeface="Calibri"/>
+              </a:rPr>
+              <a:t>Amisha Singh</a:t>
+            </a:r>
+          </a:p>
+        </p:txBody>
+      </p:sp>
+      <p:sp>
+        <p:nvSpPr>
+          <p:cNvPr id="7" name="Rectangle 6"/>
+          <p:cNvSpPr/>
+          <p:nvPr/>
+        </p:nvSpPr>
+        <p:spPr>
+          <a:xfrm>
+            <a:off x="411480" y="3108960"/>
+            <a:ext cx="1463040" cy="54864"/>
+          </a:xfrm>
+          <a:prstGeom prst="rect">
+            <a:avLst/>
+          </a:prstGeom>
+          <a:solidFill>
+            <a:srgbClr val="C4922A"/>
+          </a:solidFill>
+          <a:ln>
+            <a:noFill/>
+          </a:ln>
+        </p:spPr>
+        <p:style>
+          <a:lnRef idx="1">
+            <a:schemeClr val="accent1"/>
+          </a:lnRef>
+          <a:fillRef idx="3">
+            <a:schemeClr val="accent1"/>
+          </a:fillRef>
+          <a:effectRef idx="2">
+            <a:schemeClr val="accent1"/>
+          </a:effectRef>
+          <a:fontRef idx="minor">
+            <a:schemeClr val="lt1"/>
+          </a:fontRef>
+        </p:style>
+        <p:txBody>
+          <a:bodyPr rtlCol="0" anchor="ctr"/>
+          <a:lstStyle/>
+          <a:p/>
+        </p:txBody>
+      </p:sp>
+      <p:sp>
+        <p:nvSpPr>
+          <p:cNvPr id="8" name="TextBox 7"/>
+          <p:cNvSpPr txBox="1"/>
+          <p:nvPr/>
+        </p:nvSpPr>
+        <p:spPr>
+          <a:xfrm>
+            <a:off x="411480" y="3337560"/>
+            <a:ext cx="4023360" cy="411480"/>
+          </a:xfrm>
+          <a:prstGeom prst="rect">
+            <a:avLst/>
+          </a:prstGeom>
+          <a:noFill/>
+        </p:spPr>
+        <p:txBody>
+          <a:bodyPr wrap="square" lIns="0" rIns="0" tIns="0" bIns="0" anchor="t"/>
+          <a:lstStyle/>
+          <a:p>
+            <a:pPr algn="l">
+              <a:spcBef>
+                <a:spcPts val="0"/>
+              </a:spcBef>
+              <a:spcAft>
+                <a:spcPts val="0"/>
+              </a:spcAft>
+            </a:pPr>
+            <a:r>
+              <a:rPr sz="1800" b="1" i="0">
+                <a:solidFill>
+                  <a:srgbClr val="C4922A"/>
+                </a:solidFill>
+                <a:latin typeface="Calibri"/>
+                <a:cs typeface="Calibri"/>
+                <a:ea typeface="Calibri"/>
+              </a:rPr>
+              <a:t>Manipal University</a:t>
+            </a:r>
+          </a:p>
+        </p:txBody>
+      </p:sp>
+      <p:sp>
+        <p:nvSpPr>
+          <p:cNvPr id="9" name="TextBox 8"/>
+          <p:cNvSpPr txBox="1"/>
+          <p:nvPr/>
+        </p:nvSpPr>
+        <p:spPr>
+          <a:xfrm>
+            <a:off x="411480" y="3840480"/>
+            <a:ext cx="4023360" cy="365760"/>
+          </a:xfrm>
+          <a:prstGeom prst="rect">
+            <a:avLst/>
+          </a:prstGeom>
+          <a:noFill/>
+        </p:spPr>
+        <p:txBody>
+          <a:bodyPr wrap="square" lIns="0" rIns="0" tIns="0" bIns="0" anchor="t"/>
+          <a:lstStyle/>
+          <a:p>
+            <a:pPr algn="l">
+              <a:spcBef>
+                <a:spcPts val="0"/>
+              </a:spcBef>
+              <a:spcAft>
+                <a:spcPts val="0"/>
+              </a:spcAft>
+            </a:pPr>
+            <a:r>
+              <a:rPr sz="1800" b="1" i="0">
+                <a:solidFill>
+                  <a:srgbClr val="FFFFFF"/>
+                </a:solidFill>
+                <a:latin typeface="Calibri"/>
+                <a:cs typeface="Calibri"/>
+                <a:ea typeface="Calibri"/>
+              </a:rPr>
+              <a:t>Team 65</a:t>
+            </a:r>
+          </a:p>
+        </p:txBody>
+      </p:sp>
+      <p:sp>
+        <p:nvSpPr>
+          <p:cNvPr id="10" name="TextBox 9"/>
+          <p:cNvSpPr txBox="1"/>
+          <p:nvPr/>
+        </p:nvSpPr>
+        <p:spPr>
+          <a:xfrm>
+            <a:off x="411480" y="4251960"/>
+            <a:ext cx="4023360" cy="365760"/>
+          </a:xfrm>
+          <a:prstGeom prst="rect">
+            <a:avLst/>
+          </a:prstGeom>
+          <a:noFill/>
+        </p:spPr>
+        <p:txBody>
+          <a:bodyPr wrap="square" lIns="0" rIns="0" tIns="0" bIns="0" anchor="t"/>
+          <a:lstStyle/>
+          <a:p>
+            <a:pPr algn="l">
+              <a:spcBef>
+                <a:spcPts val="0"/>
+              </a:spcBef>
+              <a:spcAft>
+                <a:spcPts val="0"/>
+              </a:spcAft>
+            </a:pPr>
+            <a:r>
+              <a:rPr sz="1600" b="0" i="0">
+                <a:solidFill>
+                  <a:srgbClr val="C5D0DC"/>
+                </a:solidFill>
+                <a:latin typeface="Calibri"/>
+                <a:cs typeface="Calibri"/>
+                <a:ea typeface="Calibri"/>
+              </a:rPr>
+              <a:t>Track 3, FinTech AI</a:t>
+            </a:r>
+          </a:p>
+        </p:txBody>
+      </p:sp>
+      <p:sp>
+        <p:nvSpPr>
+          <p:cNvPr id="11" name="TextBox 10"/>
+          <p:cNvSpPr txBox="1"/>
+          <p:nvPr/>
+        </p:nvSpPr>
+        <p:spPr>
+          <a:xfrm>
+            <a:off x="5120640" y="1965960"/>
+            <a:ext cx="6583680" cy="1051560"/>
+          </a:xfrm>
+          <a:prstGeom prst="rect">
+            <a:avLst/>
+          </a:prstGeom>
+          <a:noFill/>
+        </p:spPr>
+        <p:txBody>
+          <a:bodyPr wrap="square" lIns="0" rIns="0" tIns="0" bIns="0" anchor="t"/>
+          <a:lstStyle/>
+          <a:p>
+            <a:pPr algn="l">
+              <a:spcBef>
+                <a:spcPts val="0"/>
+              </a:spcBef>
+              <a:spcAft>
+                <a:spcPts val="0"/>
+              </a:spcAft>
+            </a:pPr>
+            <a:r>
+              <a:rPr sz="5400" b="1" i="0">
+                <a:solidFill>
+                  <a:srgbClr val="FFFFFF"/>
+                </a:solidFill>
+                <a:latin typeface="Calibri"/>
+                <a:cs typeface="Calibri"/>
+                <a:ea typeface="Calibri"/>
+              </a:rPr>
               <a:t>Thank you.</a:t>
             </a:r>
           </a:p>
@@ -10154,14 +10518,14 @@
       </p:sp>
       <p:sp>
         <p:nvSpPr>
-          <p:cNvPr id="5" name="TextBox 4"/>
-          <p:cNvSpPr txBox="1"/>
-          <p:nvPr/>
-        </p:nvSpPr>
-        <p:spPr>
-          <a:xfrm>
-            <a:off x="777240" y="1874519"/>
-            <a:ext cx="10058400" cy="384048"/>
+          <p:cNvPr id="12" name="TextBox 11"/>
+          <p:cNvSpPr txBox="1"/>
+          <p:nvPr/>
+        </p:nvSpPr>
+        <p:spPr>
+          <a:xfrm>
+            <a:off x="5120640" y="3291840"/>
+            <a:ext cx="6583680" cy="292608"/>
           </a:xfrm>
           <a:prstGeom prst="rect">
             <a:avLst/>
@@ -10181,29 +10545,29 @@
               </a:spcAft>
             </a:pPr>
             <a:r>
-              <a:rPr sz="2000" b="1" i="0">
-                <a:solidFill>
-                  <a:srgbClr val="C4922A"/>
-                </a:solidFill>
-                <a:latin typeface="Calibri"/>
-                <a:cs typeface="Calibri"/>
-                <a:ea typeface="Calibri"/>
-              </a:rPr>
-              <a:t>Team 65    ·    Manipal University    ·    Track 3, FinTech AI</a:t>
-            </a:r>
-          </a:p>
-        </p:txBody>
-      </p:sp>
-      <p:sp>
-        <p:nvSpPr>
-          <p:cNvPr id="6" name="TextBox 5"/>
-          <p:cNvSpPr txBox="1"/>
-          <p:nvPr/>
-        </p:nvSpPr>
-        <p:spPr>
-          <a:xfrm>
-            <a:off x="777240" y="2606040"/>
-            <a:ext cx="9144000" cy="502920"/>
+              <a:rPr sz="1600" b="0" i="0">
+                <a:solidFill>
+                  <a:srgbClr val="C5D0DC"/>
+                </a:solidFill>
+                <a:latin typeface="Calibri"/>
+                <a:cs typeface="Calibri"/>
+                <a:ea typeface="Calibri"/>
+              </a:rPr>
+              <a:t>Live site</a:t>
+            </a:r>
+          </a:p>
+        </p:txBody>
+      </p:sp>
+      <p:sp>
+        <p:nvSpPr>
+          <p:cNvPr id="13" name="TextBox 12"/>
+          <p:cNvSpPr txBox="1"/>
+          <p:nvPr/>
+        </p:nvSpPr>
+        <p:spPr>
+          <a:xfrm>
+            <a:off x="5120640" y="3611880"/>
+            <a:ext cx="6583680" cy="365760"/>
           </a:xfrm>
           <a:prstGeom prst="rect">
             <a:avLst/>
@@ -10222,101 +10586,6 @@
                 <a:spcPts val="0"/>
               </a:spcAft>
             </a:pPr>
-            <a:r>
-              <a:rPr sz="3000" b="1" i="0">
-                <a:solidFill>
-                  <a:srgbClr val="FFFFFF"/>
-                </a:solidFill>
-                <a:latin typeface="Calibri"/>
-                <a:cs typeface="Calibri"/>
-                <a:ea typeface="Calibri"/>
-              </a:rPr>
-              <a:t>Nancy Verma</a:t>
-            </a:r>
-          </a:p>
-        </p:txBody>
-      </p:sp>
-      <p:sp>
-        <p:nvSpPr>
-          <p:cNvPr id="7" name="TextBox 6"/>
-          <p:cNvSpPr txBox="1"/>
-          <p:nvPr/>
-        </p:nvSpPr>
-        <p:spPr>
-          <a:xfrm>
-            <a:off x="777240" y="3154680"/>
-            <a:ext cx="9144000" cy="502920"/>
-          </a:xfrm>
-          <a:prstGeom prst="rect">
-            <a:avLst/>
-          </a:prstGeom>
-          <a:noFill/>
-        </p:spPr>
-        <p:txBody>
-          <a:bodyPr wrap="square" lIns="0" rIns="0" tIns="0" bIns="0" anchor="t"/>
-          <a:lstStyle/>
-          <a:p>
-            <a:pPr algn="l">
-              <a:spcBef>
-                <a:spcPts val="0"/>
-              </a:spcBef>
-              <a:spcAft>
-                <a:spcPts val="0"/>
-              </a:spcAft>
-            </a:pPr>
-            <a:r>
-              <a:rPr sz="3000" b="1" i="0">
-                <a:solidFill>
-                  <a:srgbClr val="FFFFFF"/>
-                </a:solidFill>
-                <a:latin typeface="Calibri"/>
-                <a:cs typeface="Calibri"/>
-                <a:ea typeface="Calibri"/>
-              </a:rPr>
-              <a:t>Amisha Singh</a:t>
-            </a:r>
-          </a:p>
-        </p:txBody>
-      </p:sp>
-      <p:sp>
-        <p:nvSpPr>
-          <p:cNvPr id="8" name="TextBox 7"/>
-          <p:cNvSpPr txBox="1"/>
-          <p:nvPr/>
-        </p:nvSpPr>
-        <p:spPr>
-          <a:xfrm>
-            <a:off x="777240" y="4160520"/>
-            <a:ext cx="10058400" cy="365760"/>
-          </a:xfrm>
-          <a:prstGeom prst="rect">
-            <a:avLst/>
-          </a:prstGeom>
-          <a:noFill/>
-        </p:spPr>
-        <p:txBody>
-          <a:bodyPr wrap="square" lIns="0" rIns="0" tIns="0" bIns="0" anchor="t"/>
-          <a:lstStyle/>
-          <a:p>
-            <a:pPr algn="l">
-              <a:spcBef>
-                <a:spcPts val="0"/>
-              </a:spcBef>
-              <a:spcAft>
-                <a:spcPts val="0"/>
-              </a:spcAft>
-            </a:pPr>
-            <a:r>
-              <a:rPr sz="1800" b="0" i="0">
-                <a:solidFill>
-                  <a:srgbClr val="C5D0DC"/>
-                </a:solidFill>
-                <a:latin typeface="Calibri"/>
-                <a:cs typeface="Calibri"/>
-                <a:ea typeface="Calibri"/>
-              </a:rPr>
-              <a:t>Live site    </a:t>
-            </a:r>
             <a:r>
               <a:rPr sz="1800" b="1" i="0">
                 <a:solidFill>
@@ -10335,14 +10604,14 @@
       </p:sp>
       <p:sp>
         <p:nvSpPr>
-          <p:cNvPr id="9" name="TextBox 8"/>
-          <p:cNvSpPr txBox="1"/>
-          <p:nvPr/>
-        </p:nvSpPr>
-        <p:spPr>
-          <a:xfrm>
-            <a:off x="777240" y="4663440"/>
-            <a:ext cx="10058400" cy="365760"/>
+          <p:cNvPr id="14" name="TextBox 13"/>
+          <p:cNvSpPr txBox="1"/>
+          <p:nvPr/>
+        </p:nvSpPr>
+        <p:spPr>
+          <a:xfrm>
+            <a:off x="5120640" y="4160520"/>
+            <a:ext cx="6583680" cy="292608"/>
           </a:xfrm>
           <a:prstGeom prst="rect">
             <a:avLst/>
@@ -10362,7 +10631,7 @@
               </a:spcAft>
             </a:pPr>
             <a:r>
-              <a:rPr sz="1800" b="0" i="0">
+              <a:rPr sz="1600" b="0" i="0">
                 <a:solidFill>
                   <a:srgbClr val="C5D0DC"/>
                 </a:solidFill>
@@ -10370,10 +10639,41 @@
                 <a:cs typeface="Calibri"/>
                 <a:ea typeface="Calibri"/>
               </a:rPr>
-              <a:t>GitHub    </a:t>
-            </a:r>
-            <a:r>
-              <a:rPr sz="1800" b="1" i="0">
+              <a:t>GitHub</a:t>
+            </a:r>
+          </a:p>
+        </p:txBody>
+      </p:sp>
+      <p:sp>
+        <p:nvSpPr>
+          <p:cNvPr id="15" name="TextBox 14"/>
+          <p:cNvSpPr txBox="1"/>
+          <p:nvPr/>
+        </p:nvSpPr>
+        <p:spPr>
+          <a:xfrm>
+            <a:off x="5120640" y="4480560"/>
+            <a:ext cx="6583680" cy="365760"/>
+          </a:xfrm>
+          <a:prstGeom prst="rect">
+            <a:avLst/>
+          </a:prstGeom>
+          <a:noFill/>
+        </p:spPr>
+        <p:txBody>
+          <a:bodyPr wrap="square" lIns="0" rIns="0" tIns="0" bIns="0" anchor="t"/>
+          <a:lstStyle/>
+          <a:p>
+            <a:pPr algn="l">
+              <a:spcBef>
+                <a:spcPts val="0"/>
+              </a:spcBef>
+              <a:spcAft>
+                <a:spcPts val="0"/>
+              </a:spcAft>
+            </a:pPr>
+            <a:r>
+              <a:rPr sz="1600" b="1" i="0">
                 <a:solidFill>
                   <a:srgbClr val="C4922A"/>
                 </a:solidFill>
@@ -10390,7 +10690,7 @@
       </p:sp>
       <p:sp>
         <p:nvSpPr>
-          <p:cNvPr id="10" name="TextBox 9"/>
+          <p:cNvPr id="16" name="TextBox 15"/>
           <p:cNvSpPr txBox="1"/>
           <p:nvPr/>
         </p:nvSpPr>
